--- a/presenations/Bayesian models les6.pptx
+++ b/presenations/Bayesian models les6.pptx
@@ -4,29 +4,32 @@
   <p:sldMasterIdLst>
     <p:sldMasterId id="2147483648" r:id="rId1"/>
   </p:sldMasterIdLst>
+  <p:notesMasterIdLst>
+    <p:notesMasterId r:id="rId22"/>
+  </p:notesMasterIdLst>
   <p:sldIdLst>
-    <p:sldId id="256" r:id="rId7"/>
-    <p:sldId id="257" r:id="rId9"/>
-    <p:sldId id="258" r:id="rId10"/>
-    <p:sldId id="259" r:id="rId11"/>
-    <p:sldId id="260" r:id="rId12"/>
-    <p:sldId id="261" r:id="rId13"/>
-    <p:sldId id="262" r:id="rId14"/>
-    <p:sldId id="263" r:id="rId15"/>
-    <p:sldId id="264" r:id="rId16"/>
-    <p:sldId id="265" r:id="rId17"/>
-    <p:sldId id="266" r:id="rId18"/>
-    <p:sldId id="267" r:id="rId19"/>
-    <p:sldId id="268" r:id="rId20"/>
-    <p:sldId id="269" r:id="rId21"/>
-    <p:sldId id="270" r:id="rId22"/>
-    <p:sldId id="271" r:id="rId23"/>
-    <p:sldId id="272" r:id="rId24"/>
-    <p:sldId id="273" r:id="rId25"/>
-    <p:sldId id="274" r:id="rId26"/>
-    <p:sldId id="275" r:id="rId27"/>
+    <p:sldId id="256" r:id="rId2"/>
+    <p:sldId id="257" r:id="rId3"/>
+    <p:sldId id="258" r:id="rId4"/>
+    <p:sldId id="259" r:id="rId5"/>
+    <p:sldId id="260" r:id="rId6"/>
+    <p:sldId id="261" r:id="rId7"/>
+    <p:sldId id="262" r:id="rId8"/>
+    <p:sldId id="263" r:id="rId9"/>
+    <p:sldId id="264" r:id="rId10"/>
+    <p:sldId id="265" r:id="rId11"/>
+    <p:sldId id="266" r:id="rId12"/>
+    <p:sldId id="267" r:id="rId13"/>
+    <p:sldId id="268" r:id="rId14"/>
+    <p:sldId id="269" r:id="rId15"/>
+    <p:sldId id="270" r:id="rId16"/>
+    <p:sldId id="271" r:id="rId17"/>
+    <p:sldId id="272" r:id="rId18"/>
+    <p:sldId id="273" r:id="rId19"/>
+    <p:sldId id="274" r:id="rId20"/>
+    <p:sldId id="275" r:id="rId21"/>
   </p:sldIdLst>
-  <p:sldSz cx="12191695" cy="6858000" type="screen4x3"/>
+  <p:sldSz cx="12192000" cy="6858000"/>
   <p:notesSz cx="6858000" cy="9144000"/>
   <p:defaultTextStyle>
     <a:defPPr>
@@ -123,11 +126,27 @@
       </a:defRPr>
     </a:lvl9pPr>
   </p:defaultTextStyle>
+  <p:extLst>
+    <p:ext uri="{EFAFB233-063F-42B5-8137-9DF3F51BA10A}">
+      <p15:sldGuideLst xmlns:p15="http://schemas.microsoft.com/office/powerpoint/2012/main">
+        <p15:guide id="1" orient="horz" pos="2160">
+          <p15:clr>
+            <a:srgbClr val="A4A3A4"/>
+          </p15:clr>
+        </p15:guide>
+        <p15:guide id="2" pos="2880">
+          <p15:clr>
+            <a:srgbClr val="A4A3A4"/>
+          </p15:clr>
+        </p15:guide>
+      </p15:sldGuideLst>
+    </p:ext>
+  </p:extLst>
 </p:presentation>
 </file>
 
 <file path=ppt/notesMasters/notesMaster1.xml><?xml version="1.0" encoding="utf-8"?>
-<p:notesMaster xmlns:a="http://schemas.openxmlformats.org/drawingml/2006/main" xmlns:p="http://schemas.openxmlformats.org/presentationml/2006/main" xmlns:r="http://schemas.openxmlformats.org/officeDocument/2006/relationships">
+<p:notesMaster xmlns:a="http://schemas.openxmlformats.org/drawingml/2006/main" xmlns:r="http://schemas.openxmlformats.org/officeDocument/2006/relationships" xmlns:p="http://schemas.openxmlformats.org/presentationml/2006/main">
   <p:cSld>
     <p:bg>
       <p:bgRef idx="1001">
@@ -148,241 +167,16 @@
           <a:chExt cx="0" cy="0"/>
         </a:xfrm>
       </p:grpSpPr>
-      <p:sp>
-        <p:nvSpPr>
-          <p:cNvPr id="2" name="Header Placeholder 1"/>
-          <p:cNvSpPr>
-            <a:spLocks noGrp="1"/>
-          </p:cNvSpPr>
-          <p:nvPr>
-            <p:ph type="hdr" sz="quarter"/>
-          </p:nvPr>
-        </p:nvSpPr>
-        <p:spPr>
-          <a:xfrm>
-            <a:off x="0" y="0"/>
-            <a:ext cx="2971800" cy="457200"/>
-          </a:xfrm>
-          <a:prstGeom prst="rect">
-            <a:avLst/>
-          </a:prstGeom>
-        </p:spPr>
-        <p:txBody>
-          <a:bodyPr vert="horz" lIns="91440" tIns="45720" rIns="91440" bIns="45720" rtlCol="0"/>
-          <a:lstStyle>
-            <a:lvl1pPr algn="l">
-              <a:defRPr sz="1200"/>
-            </a:lvl1pPr>
-          </a:lstStyle>
-          <a:p>
-            <a:endParaRPr lang="en-US"/>
-          </a:p>
-        </p:txBody>
-      </p:sp>
-      <p:sp>
-        <p:nvSpPr>
-          <p:cNvPr id="3" name="Date Placeholder 2"/>
-          <p:cNvSpPr>
-            <a:spLocks noGrp="1"/>
-          </p:cNvSpPr>
-          <p:nvPr>
-            <p:ph type="dt" idx="1"/>
-          </p:nvPr>
-        </p:nvSpPr>
-        <p:spPr>
-          <a:xfrm>
-            <a:off x="3884613" y="0"/>
-            <a:ext cx="2971800" cy="457200"/>
-          </a:xfrm>
-          <a:prstGeom prst="rect">
-            <a:avLst/>
-          </a:prstGeom>
-        </p:spPr>
-        <p:txBody>
-          <a:bodyPr vert="horz" lIns="91440" tIns="45720" rIns="91440" bIns="45720" rtlCol="0"/>
-          <a:lstStyle>
-            <a:lvl1pPr algn="r">
-              <a:defRPr sz="1200"/>
-            </a:lvl1pPr>
-          </a:lstStyle>
-          <a:p>
-            <a:fld id="{0F89C1C7-3DCD-1040-A9CF-14679D8B5DDD}" type="datetimeFigureOut">
-              <a:rPr lang="en-US" smtClean="0"/>
-              <a:t>10/17/16</a:t>
-            </a:fld>
-            <a:endParaRPr lang="en-US"/>
-          </a:p>
-        </p:txBody>
-      </p:sp>
-      <p:sp>
-        <p:nvSpPr>
-          <p:cNvPr id="4" name="Slide Image Placeholder 3"/>
-          <p:cNvSpPr>
-            <a:spLocks noGrp="1" noRot="1" noChangeAspect="1"/>
-          </p:cNvSpPr>
-          <p:nvPr>
-            <p:ph type="sldImg" idx="2"/>
-          </p:nvPr>
-        </p:nvSpPr>
-        <p:spPr>
-          <a:xfrm>
-            <a:off x="1143000" y="685800"/>
-            <a:ext cx="4572000" cy="3429000"/>
-          </a:xfrm>
-          <a:prstGeom prst="rect">
-            <a:avLst/>
-          </a:prstGeom>
-          <a:noFill/>
-          <a:ln w="12700">
-            <a:solidFill>
-              <a:prstClr val="black"/>
-            </a:solidFill>
-          </a:ln>
-        </p:spPr>
-        <p:txBody>
-          <a:bodyPr vert="horz" lIns="91440" tIns="45720" rIns="91440" bIns="45720" rtlCol="0" anchor="ctr"/>
-          <a:lstStyle/>
-          <a:p>
-            <a:endParaRPr lang="en-US"/>
-          </a:p>
-        </p:txBody>
-      </p:sp>
-      <p:sp>
-        <p:nvSpPr>
-          <p:cNvPr id="5" name="Notes Placeholder 4"/>
-          <p:cNvSpPr>
-            <a:spLocks noGrp="1"/>
-          </p:cNvSpPr>
-          <p:nvPr>
-            <p:ph type="body" sz="quarter" idx="3"/>
-          </p:nvPr>
-        </p:nvSpPr>
-        <p:spPr>
-          <a:xfrm>
-            <a:off x="685800" y="4343400"/>
-            <a:ext cx="5486400" cy="4114800"/>
-          </a:xfrm>
-          <a:prstGeom prst="rect">
-            <a:avLst/>
-          </a:prstGeom>
-        </p:spPr>
-        <p:txBody>
-          <a:bodyPr vert="horz" lIns="91440" tIns="45720" rIns="91440" bIns="45720" rtlCol="0"/>
-          <a:lstStyle/>
-          <a:p>
-            <a:pPr lvl="0"/>
-            <a:r>
-              <a:rPr lang="en-US" smtClean="0"/>
-              <a:t>Click to edit Master text styles</a:t>
-            </a:r>
-          </a:p>
-          <a:p>
-            <a:pPr lvl="1"/>
-            <a:r>
-              <a:rPr lang="en-US" smtClean="0"/>
-              <a:t>Second level</a:t>
-            </a:r>
-          </a:p>
-          <a:p>
-            <a:pPr lvl="2"/>
-            <a:r>
-              <a:rPr lang="en-US" smtClean="0"/>
-              <a:t>Third level</a:t>
-            </a:r>
-          </a:p>
-          <a:p>
-            <a:pPr lvl="3"/>
-            <a:r>
-              <a:rPr lang="en-US" smtClean="0"/>
-              <a:t>Fourth level</a:t>
-            </a:r>
-          </a:p>
-          <a:p>
-            <a:pPr lvl="4"/>
-            <a:r>
-              <a:rPr lang="en-US" smtClean="0"/>
-              <a:t>Fifth level</a:t>
-            </a:r>
-            <a:endParaRPr lang="en-US"/>
-          </a:p>
-        </p:txBody>
-      </p:sp>
-      <p:sp>
-        <p:nvSpPr>
-          <p:cNvPr id="6" name="Footer Placeholder 5"/>
-          <p:cNvSpPr>
-            <a:spLocks noGrp="1"/>
-          </p:cNvSpPr>
-          <p:nvPr>
-            <p:ph type="ftr" sz="quarter" idx="4"/>
-          </p:nvPr>
-        </p:nvSpPr>
-        <p:spPr>
-          <a:xfrm>
-            <a:off x="0" y="8685213"/>
-            <a:ext cx="2971800" cy="457200"/>
-          </a:xfrm>
-          <a:prstGeom prst="rect">
-            <a:avLst/>
-          </a:prstGeom>
-        </p:spPr>
-        <p:txBody>
-          <a:bodyPr vert="horz" lIns="91440" tIns="45720" rIns="91440" bIns="45720" rtlCol="0" anchor="b"/>
-          <a:lstStyle>
-            <a:lvl1pPr algn="l">
-              <a:defRPr sz="1200"/>
-            </a:lvl1pPr>
-          </a:lstStyle>
-          <a:p>
-            <a:endParaRPr lang="en-US"/>
-          </a:p>
-        </p:txBody>
-      </p:sp>
-      <p:sp>
-        <p:nvSpPr>
-          <p:cNvPr id="7" name="Slide Number Placeholder 6"/>
-          <p:cNvSpPr>
-            <a:spLocks noGrp="1"/>
-          </p:cNvSpPr>
-          <p:nvPr>
-            <p:ph type="sldNum" sz="quarter" idx="5"/>
-          </p:nvPr>
-        </p:nvSpPr>
-        <p:spPr>
-          <a:xfrm>
-            <a:off x="3884613" y="8685213"/>
-            <a:ext cx="2971800" cy="457200"/>
-          </a:xfrm>
-          <a:prstGeom prst="rect">
-            <a:avLst/>
-          </a:prstGeom>
-        </p:spPr>
-        <p:txBody>
-          <a:bodyPr vert="horz" lIns="91440" tIns="45720" rIns="91440" bIns="45720" rtlCol="0" anchor="b"/>
-          <a:lstStyle>
-            <a:lvl1pPr algn="r">
-              <a:defRPr sz="1200"/>
-            </a:lvl1pPr>
-          </a:lstStyle>
-          <a:p>
-            <a:fld id="{BB5E49A5-4136-284D-997B-48E1D791AD67}" type="slidenum">
-              <a:rPr lang="en-US" smtClean="0"/>
-              <a:t>‹#›</a:t>
-            </a:fld>
-            <a:endParaRPr lang="en-US"/>
-          </a:p>
-        </p:txBody>
-      </p:sp>
     </p:spTree>
     <p:extLst>
       <p:ext uri="{BB962C8B-B14F-4D97-AF65-F5344CB8AC3E}">
-        <p14:creationId xmlns:p14="http://schemas.microsoft.com/office/powerpoint/2010/main" val="2623252185"/>
+        <p14:creationId xmlns:p14="http://schemas.microsoft.com/office/powerpoint/2010/main" val="3013060480"/>
       </p:ext>
     </p:extLst>
   </p:cSld>
   <p:clrMap bg1="lt1" tx1="dk1" bg2="lt2" tx2="dk2" accent1="accent1" accent2="accent2" accent3="accent3" accent4="accent4" accent5="accent5" accent6="accent6" hlink="hlink" folHlink="folHlink"/>
   <p:notesStyle>
-    <a:lvl1pPr marL="0" algn="l" defTabSz="457200" rtl="0" eaLnBrk="1" latinLnBrk="0" hangingPunct="1">
+    <a:lvl1pPr marL="0" algn="l" defTabSz="914400" rtl="0" eaLnBrk="1" latinLnBrk="0" hangingPunct="1">
       <a:defRPr sz="1200" kern="1200">
         <a:solidFill>
           <a:schemeClr val="tx1"/>
@@ -392,7 +186,7 @@
         <a:cs typeface="+mn-cs"/>
       </a:defRPr>
     </a:lvl1pPr>
-    <a:lvl2pPr marL="457200" algn="l" defTabSz="457200" rtl="0" eaLnBrk="1" latinLnBrk="0" hangingPunct="1">
+    <a:lvl2pPr marL="457200" algn="l" defTabSz="914400" rtl="0" eaLnBrk="1" latinLnBrk="0" hangingPunct="1">
       <a:defRPr sz="1200" kern="1200">
         <a:solidFill>
           <a:schemeClr val="tx1"/>
@@ -402,7 +196,7 @@
         <a:cs typeface="+mn-cs"/>
       </a:defRPr>
     </a:lvl2pPr>
-    <a:lvl3pPr marL="914400" algn="l" defTabSz="457200" rtl="0" eaLnBrk="1" latinLnBrk="0" hangingPunct="1">
+    <a:lvl3pPr marL="914400" algn="l" defTabSz="914400" rtl="0" eaLnBrk="1" latinLnBrk="0" hangingPunct="1">
       <a:defRPr sz="1200" kern="1200">
         <a:solidFill>
           <a:schemeClr val="tx1"/>
@@ -412,7 +206,7 @@
         <a:cs typeface="+mn-cs"/>
       </a:defRPr>
     </a:lvl3pPr>
-    <a:lvl4pPr marL="1371600" algn="l" defTabSz="457200" rtl="0" eaLnBrk="1" latinLnBrk="0" hangingPunct="1">
+    <a:lvl4pPr marL="1371600" algn="l" defTabSz="914400" rtl="0" eaLnBrk="1" latinLnBrk="0" hangingPunct="1">
       <a:defRPr sz="1200" kern="1200">
         <a:solidFill>
           <a:schemeClr val="tx1"/>
@@ -422,7 +216,7 @@
         <a:cs typeface="+mn-cs"/>
       </a:defRPr>
     </a:lvl4pPr>
-    <a:lvl5pPr marL="1828800" algn="l" defTabSz="457200" rtl="0" eaLnBrk="1" latinLnBrk="0" hangingPunct="1">
+    <a:lvl5pPr marL="1828800" algn="l" defTabSz="914400" rtl="0" eaLnBrk="1" latinLnBrk="0" hangingPunct="1">
       <a:defRPr sz="1200" kern="1200">
         <a:solidFill>
           <a:schemeClr val="tx1"/>
@@ -432,7 +226,7 @@
         <a:cs typeface="+mn-cs"/>
       </a:defRPr>
     </a:lvl5pPr>
-    <a:lvl6pPr marL="2286000" algn="l" defTabSz="457200" rtl="0" eaLnBrk="1" latinLnBrk="0" hangingPunct="1">
+    <a:lvl6pPr marL="2286000" algn="l" defTabSz="914400" rtl="0" eaLnBrk="1" latinLnBrk="0" hangingPunct="1">
       <a:defRPr sz="1200" kern="1200">
         <a:solidFill>
           <a:schemeClr val="tx1"/>
@@ -442,7 +236,7 @@
         <a:cs typeface="+mn-cs"/>
       </a:defRPr>
     </a:lvl6pPr>
-    <a:lvl7pPr marL="2743200" algn="l" defTabSz="457200" rtl="0" eaLnBrk="1" latinLnBrk="0" hangingPunct="1">
+    <a:lvl7pPr marL="2743200" algn="l" defTabSz="914400" rtl="0" eaLnBrk="1" latinLnBrk="0" hangingPunct="1">
       <a:defRPr sz="1200" kern="1200">
         <a:solidFill>
           <a:schemeClr val="tx1"/>
@@ -452,7 +246,7 @@
         <a:cs typeface="+mn-cs"/>
       </a:defRPr>
     </a:lvl7pPr>
-    <a:lvl8pPr marL="3200400" algn="l" defTabSz="457200" rtl="0" eaLnBrk="1" latinLnBrk="0" hangingPunct="1">
+    <a:lvl8pPr marL="3200400" algn="l" defTabSz="914400" rtl="0" eaLnBrk="1" latinLnBrk="0" hangingPunct="1">
       <a:defRPr sz="1200" kern="1200">
         <a:solidFill>
           <a:schemeClr val="tx1"/>
@@ -462,7 +256,7 @@
         <a:cs typeface="+mn-cs"/>
       </a:defRPr>
     </a:lvl8pPr>
-    <a:lvl9pPr marL="3657600" algn="l" defTabSz="457200" rtl="0" eaLnBrk="1" latinLnBrk="0" hangingPunct="1">
+    <a:lvl9pPr marL="3657600" algn="l" defTabSz="914400" rtl="0" eaLnBrk="1" latinLnBrk="0" hangingPunct="1">
       <a:defRPr sz="1200" kern="1200">
         <a:solidFill>
           <a:schemeClr val="tx1"/>
@@ -477,7 +271,7 @@
 </file>
 
 <file path=ppt/notesSlides/notesSlide1.xml><?xml version="1.0" encoding="utf-8"?>
-<p:notes xmlns:a="http://schemas.openxmlformats.org/drawingml/2006/main" xmlns:p="http://schemas.openxmlformats.org/presentationml/2006/main" xmlns:r="http://schemas.openxmlformats.org/officeDocument/2006/relationships">
+<p:notes xmlns:a="http://schemas.openxmlformats.org/drawingml/2006/main" xmlns:r="http://schemas.openxmlformats.org/officeDocument/2006/relationships" xmlns:p="http://schemas.openxmlformats.org/presentationml/2006/main">
   <p:cSld>
     <p:spTree>
       <p:nvGrpSpPr>
@@ -497,7 +291,7 @@
         <p:nvSpPr>
           <p:cNvPr id="2" name="Slide Image Placeholder 1"/>
           <p:cNvSpPr>
-            <a:spLocks noGrp="1"/>
+            <a:spLocks noGrp="1" noRot="1" noChangeAspect="1"/>
           </p:cNvSpPr>
           <p:nvPr>
             <p:ph type="sldImg" idx="2"/>
@@ -512,7 +306,7 @@
             <a:spLocks noGrp="1"/>
           </p:cNvSpPr>
           <p:nvPr>
-            <p:ph type="body" idx="3" sz="quarter"/>
+            <p:ph type="body" sz="quarter" idx="3"/>
           </p:nvPr>
         </p:nvSpPr>
         <p:spPr/>
@@ -535,7 +329,7 @@
             <a:spLocks noGrp="1"/>
           </p:cNvSpPr>
           <p:nvPr>
-            <p:ph type="sldNum" idx="5" sz="quarter"/>
+            <p:ph type="sldNum" sz="quarter" idx="5"/>
           </p:nvPr>
         </p:nvSpPr>
         <p:spPr/>
@@ -549,7 +343,7 @@
 </file>
 
 <file path=ppt/notesSlides/notesSlide10.xml><?xml version="1.0" encoding="utf-8"?>
-<p:notes xmlns:a="http://schemas.openxmlformats.org/drawingml/2006/main" xmlns:p="http://schemas.openxmlformats.org/presentationml/2006/main" xmlns:r="http://schemas.openxmlformats.org/officeDocument/2006/relationships">
+<p:notes xmlns:a="http://schemas.openxmlformats.org/drawingml/2006/main" xmlns:r="http://schemas.openxmlformats.org/officeDocument/2006/relationships" xmlns:p="http://schemas.openxmlformats.org/presentationml/2006/main">
   <p:cSld>
     <p:spTree>
       <p:nvGrpSpPr>
@@ -569,7 +363,7 @@
         <p:nvSpPr>
           <p:cNvPr id="2" name="Slide Image Placeholder 1"/>
           <p:cNvSpPr>
-            <a:spLocks noGrp="1"/>
+            <a:spLocks noGrp="1" noRot="1" noChangeAspect="1"/>
           </p:cNvSpPr>
           <p:nvPr>
             <p:ph type="sldImg" idx="2"/>
@@ -584,7 +378,7 @@
             <a:spLocks noGrp="1"/>
           </p:cNvSpPr>
           <p:nvPr>
-            <p:ph type="body" idx="3" sz="quarter"/>
+            <p:ph type="body" sz="quarter" idx="3"/>
           </p:nvPr>
         </p:nvSpPr>
         <p:spPr/>
@@ -607,7 +401,7 @@
             <a:spLocks noGrp="1"/>
           </p:cNvSpPr>
           <p:nvPr>
-            <p:ph type="sldNum" idx="5" sz="quarter"/>
+            <p:ph type="sldNum" sz="quarter" idx="5"/>
           </p:nvPr>
         </p:nvSpPr>
         <p:spPr/>
@@ -621,7 +415,7 @@
 </file>
 
 <file path=ppt/notesSlides/notesSlide11.xml><?xml version="1.0" encoding="utf-8"?>
-<p:notes xmlns:a="http://schemas.openxmlformats.org/drawingml/2006/main" xmlns:p="http://schemas.openxmlformats.org/presentationml/2006/main" xmlns:r="http://schemas.openxmlformats.org/officeDocument/2006/relationships">
+<p:notes xmlns:a="http://schemas.openxmlformats.org/drawingml/2006/main" xmlns:r="http://schemas.openxmlformats.org/officeDocument/2006/relationships" xmlns:p="http://schemas.openxmlformats.org/presentationml/2006/main">
   <p:cSld>
     <p:spTree>
       <p:nvGrpSpPr>
@@ -641,7 +435,7 @@
         <p:nvSpPr>
           <p:cNvPr id="2" name="Slide Image Placeholder 1"/>
           <p:cNvSpPr>
-            <a:spLocks noGrp="1"/>
+            <a:spLocks noGrp="1" noRot="1" noChangeAspect="1"/>
           </p:cNvSpPr>
           <p:nvPr>
             <p:ph type="sldImg" idx="2"/>
@@ -656,7 +450,7 @@
             <a:spLocks noGrp="1"/>
           </p:cNvSpPr>
           <p:nvPr>
-            <p:ph type="body" idx="3" sz="quarter"/>
+            <p:ph type="body" sz="quarter" idx="3"/>
           </p:nvPr>
         </p:nvSpPr>
         <p:spPr/>
@@ -679,7 +473,7 @@
             <a:spLocks noGrp="1"/>
           </p:cNvSpPr>
           <p:nvPr>
-            <p:ph type="sldNum" idx="5" sz="quarter"/>
+            <p:ph type="sldNum" sz="quarter" idx="5"/>
           </p:nvPr>
         </p:nvSpPr>
         <p:spPr/>
@@ -693,7 +487,7 @@
 </file>
 
 <file path=ppt/notesSlides/notesSlide12.xml><?xml version="1.0" encoding="utf-8"?>
-<p:notes xmlns:a="http://schemas.openxmlformats.org/drawingml/2006/main" xmlns:p="http://schemas.openxmlformats.org/presentationml/2006/main" xmlns:r="http://schemas.openxmlformats.org/officeDocument/2006/relationships">
+<p:notes xmlns:a="http://schemas.openxmlformats.org/drawingml/2006/main" xmlns:r="http://schemas.openxmlformats.org/officeDocument/2006/relationships" xmlns:p="http://schemas.openxmlformats.org/presentationml/2006/main">
   <p:cSld>
     <p:spTree>
       <p:nvGrpSpPr>
@@ -713,7 +507,7 @@
         <p:nvSpPr>
           <p:cNvPr id="2" name="Slide Image Placeholder 1"/>
           <p:cNvSpPr>
-            <a:spLocks noGrp="1"/>
+            <a:spLocks noGrp="1" noRot="1" noChangeAspect="1"/>
           </p:cNvSpPr>
           <p:nvPr>
             <p:ph type="sldImg" idx="2"/>
@@ -728,7 +522,7 @@
             <a:spLocks noGrp="1"/>
           </p:cNvSpPr>
           <p:nvPr>
-            <p:ph type="body" idx="3" sz="quarter"/>
+            <p:ph type="body" sz="quarter" idx="3"/>
           </p:nvPr>
         </p:nvSpPr>
         <p:spPr/>
@@ -751,7 +545,7 @@
             <a:spLocks noGrp="1"/>
           </p:cNvSpPr>
           <p:nvPr>
-            <p:ph type="sldNum" idx="5" sz="quarter"/>
+            <p:ph type="sldNum" sz="quarter" idx="5"/>
           </p:nvPr>
         </p:nvSpPr>
         <p:spPr/>
@@ -765,7 +559,7 @@
 </file>
 
 <file path=ppt/notesSlides/notesSlide13.xml><?xml version="1.0" encoding="utf-8"?>
-<p:notes xmlns:a="http://schemas.openxmlformats.org/drawingml/2006/main" xmlns:p="http://schemas.openxmlformats.org/presentationml/2006/main" xmlns:r="http://schemas.openxmlformats.org/officeDocument/2006/relationships">
+<p:notes xmlns:a="http://schemas.openxmlformats.org/drawingml/2006/main" xmlns:r="http://schemas.openxmlformats.org/officeDocument/2006/relationships" xmlns:p="http://schemas.openxmlformats.org/presentationml/2006/main">
   <p:cSld>
     <p:spTree>
       <p:nvGrpSpPr>
@@ -785,7 +579,7 @@
         <p:nvSpPr>
           <p:cNvPr id="2" name="Slide Image Placeholder 1"/>
           <p:cNvSpPr>
-            <a:spLocks noGrp="1"/>
+            <a:spLocks noGrp="1" noRot="1" noChangeAspect="1"/>
           </p:cNvSpPr>
           <p:nvPr>
             <p:ph type="sldImg" idx="2"/>
@@ -800,7 +594,7 @@
             <a:spLocks noGrp="1"/>
           </p:cNvSpPr>
           <p:nvPr>
-            <p:ph type="body" idx="3" sz="quarter"/>
+            <p:ph type="body" sz="quarter" idx="3"/>
           </p:nvPr>
         </p:nvSpPr>
         <p:spPr/>
@@ -823,7 +617,7 @@
             <a:spLocks noGrp="1"/>
           </p:cNvSpPr>
           <p:nvPr>
-            <p:ph type="sldNum" idx="5" sz="quarter"/>
+            <p:ph type="sldNum" sz="quarter" idx="5"/>
           </p:nvPr>
         </p:nvSpPr>
         <p:spPr/>
@@ -837,7 +631,7 @@
 </file>
 
 <file path=ppt/notesSlides/notesSlide14.xml><?xml version="1.0" encoding="utf-8"?>
-<p:notes xmlns:a="http://schemas.openxmlformats.org/drawingml/2006/main" xmlns:p="http://schemas.openxmlformats.org/presentationml/2006/main" xmlns:r="http://schemas.openxmlformats.org/officeDocument/2006/relationships">
+<p:notes xmlns:a="http://schemas.openxmlformats.org/drawingml/2006/main" xmlns:r="http://schemas.openxmlformats.org/officeDocument/2006/relationships" xmlns:p="http://schemas.openxmlformats.org/presentationml/2006/main">
   <p:cSld>
     <p:spTree>
       <p:nvGrpSpPr>
@@ -857,7 +651,7 @@
         <p:nvSpPr>
           <p:cNvPr id="2" name="Slide Image Placeholder 1"/>
           <p:cNvSpPr>
-            <a:spLocks noGrp="1"/>
+            <a:spLocks noGrp="1" noRot="1" noChangeAspect="1"/>
           </p:cNvSpPr>
           <p:nvPr>
             <p:ph type="sldImg" idx="2"/>
@@ -872,7 +666,7 @@
             <a:spLocks noGrp="1"/>
           </p:cNvSpPr>
           <p:nvPr>
-            <p:ph type="body" idx="3" sz="quarter"/>
+            <p:ph type="body" sz="quarter" idx="3"/>
           </p:nvPr>
         </p:nvSpPr>
         <p:spPr/>
@@ -895,7 +689,7 @@
             <a:spLocks noGrp="1"/>
           </p:cNvSpPr>
           <p:nvPr>
-            <p:ph type="sldNum" idx="5" sz="quarter"/>
+            <p:ph type="sldNum" sz="quarter" idx="5"/>
           </p:nvPr>
         </p:nvSpPr>
         <p:spPr/>
@@ -909,7 +703,7 @@
 </file>
 
 <file path=ppt/notesSlides/notesSlide15.xml><?xml version="1.0" encoding="utf-8"?>
-<p:notes xmlns:a="http://schemas.openxmlformats.org/drawingml/2006/main" xmlns:p="http://schemas.openxmlformats.org/presentationml/2006/main" xmlns:r="http://schemas.openxmlformats.org/officeDocument/2006/relationships">
+<p:notes xmlns:a="http://schemas.openxmlformats.org/drawingml/2006/main" xmlns:r="http://schemas.openxmlformats.org/officeDocument/2006/relationships" xmlns:p="http://schemas.openxmlformats.org/presentationml/2006/main">
   <p:cSld>
     <p:spTree>
       <p:nvGrpSpPr>
@@ -929,7 +723,7 @@
         <p:nvSpPr>
           <p:cNvPr id="2" name="Slide Image Placeholder 1"/>
           <p:cNvSpPr>
-            <a:spLocks noGrp="1"/>
+            <a:spLocks noGrp="1" noRot="1" noChangeAspect="1"/>
           </p:cNvSpPr>
           <p:nvPr>
             <p:ph type="sldImg" idx="2"/>
@@ -944,7 +738,7 @@
             <a:spLocks noGrp="1"/>
           </p:cNvSpPr>
           <p:nvPr>
-            <p:ph type="body" idx="3" sz="quarter"/>
+            <p:ph type="body" sz="quarter" idx="3"/>
           </p:nvPr>
         </p:nvSpPr>
         <p:spPr/>
@@ -955,7 +749,7 @@
             <a:pPr algn="r" rtl="1"/>
             <a:r>
               <a:rPr lang="he-IL"/>
-              <a:t>התפלגות t עם שלושה פרמטרים: מיקום μ, סקאלה σ ודרגות חופש ν. ככל ש-ν גדל, ההתפלגות מתקרבת לנורמלית; ν קטן נותן זנבות כבדים. בגרף בסקאלת לוג רואים שהזנבות של t עם ν=2 גבוהים בסדרי גודל מאלה של הנורמלית - ולכן ערך חריג לא מושך את הממוצע. ל-ν נותנים prior אקספוננציאלי עם ממוצע 30, שמכסה את כל הטווח - מזנבות כבדים ועד כמעט נורמלי. נניח ש-ν משותף לשתי הקבוצות.</a:t>
+              <a:t>התפלגות t עם שלושה פרמטרים: מיקום μ, סקאלה σ ודרגות חופש ν. ככל ש-ν גדל, ההתפלגות מתקרבת לנורמלית; ν קטן נותן זנבות כבדים. בגרף רואים שלהתפלגות t עם ν=2 שיא נמוך יותר וזנבות עבים יותר מאלה של הנורמלית - ולכן ערך חריג לא מושך את הממוצע. ל-ν נותנים prior אקספוננציאלי עם ממוצע 30, שמכסה את כל הטווח - מזנבות כבדים ועד כמעט נורמלי. נניח ש-ν משותף לשתי הקבוצות.</a:t>
             </a:r>
           </a:p>
         </p:txBody>
@@ -967,7 +761,7 @@
             <a:spLocks noGrp="1"/>
           </p:cNvSpPr>
           <p:nvPr>
-            <p:ph type="sldNum" idx="5" sz="quarter"/>
+            <p:ph type="sldNum" sz="quarter" idx="5"/>
           </p:nvPr>
         </p:nvSpPr>
         <p:spPr/>
@@ -981,7 +775,7 @@
 </file>
 
 <file path=ppt/notesSlides/notesSlide16.xml><?xml version="1.0" encoding="utf-8"?>
-<p:notes xmlns:a="http://schemas.openxmlformats.org/drawingml/2006/main" xmlns:p="http://schemas.openxmlformats.org/presentationml/2006/main" xmlns:r="http://schemas.openxmlformats.org/officeDocument/2006/relationships">
+<p:notes xmlns:a="http://schemas.openxmlformats.org/drawingml/2006/main" xmlns:r="http://schemas.openxmlformats.org/officeDocument/2006/relationships" xmlns:p="http://schemas.openxmlformats.org/presentationml/2006/main">
   <p:cSld>
     <p:spTree>
       <p:nvGrpSpPr>
@@ -1001,7 +795,7 @@
         <p:nvSpPr>
           <p:cNvPr id="2" name="Slide Image Placeholder 1"/>
           <p:cNvSpPr>
-            <a:spLocks noGrp="1"/>
+            <a:spLocks noGrp="1" noRot="1" noChangeAspect="1"/>
           </p:cNvSpPr>
           <p:nvPr>
             <p:ph type="sldImg" idx="2"/>
@@ -1016,7 +810,7 @@
             <a:spLocks noGrp="1"/>
           </p:cNvSpPr>
           <p:nvPr>
-            <p:ph type="body" idx="3" sz="quarter"/>
+            <p:ph type="body" sz="quarter" idx="3"/>
           </p:nvPr>
         </p:nvSpPr>
         <p:spPr/>
@@ -1039,7 +833,7 @@
             <a:spLocks noGrp="1"/>
           </p:cNvSpPr>
           <p:nvPr>
-            <p:ph type="sldNum" idx="5" sz="quarter"/>
+            <p:ph type="sldNum" sz="quarter" idx="5"/>
           </p:nvPr>
         </p:nvSpPr>
         <p:spPr/>
@@ -1053,7 +847,7 @@
 </file>
 
 <file path=ppt/notesSlides/notesSlide17.xml><?xml version="1.0" encoding="utf-8"?>
-<p:notes xmlns:a="http://schemas.openxmlformats.org/drawingml/2006/main" xmlns:p="http://schemas.openxmlformats.org/presentationml/2006/main" xmlns:r="http://schemas.openxmlformats.org/officeDocument/2006/relationships">
+<p:notes xmlns:a="http://schemas.openxmlformats.org/drawingml/2006/main" xmlns:r="http://schemas.openxmlformats.org/officeDocument/2006/relationships" xmlns:p="http://schemas.openxmlformats.org/presentationml/2006/main">
   <p:cSld>
     <p:spTree>
       <p:nvGrpSpPr>
@@ -1073,7 +867,7 @@
         <p:nvSpPr>
           <p:cNvPr id="2" name="Slide Image Placeholder 1"/>
           <p:cNvSpPr>
-            <a:spLocks noGrp="1"/>
+            <a:spLocks noGrp="1" noRot="1" noChangeAspect="1"/>
           </p:cNvSpPr>
           <p:nvPr>
             <p:ph type="sldImg" idx="2"/>
@@ -1088,7 +882,7 @@
             <a:spLocks noGrp="1"/>
           </p:cNvSpPr>
           <p:nvPr>
-            <p:ph type="body" idx="3" sz="quarter"/>
+            <p:ph type="body" sz="quarter" idx="3"/>
           </p:nvPr>
         </p:nvSpPr>
         <p:spPr/>
@@ -1111,7 +905,7 @@
             <a:spLocks noGrp="1"/>
           </p:cNvSpPr>
           <p:nvPr>
-            <p:ph type="sldNum" idx="5" sz="quarter"/>
+            <p:ph type="sldNum" sz="quarter" idx="5"/>
           </p:nvPr>
         </p:nvSpPr>
         <p:spPr/>
@@ -1125,7 +919,7 @@
 </file>
 
 <file path=ppt/notesSlides/notesSlide18.xml><?xml version="1.0" encoding="utf-8"?>
-<p:notes xmlns:a="http://schemas.openxmlformats.org/drawingml/2006/main" xmlns:p="http://schemas.openxmlformats.org/presentationml/2006/main" xmlns:r="http://schemas.openxmlformats.org/officeDocument/2006/relationships">
+<p:notes xmlns:a="http://schemas.openxmlformats.org/drawingml/2006/main" xmlns:r="http://schemas.openxmlformats.org/officeDocument/2006/relationships" xmlns:p="http://schemas.openxmlformats.org/presentationml/2006/main">
   <p:cSld>
     <p:spTree>
       <p:nvGrpSpPr>
@@ -1145,7 +939,7 @@
         <p:nvSpPr>
           <p:cNvPr id="2" name="Slide Image Placeholder 1"/>
           <p:cNvSpPr>
-            <a:spLocks noGrp="1"/>
+            <a:spLocks noGrp="1" noRot="1" noChangeAspect="1"/>
           </p:cNvSpPr>
           <p:nvPr>
             <p:ph type="sldImg" idx="2"/>
@@ -1160,7 +954,7 @@
             <a:spLocks noGrp="1"/>
           </p:cNvSpPr>
           <p:nvPr>
-            <p:ph type="body" idx="3" sz="quarter"/>
+            <p:ph type="body" sz="quarter" idx="3"/>
           </p:nvPr>
         </p:nvSpPr>
         <p:spPr/>
@@ -1183,7 +977,7 @@
             <a:spLocks noGrp="1"/>
           </p:cNvSpPr>
           <p:nvPr>
-            <p:ph type="sldNum" idx="5" sz="quarter"/>
+            <p:ph type="sldNum" sz="quarter" idx="5"/>
           </p:nvPr>
         </p:nvSpPr>
         <p:spPr/>
@@ -1197,7 +991,7 @@
 </file>
 
 <file path=ppt/notesSlides/notesSlide19.xml><?xml version="1.0" encoding="utf-8"?>
-<p:notes xmlns:a="http://schemas.openxmlformats.org/drawingml/2006/main" xmlns:p="http://schemas.openxmlformats.org/presentationml/2006/main" xmlns:r="http://schemas.openxmlformats.org/officeDocument/2006/relationships">
+<p:notes xmlns:a="http://schemas.openxmlformats.org/drawingml/2006/main" xmlns:r="http://schemas.openxmlformats.org/officeDocument/2006/relationships" xmlns:p="http://schemas.openxmlformats.org/presentationml/2006/main">
   <p:cSld>
     <p:spTree>
       <p:nvGrpSpPr>
@@ -1217,7 +1011,7 @@
         <p:nvSpPr>
           <p:cNvPr id="2" name="Slide Image Placeholder 1"/>
           <p:cNvSpPr>
-            <a:spLocks noGrp="1"/>
+            <a:spLocks noGrp="1" noRot="1" noChangeAspect="1"/>
           </p:cNvSpPr>
           <p:nvPr>
             <p:ph type="sldImg" idx="2"/>
@@ -1232,7 +1026,7 @@
             <a:spLocks noGrp="1"/>
           </p:cNvSpPr>
           <p:nvPr>
-            <p:ph type="body" idx="3" sz="quarter"/>
+            <p:ph type="body" sz="quarter" idx="3"/>
           </p:nvPr>
         </p:nvSpPr>
         <p:spPr/>
@@ -1255,7 +1049,7 @@
             <a:spLocks noGrp="1"/>
           </p:cNvSpPr>
           <p:nvPr>
-            <p:ph type="sldNum" idx="5" sz="quarter"/>
+            <p:ph type="sldNum" sz="quarter" idx="5"/>
           </p:nvPr>
         </p:nvSpPr>
         <p:spPr/>
@@ -1269,7 +1063,7 @@
 </file>
 
 <file path=ppt/notesSlides/notesSlide2.xml><?xml version="1.0" encoding="utf-8"?>
-<p:notes xmlns:a="http://schemas.openxmlformats.org/drawingml/2006/main" xmlns:p="http://schemas.openxmlformats.org/presentationml/2006/main" xmlns:r="http://schemas.openxmlformats.org/officeDocument/2006/relationships">
+<p:notes xmlns:a="http://schemas.openxmlformats.org/drawingml/2006/main" xmlns:r="http://schemas.openxmlformats.org/officeDocument/2006/relationships" xmlns:p="http://schemas.openxmlformats.org/presentationml/2006/main">
   <p:cSld>
     <p:spTree>
       <p:nvGrpSpPr>
@@ -1289,7 +1083,7 @@
         <p:nvSpPr>
           <p:cNvPr id="2" name="Slide Image Placeholder 1"/>
           <p:cNvSpPr>
-            <a:spLocks noGrp="1"/>
+            <a:spLocks noGrp="1" noRot="1" noChangeAspect="1"/>
           </p:cNvSpPr>
           <p:nvPr>
             <p:ph type="sldImg" idx="2"/>
@@ -1304,7 +1098,7 @@
             <a:spLocks noGrp="1"/>
           </p:cNvSpPr>
           <p:nvPr>
-            <p:ph type="body" idx="3" sz="quarter"/>
+            <p:ph type="body" sz="quarter" idx="3"/>
           </p:nvPr>
         </p:nvSpPr>
         <p:spPr/>
@@ -1327,7 +1121,7 @@
             <a:spLocks noGrp="1"/>
           </p:cNvSpPr>
           <p:nvPr>
-            <p:ph type="sldNum" idx="5" sz="quarter"/>
+            <p:ph type="sldNum" sz="quarter" idx="5"/>
           </p:nvPr>
         </p:nvSpPr>
         <p:spPr/>
@@ -1341,7 +1135,7 @@
 </file>
 
 <file path=ppt/notesSlides/notesSlide20.xml><?xml version="1.0" encoding="utf-8"?>
-<p:notes xmlns:a="http://schemas.openxmlformats.org/drawingml/2006/main" xmlns:p="http://schemas.openxmlformats.org/presentationml/2006/main" xmlns:r="http://schemas.openxmlformats.org/officeDocument/2006/relationships">
+<p:notes xmlns:a="http://schemas.openxmlformats.org/drawingml/2006/main" xmlns:r="http://schemas.openxmlformats.org/officeDocument/2006/relationships" xmlns:p="http://schemas.openxmlformats.org/presentationml/2006/main">
   <p:cSld>
     <p:spTree>
       <p:nvGrpSpPr>
@@ -1361,7 +1155,7 @@
         <p:nvSpPr>
           <p:cNvPr id="2" name="Slide Image Placeholder 1"/>
           <p:cNvSpPr>
-            <a:spLocks noGrp="1"/>
+            <a:spLocks noGrp="1" noRot="1" noChangeAspect="1"/>
           </p:cNvSpPr>
           <p:nvPr>
             <p:ph type="sldImg" idx="2"/>
@@ -1376,7 +1170,7 @@
             <a:spLocks noGrp="1"/>
           </p:cNvSpPr>
           <p:nvPr>
-            <p:ph type="body" idx="3" sz="quarter"/>
+            <p:ph type="body" sz="quarter" idx="3"/>
           </p:nvPr>
         </p:nvSpPr>
         <p:spPr/>
@@ -1399,7 +1193,7 @@
             <a:spLocks noGrp="1"/>
           </p:cNvSpPr>
           <p:nvPr>
-            <p:ph type="sldNum" idx="5" sz="quarter"/>
+            <p:ph type="sldNum" sz="quarter" idx="5"/>
           </p:nvPr>
         </p:nvSpPr>
         <p:spPr/>
@@ -1413,7 +1207,7 @@
 </file>
 
 <file path=ppt/notesSlides/notesSlide3.xml><?xml version="1.0" encoding="utf-8"?>
-<p:notes xmlns:a="http://schemas.openxmlformats.org/drawingml/2006/main" xmlns:p="http://schemas.openxmlformats.org/presentationml/2006/main" xmlns:r="http://schemas.openxmlformats.org/officeDocument/2006/relationships">
+<p:notes xmlns:a="http://schemas.openxmlformats.org/drawingml/2006/main" xmlns:r="http://schemas.openxmlformats.org/officeDocument/2006/relationships" xmlns:p="http://schemas.openxmlformats.org/presentationml/2006/main">
   <p:cSld>
     <p:spTree>
       <p:nvGrpSpPr>
@@ -1433,7 +1227,7 @@
         <p:nvSpPr>
           <p:cNvPr id="2" name="Slide Image Placeholder 1"/>
           <p:cNvSpPr>
-            <a:spLocks noGrp="1"/>
+            <a:spLocks noGrp="1" noRot="1" noChangeAspect="1"/>
           </p:cNvSpPr>
           <p:nvPr>
             <p:ph type="sldImg" idx="2"/>
@@ -1448,7 +1242,7 @@
             <a:spLocks noGrp="1"/>
           </p:cNvSpPr>
           <p:nvPr>
-            <p:ph type="body" idx="3" sz="quarter"/>
+            <p:ph type="body" sz="quarter" idx="3"/>
           </p:nvPr>
         </p:nvSpPr>
         <p:spPr/>
@@ -1471,7 +1265,7 @@
             <a:spLocks noGrp="1"/>
           </p:cNvSpPr>
           <p:nvPr>
-            <p:ph type="sldNum" idx="5" sz="quarter"/>
+            <p:ph type="sldNum" sz="quarter" idx="5"/>
           </p:nvPr>
         </p:nvSpPr>
         <p:spPr/>
@@ -1485,7 +1279,7 @@
 </file>
 
 <file path=ppt/notesSlides/notesSlide4.xml><?xml version="1.0" encoding="utf-8"?>
-<p:notes xmlns:a="http://schemas.openxmlformats.org/drawingml/2006/main" xmlns:p="http://schemas.openxmlformats.org/presentationml/2006/main" xmlns:r="http://schemas.openxmlformats.org/officeDocument/2006/relationships">
+<p:notes xmlns:a="http://schemas.openxmlformats.org/drawingml/2006/main" xmlns:r="http://schemas.openxmlformats.org/officeDocument/2006/relationships" xmlns:p="http://schemas.openxmlformats.org/presentationml/2006/main">
   <p:cSld>
     <p:spTree>
       <p:nvGrpSpPr>
@@ -1505,7 +1299,7 @@
         <p:nvSpPr>
           <p:cNvPr id="2" name="Slide Image Placeholder 1"/>
           <p:cNvSpPr>
-            <a:spLocks noGrp="1"/>
+            <a:spLocks noGrp="1" noRot="1" noChangeAspect="1"/>
           </p:cNvSpPr>
           <p:nvPr>
             <p:ph type="sldImg" idx="2"/>
@@ -1520,7 +1314,7 @@
             <a:spLocks noGrp="1"/>
           </p:cNvSpPr>
           <p:nvPr>
-            <p:ph type="body" idx="3" sz="quarter"/>
+            <p:ph type="body" sz="quarter" idx="3"/>
           </p:nvPr>
         </p:nvSpPr>
         <p:spPr/>
@@ -1543,7 +1337,7 @@
             <a:spLocks noGrp="1"/>
           </p:cNvSpPr>
           <p:nvPr>
-            <p:ph type="sldNum" idx="5" sz="quarter"/>
+            <p:ph type="sldNum" sz="quarter" idx="5"/>
           </p:nvPr>
         </p:nvSpPr>
         <p:spPr/>
@@ -1557,7 +1351,7 @@
 </file>
 
 <file path=ppt/notesSlides/notesSlide5.xml><?xml version="1.0" encoding="utf-8"?>
-<p:notes xmlns:a="http://schemas.openxmlformats.org/drawingml/2006/main" xmlns:p="http://schemas.openxmlformats.org/presentationml/2006/main" xmlns:r="http://schemas.openxmlformats.org/officeDocument/2006/relationships">
+<p:notes xmlns:a="http://schemas.openxmlformats.org/drawingml/2006/main" xmlns:r="http://schemas.openxmlformats.org/officeDocument/2006/relationships" xmlns:p="http://schemas.openxmlformats.org/presentationml/2006/main">
   <p:cSld>
     <p:spTree>
       <p:nvGrpSpPr>
@@ -1577,7 +1371,7 @@
         <p:nvSpPr>
           <p:cNvPr id="2" name="Slide Image Placeholder 1"/>
           <p:cNvSpPr>
-            <a:spLocks noGrp="1"/>
+            <a:spLocks noGrp="1" noRot="1" noChangeAspect="1"/>
           </p:cNvSpPr>
           <p:nvPr>
             <p:ph type="sldImg" idx="2"/>
@@ -1592,7 +1386,7 @@
             <a:spLocks noGrp="1"/>
           </p:cNvSpPr>
           <p:nvPr>
-            <p:ph type="body" idx="3" sz="quarter"/>
+            <p:ph type="body" sz="quarter" idx="3"/>
           </p:nvPr>
         </p:nvSpPr>
         <p:spPr/>
@@ -1615,7 +1409,7 @@
             <a:spLocks noGrp="1"/>
           </p:cNvSpPr>
           <p:nvPr>
-            <p:ph type="sldNum" idx="5" sz="quarter"/>
+            <p:ph type="sldNum" sz="quarter" idx="5"/>
           </p:nvPr>
         </p:nvSpPr>
         <p:spPr/>
@@ -1629,7 +1423,7 @@
 </file>
 
 <file path=ppt/notesSlides/notesSlide6.xml><?xml version="1.0" encoding="utf-8"?>
-<p:notes xmlns:a="http://schemas.openxmlformats.org/drawingml/2006/main" xmlns:p="http://schemas.openxmlformats.org/presentationml/2006/main" xmlns:r="http://schemas.openxmlformats.org/officeDocument/2006/relationships">
+<p:notes xmlns:a="http://schemas.openxmlformats.org/drawingml/2006/main" xmlns:r="http://schemas.openxmlformats.org/officeDocument/2006/relationships" xmlns:p="http://schemas.openxmlformats.org/presentationml/2006/main">
   <p:cSld>
     <p:spTree>
       <p:nvGrpSpPr>
@@ -1649,7 +1443,7 @@
         <p:nvSpPr>
           <p:cNvPr id="2" name="Slide Image Placeholder 1"/>
           <p:cNvSpPr>
-            <a:spLocks noGrp="1"/>
+            <a:spLocks noGrp="1" noRot="1" noChangeAspect="1"/>
           </p:cNvSpPr>
           <p:nvPr>
             <p:ph type="sldImg" idx="2"/>
@@ -1664,7 +1458,7 @@
             <a:spLocks noGrp="1"/>
           </p:cNvSpPr>
           <p:nvPr>
-            <p:ph type="body" idx="3" sz="quarter"/>
+            <p:ph type="body" sz="quarter" idx="3"/>
           </p:nvPr>
         </p:nvSpPr>
         <p:spPr/>
@@ -1687,7 +1481,7 @@
             <a:spLocks noGrp="1"/>
           </p:cNvSpPr>
           <p:nvPr>
-            <p:ph type="sldNum" idx="5" sz="quarter"/>
+            <p:ph type="sldNum" sz="quarter" idx="5"/>
           </p:nvPr>
         </p:nvSpPr>
         <p:spPr/>
@@ -1701,7 +1495,7 @@
 </file>
 
 <file path=ppt/notesSlides/notesSlide7.xml><?xml version="1.0" encoding="utf-8"?>
-<p:notes xmlns:a="http://schemas.openxmlformats.org/drawingml/2006/main" xmlns:p="http://schemas.openxmlformats.org/presentationml/2006/main" xmlns:r="http://schemas.openxmlformats.org/officeDocument/2006/relationships">
+<p:notes xmlns:a="http://schemas.openxmlformats.org/drawingml/2006/main" xmlns:r="http://schemas.openxmlformats.org/officeDocument/2006/relationships" xmlns:p="http://schemas.openxmlformats.org/presentationml/2006/main">
   <p:cSld>
     <p:spTree>
       <p:nvGrpSpPr>
@@ -1721,7 +1515,7 @@
         <p:nvSpPr>
           <p:cNvPr id="2" name="Slide Image Placeholder 1"/>
           <p:cNvSpPr>
-            <a:spLocks noGrp="1"/>
+            <a:spLocks noGrp="1" noRot="1" noChangeAspect="1"/>
           </p:cNvSpPr>
           <p:nvPr>
             <p:ph type="sldImg" idx="2"/>
@@ -1736,7 +1530,7 @@
             <a:spLocks noGrp="1"/>
           </p:cNvSpPr>
           <p:nvPr>
-            <p:ph type="body" idx="3" sz="quarter"/>
+            <p:ph type="body" sz="quarter" idx="3"/>
           </p:nvPr>
         </p:nvSpPr>
         <p:spPr/>
@@ -1759,7 +1553,7 @@
             <a:spLocks noGrp="1"/>
           </p:cNvSpPr>
           <p:nvPr>
-            <p:ph type="sldNum" idx="5" sz="quarter"/>
+            <p:ph type="sldNum" sz="quarter" idx="5"/>
           </p:nvPr>
         </p:nvSpPr>
         <p:spPr/>
@@ -1773,7 +1567,7 @@
 </file>
 
 <file path=ppt/notesSlides/notesSlide8.xml><?xml version="1.0" encoding="utf-8"?>
-<p:notes xmlns:a="http://schemas.openxmlformats.org/drawingml/2006/main" xmlns:p="http://schemas.openxmlformats.org/presentationml/2006/main" xmlns:r="http://schemas.openxmlformats.org/officeDocument/2006/relationships">
+<p:notes xmlns:a="http://schemas.openxmlformats.org/drawingml/2006/main" xmlns:r="http://schemas.openxmlformats.org/officeDocument/2006/relationships" xmlns:p="http://schemas.openxmlformats.org/presentationml/2006/main">
   <p:cSld>
     <p:spTree>
       <p:nvGrpSpPr>
@@ -1793,7 +1587,7 @@
         <p:nvSpPr>
           <p:cNvPr id="2" name="Slide Image Placeholder 1"/>
           <p:cNvSpPr>
-            <a:spLocks noGrp="1"/>
+            <a:spLocks noGrp="1" noRot="1" noChangeAspect="1"/>
           </p:cNvSpPr>
           <p:nvPr>
             <p:ph type="sldImg" idx="2"/>
@@ -1808,7 +1602,7 @@
             <a:spLocks noGrp="1"/>
           </p:cNvSpPr>
           <p:nvPr>
-            <p:ph type="body" idx="3" sz="quarter"/>
+            <p:ph type="body" sz="quarter" idx="3"/>
           </p:nvPr>
         </p:nvSpPr>
         <p:spPr/>
@@ -1831,7 +1625,7 @@
             <a:spLocks noGrp="1"/>
           </p:cNvSpPr>
           <p:nvPr>
-            <p:ph type="sldNum" idx="5" sz="quarter"/>
+            <p:ph type="sldNum" sz="quarter" idx="5"/>
           </p:nvPr>
         </p:nvSpPr>
         <p:spPr/>
@@ -1845,7 +1639,7 @@
 </file>
 
 <file path=ppt/notesSlides/notesSlide9.xml><?xml version="1.0" encoding="utf-8"?>
-<p:notes xmlns:a="http://schemas.openxmlformats.org/drawingml/2006/main" xmlns:p="http://schemas.openxmlformats.org/presentationml/2006/main" xmlns:r="http://schemas.openxmlformats.org/officeDocument/2006/relationships">
+<p:notes xmlns:a="http://schemas.openxmlformats.org/drawingml/2006/main" xmlns:r="http://schemas.openxmlformats.org/officeDocument/2006/relationships" xmlns:p="http://schemas.openxmlformats.org/presentationml/2006/main">
   <p:cSld>
     <p:spTree>
       <p:nvGrpSpPr>
@@ -1865,7 +1659,7 @@
         <p:nvSpPr>
           <p:cNvPr id="2" name="Slide Image Placeholder 1"/>
           <p:cNvSpPr>
-            <a:spLocks noGrp="1"/>
+            <a:spLocks noGrp="1" noRot="1" noChangeAspect="1"/>
           </p:cNvSpPr>
           <p:nvPr>
             <p:ph type="sldImg" idx="2"/>
@@ -1880,7 +1674,7 @@
             <a:spLocks noGrp="1"/>
           </p:cNvSpPr>
           <p:nvPr>
-            <p:ph type="body" idx="3" sz="quarter"/>
+            <p:ph type="body" sz="quarter" idx="3"/>
           </p:nvPr>
         </p:nvSpPr>
         <p:spPr/>
@@ -1903,7 +1697,7 @@
             <a:spLocks noGrp="1"/>
           </p:cNvSpPr>
           <p:nvPr>
-            <p:ph type="sldNum" idx="5" sz="quarter"/>
+            <p:ph type="sldNum" sz="quarter" idx="5"/>
           </p:nvPr>
         </p:nvSpPr>
         <p:spPr/>
@@ -1954,10 +1748,9 @@
           <a:lstStyle/>
           <a:p>
             <a:r>
-              <a:rPr lang="en-US" smtClean="0"/>
+              <a:rPr lang="en-US"/>
               <a:t>Click to edit Master title style</a:t>
             </a:r>
-            <a:endParaRPr lang="en-US"/>
           </a:p>
         </p:txBody>
       </p:sp>
@@ -2073,10 +1866,9 @@
           </a:lstStyle>
           <a:p>
             <a:r>
-              <a:rPr lang="en-US" smtClean="0"/>
+              <a:rPr lang="en-US"/>
               <a:t>Click to edit Master subtitle style</a:t>
             </a:r>
-            <a:endParaRPr lang="en-US"/>
           </a:p>
         </p:txBody>
       </p:sp>
@@ -2097,7 +1889,7 @@
           <a:p>
             <a:fld id="{5BCAD085-E8A6-8845-BD4E-CB4CCA059FC4}" type="datetimeFigureOut">
               <a:rPr lang="en-US" smtClean="0"/>
-              <a:t>1/27/13</a:t>
+              <a:t>10/27/2026</a:t>
             </a:fld>
             <a:endParaRPr lang="en-US"/>
           </a:p>
@@ -2191,10 +1983,9 @@
           <a:lstStyle/>
           <a:p>
             <a:r>
-              <a:rPr lang="en-US" smtClean="0"/>
+              <a:rPr lang="en-US"/>
               <a:t>Click to edit Master title style</a:t>
             </a:r>
-            <a:endParaRPr lang="en-US"/>
           </a:p>
         </p:txBody>
       </p:sp>
@@ -2215,38 +2006,37 @@
           <a:p>
             <a:pPr lvl="0"/>
             <a:r>
-              <a:rPr lang="en-US" smtClean="0"/>
+              <a:rPr lang="en-US"/>
               <a:t>Click to edit Master text styles</a:t>
             </a:r>
           </a:p>
           <a:p>
             <a:pPr lvl="1"/>
             <a:r>
-              <a:rPr lang="en-US" smtClean="0"/>
+              <a:rPr lang="en-US"/>
               <a:t>Second level</a:t>
             </a:r>
           </a:p>
           <a:p>
             <a:pPr lvl="2"/>
             <a:r>
-              <a:rPr lang="en-US" smtClean="0"/>
+              <a:rPr lang="en-US"/>
               <a:t>Third level</a:t>
             </a:r>
           </a:p>
           <a:p>
             <a:pPr lvl="3"/>
             <a:r>
-              <a:rPr lang="en-US" smtClean="0"/>
+              <a:rPr lang="en-US"/>
               <a:t>Fourth level</a:t>
             </a:r>
           </a:p>
           <a:p>
             <a:pPr lvl="4"/>
             <a:r>
-              <a:rPr lang="en-US" smtClean="0"/>
+              <a:rPr lang="en-US"/>
               <a:t>Fifth level</a:t>
             </a:r>
-            <a:endParaRPr lang="en-US"/>
           </a:p>
         </p:txBody>
       </p:sp>
@@ -2267,7 +2057,7 @@
           <a:p>
             <a:fld id="{5BCAD085-E8A6-8845-BD4E-CB4CCA059FC4}" type="datetimeFigureOut">
               <a:rPr lang="en-US" smtClean="0"/>
-              <a:t>1/27/13</a:t>
+              <a:t>10/27/2026</a:t>
             </a:fld>
             <a:endParaRPr lang="en-US"/>
           </a:p>
@@ -2366,10 +2156,9 @@
           <a:lstStyle/>
           <a:p>
             <a:r>
-              <a:rPr lang="en-US" smtClean="0"/>
+              <a:rPr lang="en-US"/>
               <a:t>Click to edit Master title style</a:t>
             </a:r>
-            <a:endParaRPr lang="en-US"/>
           </a:p>
         </p:txBody>
       </p:sp>
@@ -2395,38 +2184,37 @@
           <a:p>
             <a:pPr lvl="0"/>
             <a:r>
-              <a:rPr lang="en-US" smtClean="0"/>
+              <a:rPr lang="en-US"/>
               <a:t>Click to edit Master text styles</a:t>
             </a:r>
           </a:p>
           <a:p>
             <a:pPr lvl="1"/>
             <a:r>
-              <a:rPr lang="en-US" smtClean="0"/>
+              <a:rPr lang="en-US"/>
               <a:t>Second level</a:t>
             </a:r>
           </a:p>
           <a:p>
             <a:pPr lvl="2"/>
             <a:r>
-              <a:rPr lang="en-US" smtClean="0"/>
+              <a:rPr lang="en-US"/>
               <a:t>Third level</a:t>
             </a:r>
           </a:p>
           <a:p>
             <a:pPr lvl="3"/>
             <a:r>
-              <a:rPr lang="en-US" smtClean="0"/>
+              <a:rPr lang="en-US"/>
               <a:t>Fourth level</a:t>
             </a:r>
           </a:p>
           <a:p>
             <a:pPr lvl="4"/>
             <a:r>
-              <a:rPr lang="en-US" smtClean="0"/>
+              <a:rPr lang="en-US"/>
               <a:t>Fifth level</a:t>
             </a:r>
-            <a:endParaRPr lang="en-US"/>
           </a:p>
         </p:txBody>
       </p:sp>
@@ -2447,7 +2235,7 @@
           <a:p>
             <a:fld id="{5BCAD085-E8A6-8845-BD4E-CB4CCA059FC4}" type="datetimeFigureOut">
               <a:rPr lang="en-US" smtClean="0"/>
-              <a:t>1/27/13</a:t>
+              <a:t>10/27/2026</a:t>
             </a:fld>
             <a:endParaRPr lang="en-US"/>
           </a:p>
@@ -2541,10 +2329,9 @@
           <a:lstStyle/>
           <a:p>
             <a:r>
-              <a:rPr lang="en-US" smtClean="0"/>
+              <a:rPr lang="en-US"/>
               <a:t>Click to edit Master title style</a:t>
             </a:r>
-            <a:endParaRPr lang="en-US"/>
           </a:p>
         </p:txBody>
       </p:sp>
@@ -2565,38 +2352,37 @@
           <a:p>
             <a:pPr lvl="0"/>
             <a:r>
-              <a:rPr lang="en-US" smtClean="0"/>
+              <a:rPr lang="en-US"/>
               <a:t>Click to edit Master text styles</a:t>
             </a:r>
           </a:p>
           <a:p>
             <a:pPr lvl="1"/>
             <a:r>
-              <a:rPr lang="en-US" smtClean="0"/>
+              <a:rPr lang="en-US"/>
               <a:t>Second level</a:t>
             </a:r>
           </a:p>
           <a:p>
             <a:pPr lvl="2"/>
             <a:r>
-              <a:rPr lang="en-US" smtClean="0"/>
+              <a:rPr lang="en-US"/>
               <a:t>Third level</a:t>
             </a:r>
           </a:p>
           <a:p>
             <a:pPr lvl="3"/>
             <a:r>
-              <a:rPr lang="en-US" smtClean="0"/>
+              <a:rPr lang="en-US"/>
               <a:t>Fourth level</a:t>
             </a:r>
           </a:p>
           <a:p>
             <a:pPr lvl="4"/>
             <a:r>
-              <a:rPr lang="en-US" smtClean="0"/>
+              <a:rPr lang="en-US"/>
               <a:t>Fifth level</a:t>
             </a:r>
-            <a:endParaRPr lang="en-US"/>
           </a:p>
         </p:txBody>
       </p:sp>
@@ -2617,7 +2403,7 @@
           <a:p>
             <a:fld id="{5BCAD085-E8A6-8845-BD4E-CB4CCA059FC4}" type="datetimeFigureOut">
               <a:rPr lang="en-US" smtClean="0"/>
-              <a:t>1/27/13</a:t>
+              <a:t>10/27/2026</a:t>
             </a:fld>
             <a:endParaRPr lang="en-US"/>
           </a:p>
@@ -2720,10 +2506,9 @@
           </a:lstStyle>
           <a:p>
             <a:r>
-              <a:rPr lang="en-US" smtClean="0"/>
+              <a:rPr lang="en-US"/>
               <a:t>Click to edit Master title style</a:t>
             </a:r>
-            <a:endParaRPr lang="en-US"/>
           </a:p>
         </p:txBody>
       </p:sp>
@@ -2840,7 +2625,7 @@
           <a:p>
             <a:pPr lvl="0"/>
             <a:r>
-              <a:rPr lang="en-US" smtClean="0"/>
+              <a:rPr lang="en-US"/>
               <a:t>Click to edit Master text styles</a:t>
             </a:r>
           </a:p>
@@ -2863,7 +2648,7 @@
           <a:p>
             <a:fld id="{5BCAD085-E8A6-8845-BD4E-CB4CCA059FC4}" type="datetimeFigureOut">
               <a:rPr lang="en-US" smtClean="0"/>
-              <a:t>1/27/13</a:t>
+              <a:t>10/27/2026</a:t>
             </a:fld>
             <a:endParaRPr lang="en-US"/>
           </a:p>
@@ -2957,10 +2742,9 @@
           <a:lstStyle/>
           <a:p>
             <a:r>
-              <a:rPr lang="en-US" smtClean="0"/>
+              <a:rPr lang="en-US"/>
               <a:t>Click to edit Master title style</a:t>
             </a:r>
-            <a:endParaRPr lang="en-US"/>
           </a:p>
         </p:txBody>
       </p:sp>
@@ -3014,38 +2798,37 @@
           <a:p>
             <a:pPr lvl="0"/>
             <a:r>
-              <a:rPr lang="en-US" smtClean="0"/>
+              <a:rPr lang="en-US"/>
               <a:t>Click to edit Master text styles</a:t>
             </a:r>
           </a:p>
           <a:p>
             <a:pPr lvl="1"/>
             <a:r>
-              <a:rPr lang="en-US" smtClean="0"/>
+              <a:rPr lang="en-US"/>
               <a:t>Second level</a:t>
             </a:r>
           </a:p>
           <a:p>
             <a:pPr lvl="2"/>
             <a:r>
-              <a:rPr lang="en-US" smtClean="0"/>
+              <a:rPr lang="en-US"/>
               <a:t>Third level</a:t>
             </a:r>
           </a:p>
           <a:p>
             <a:pPr lvl="3"/>
             <a:r>
-              <a:rPr lang="en-US" smtClean="0"/>
+              <a:rPr lang="en-US"/>
               <a:t>Fourth level</a:t>
             </a:r>
           </a:p>
           <a:p>
             <a:pPr lvl="4"/>
             <a:r>
-              <a:rPr lang="en-US" smtClean="0"/>
+              <a:rPr lang="en-US"/>
               <a:t>Fifth level</a:t>
             </a:r>
-            <a:endParaRPr lang="en-US"/>
           </a:p>
         </p:txBody>
       </p:sp>
@@ -3099,38 +2882,37 @@
           <a:p>
             <a:pPr lvl="0"/>
             <a:r>
-              <a:rPr lang="en-US" smtClean="0"/>
+              <a:rPr lang="en-US"/>
               <a:t>Click to edit Master text styles</a:t>
             </a:r>
           </a:p>
           <a:p>
             <a:pPr lvl="1"/>
             <a:r>
-              <a:rPr lang="en-US" smtClean="0"/>
+              <a:rPr lang="en-US"/>
               <a:t>Second level</a:t>
             </a:r>
           </a:p>
           <a:p>
             <a:pPr lvl="2"/>
             <a:r>
-              <a:rPr lang="en-US" smtClean="0"/>
+              <a:rPr lang="en-US"/>
               <a:t>Third level</a:t>
             </a:r>
           </a:p>
           <a:p>
             <a:pPr lvl="3"/>
             <a:r>
-              <a:rPr lang="en-US" smtClean="0"/>
+              <a:rPr lang="en-US"/>
               <a:t>Fourth level</a:t>
             </a:r>
           </a:p>
           <a:p>
             <a:pPr lvl="4"/>
             <a:r>
-              <a:rPr lang="en-US" smtClean="0"/>
+              <a:rPr lang="en-US"/>
               <a:t>Fifth level</a:t>
             </a:r>
-            <a:endParaRPr lang="en-US"/>
           </a:p>
         </p:txBody>
       </p:sp>
@@ -3151,7 +2933,7 @@
           <a:p>
             <a:fld id="{5BCAD085-E8A6-8845-BD4E-CB4CCA059FC4}" type="datetimeFigureOut">
               <a:rPr lang="en-US" smtClean="0"/>
-              <a:t>1/27/13</a:t>
+              <a:t>10/27/2026</a:t>
             </a:fld>
             <a:endParaRPr lang="en-US"/>
           </a:p>
@@ -3249,10 +3031,9 @@
           </a:lstStyle>
           <a:p>
             <a:r>
-              <a:rPr lang="en-US" smtClean="0"/>
+              <a:rPr lang="en-US"/>
               <a:t>Click to edit Master title style</a:t>
             </a:r>
-            <a:endParaRPr lang="en-US"/>
           </a:p>
         </p:txBody>
       </p:sp>
@@ -3315,7 +3096,7 @@
           <a:p>
             <a:pPr lvl="0"/>
             <a:r>
-              <a:rPr lang="en-US" smtClean="0"/>
+              <a:rPr lang="en-US"/>
               <a:t>Click to edit Master text styles</a:t>
             </a:r>
           </a:p>
@@ -3371,38 +3152,37 @@
           <a:p>
             <a:pPr lvl="0"/>
             <a:r>
-              <a:rPr lang="en-US" smtClean="0"/>
+              <a:rPr lang="en-US"/>
               <a:t>Click to edit Master text styles</a:t>
             </a:r>
           </a:p>
           <a:p>
             <a:pPr lvl="1"/>
             <a:r>
-              <a:rPr lang="en-US" smtClean="0"/>
+              <a:rPr lang="en-US"/>
               <a:t>Second level</a:t>
             </a:r>
           </a:p>
           <a:p>
             <a:pPr lvl="2"/>
             <a:r>
-              <a:rPr lang="en-US" smtClean="0"/>
+              <a:rPr lang="en-US"/>
               <a:t>Third level</a:t>
             </a:r>
           </a:p>
           <a:p>
             <a:pPr lvl="3"/>
             <a:r>
-              <a:rPr lang="en-US" smtClean="0"/>
+              <a:rPr lang="en-US"/>
               <a:t>Fourth level</a:t>
             </a:r>
           </a:p>
           <a:p>
             <a:pPr lvl="4"/>
             <a:r>
-              <a:rPr lang="en-US" smtClean="0"/>
+              <a:rPr lang="en-US"/>
               <a:t>Fifth level</a:t>
             </a:r>
-            <a:endParaRPr lang="en-US"/>
           </a:p>
         </p:txBody>
       </p:sp>
@@ -3465,7 +3245,7 @@
           <a:p>
             <a:pPr lvl="0"/>
             <a:r>
-              <a:rPr lang="en-US" smtClean="0"/>
+              <a:rPr lang="en-US"/>
               <a:t>Click to edit Master text styles</a:t>
             </a:r>
           </a:p>
@@ -3521,38 +3301,37 @@
           <a:p>
             <a:pPr lvl="0"/>
             <a:r>
-              <a:rPr lang="en-US" smtClean="0"/>
+              <a:rPr lang="en-US"/>
               <a:t>Click to edit Master text styles</a:t>
             </a:r>
           </a:p>
           <a:p>
             <a:pPr lvl="1"/>
             <a:r>
-              <a:rPr lang="en-US" smtClean="0"/>
+              <a:rPr lang="en-US"/>
               <a:t>Second level</a:t>
             </a:r>
           </a:p>
           <a:p>
             <a:pPr lvl="2"/>
             <a:r>
-              <a:rPr lang="en-US" smtClean="0"/>
+              <a:rPr lang="en-US"/>
               <a:t>Third level</a:t>
             </a:r>
           </a:p>
           <a:p>
             <a:pPr lvl="3"/>
             <a:r>
-              <a:rPr lang="en-US" smtClean="0"/>
+              <a:rPr lang="en-US"/>
               <a:t>Fourth level</a:t>
             </a:r>
           </a:p>
           <a:p>
             <a:pPr lvl="4"/>
             <a:r>
-              <a:rPr lang="en-US" smtClean="0"/>
+              <a:rPr lang="en-US"/>
               <a:t>Fifth level</a:t>
             </a:r>
-            <a:endParaRPr lang="en-US"/>
           </a:p>
         </p:txBody>
       </p:sp>
@@ -3573,7 +3352,7 @@
           <a:p>
             <a:fld id="{5BCAD085-E8A6-8845-BD4E-CB4CCA059FC4}" type="datetimeFigureOut">
               <a:rPr lang="en-US" smtClean="0"/>
-              <a:t>1/27/13</a:t>
+              <a:t>10/27/2026</a:t>
             </a:fld>
             <a:endParaRPr lang="en-US"/>
           </a:p>
@@ -3667,10 +3446,9 @@
           <a:lstStyle/>
           <a:p>
             <a:r>
-              <a:rPr lang="en-US" smtClean="0"/>
+              <a:rPr lang="en-US"/>
               <a:t>Click to edit Master title style</a:t>
             </a:r>
-            <a:endParaRPr lang="en-US"/>
           </a:p>
         </p:txBody>
       </p:sp>
@@ -3691,7 +3469,7 @@
           <a:p>
             <a:fld id="{5BCAD085-E8A6-8845-BD4E-CB4CCA059FC4}" type="datetimeFigureOut">
               <a:rPr lang="en-US" smtClean="0"/>
-              <a:t>1/27/13</a:t>
+              <a:t>10/27/2026</a:t>
             </a:fld>
             <a:endParaRPr lang="en-US"/>
           </a:p>
@@ -3786,7 +3564,7 @@
           <a:p>
             <a:fld id="{5BCAD085-E8A6-8845-BD4E-CB4CCA059FC4}" type="datetimeFigureOut">
               <a:rPr lang="en-US" smtClean="0"/>
-              <a:t>1/27/13</a:t>
+              <a:t>10/27/2026</a:t>
             </a:fld>
             <a:endParaRPr lang="en-US"/>
           </a:p>
@@ -3889,10 +3667,9 @@
           </a:lstStyle>
           <a:p>
             <a:r>
-              <a:rPr lang="en-US" smtClean="0"/>
+              <a:rPr lang="en-US"/>
               <a:t>Click to edit Master title style</a:t>
             </a:r>
-            <a:endParaRPr lang="en-US"/>
           </a:p>
         </p:txBody>
       </p:sp>
@@ -3946,38 +3723,37 @@
           <a:p>
             <a:pPr lvl="0"/>
             <a:r>
-              <a:rPr lang="en-US" smtClean="0"/>
+              <a:rPr lang="en-US"/>
               <a:t>Click to edit Master text styles</a:t>
             </a:r>
           </a:p>
           <a:p>
             <a:pPr lvl="1"/>
             <a:r>
-              <a:rPr lang="en-US" smtClean="0"/>
+              <a:rPr lang="en-US"/>
               <a:t>Second level</a:t>
             </a:r>
           </a:p>
           <a:p>
             <a:pPr lvl="2"/>
             <a:r>
-              <a:rPr lang="en-US" smtClean="0"/>
+              <a:rPr lang="en-US"/>
               <a:t>Third level</a:t>
             </a:r>
           </a:p>
           <a:p>
             <a:pPr lvl="3"/>
             <a:r>
-              <a:rPr lang="en-US" smtClean="0"/>
+              <a:rPr lang="en-US"/>
               <a:t>Fourth level</a:t>
             </a:r>
           </a:p>
           <a:p>
             <a:pPr lvl="4"/>
             <a:r>
-              <a:rPr lang="en-US" smtClean="0"/>
+              <a:rPr lang="en-US"/>
               <a:t>Fifth level</a:t>
             </a:r>
-            <a:endParaRPr lang="en-US"/>
           </a:p>
         </p:txBody>
       </p:sp>
@@ -4040,7 +3816,7 @@
           <a:p>
             <a:pPr lvl="0"/>
             <a:r>
-              <a:rPr lang="en-US" smtClean="0"/>
+              <a:rPr lang="en-US"/>
               <a:t>Click to edit Master text styles</a:t>
             </a:r>
           </a:p>
@@ -4063,7 +3839,7 @@
           <a:p>
             <a:fld id="{5BCAD085-E8A6-8845-BD4E-CB4CCA059FC4}" type="datetimeFigureOut">
               <a:rPr lang="en-US" smtClean="0"/>
-              <a:t>1/27/13</a:t>
+              <a:t>10/27/2026</a:t>
             </a:fld>
             <a:endParaRPr lang="en-US"/>
           </a:p>
@@ -4166,10 +3942,9 @@
           </a:lstStyle>
           <a:p>
             <a:r>
-              <a:rPr lang="en-US" smtClean="0"/>
+              <a:rPr lang="en-US"/>
               <a:t>Click to edit Master title style</a:t>
             </a:r>
-            <a:endParaRPr lang="en-US"/>
           </a:p>
         </p:txBody>
       </p:sp>
@@ -4293,7 +4068,7 @@
           <a:p>
             <a:pPr lvl="0"/>
             <a:r>
-              <a:rPr lang="en-US" smtClean="0"/>
+              <a:rPr lang="en-US"/>
               <a:t>Click to edit Master text styles</a:t>
             </a:r>
           </a:p>
@@ -4316,7 +4091,7 @@
           <a:p>
             <a:fld id="{5BCAD085-E8A6-8845-BD4E-CB4CCA059FC4}" type="datetimeFigureOut">
               <a:rPr lang="en-US" smtClean="0"/>
-              <a:t>1/27/13</a:t>
+              <a:t>10/27/2026</a:t>
             </a:fld>
             <a:endParaRPr lang="en-US"/>
           </a:p>
@@ -4425,10 +4200,9 @@
           <a:lstStyle/>
           <a:p>
             <a:r>
-              <a:rPr lang="en-US" smtClean="0"/>
+              <a:rPr lang="en-US"/>
               <a:t>Click to edit Master title style</a:t>
             </a:r>
-            <a:endParaRPr lang="en-US"/>
           </a:p>
         </p:txBody>
       </p:sp>
@@ -4459,38 +4233,37 @@
           <a:p>
             <a:pPr lvl="0"/>
             <a:r>
-              <a:rPr lang="en-US" smtClean="0"/>
+              <a:rPr lang="en-US"/>
               <a:t>Click to edit Master text styles</a:t>
             </a:r>
           </a:p>
           <a:p>
             <a:pPr lvl="1"/>
             <a:r>
-              <a:rPr lang="en-US" smtClean="0"/>
+              <a:rPr lang="en-US"/>
               <a:t>Second level</a:t>
             </a:r>
           </a:p>
           <a:p>
             <a:pPr lvl="2"/>
             <a:r>
-              <a:rPr lang="en-US" smtClean="0"/>
+              <a:rPr lang="en-US"/>
               <a:t>Third level</a:t>
             </a:r>
           </a:p>
           <a:p>
             <a:pPr lvl="3"/>
             <a:r>
-              <a:rPr lang="en-US" smtClean="0"/>
+              <a:rPr lang="en-US"/>
               <a:t>Fourth level</a:t>
             </a:r>
           </a:p>
           <a:p>
             <a:pPr lvl="4"/>
             <a:r>
-              <a:rPr lang="en-US" smtClean="0"/>
+              <a:rPr lang="en-US"/>
               <a:t>Fifth level</a:t>
             </a:r>
-            <a:endParaRPr lang="en-US"/>
           </a:p>
         </p:txBody>
       </p:sp>
@@ -4529,7 +4302,7 @@
           <a:p>
             <a:fld id="{5BCAD085-E8A6-8845-BD4E-CB4CCA059FC4}" type="datetimeFigureOut">
               <a:rPr lang="en-US" smtClean="0"/>
-              <a:t>1/27/13</a:t>
+              <a:t>10/27/2026</a:t>
             </a:fld>
             <a:endParaRPr lang="en-US"/>
           </a:p>
@@ -4888,7 +4661,7 @@
 </file>
 
 <file path=ppt/slides/slide1.xml><?xml version="1.0" encoding="utf-8"?>
-<p:sld xmlns:a="http://schemas.openxmlformats.org/drawingml/2006/main" xmlns:p="http://schemas.openxmlformats.org/presentationml/2006/main" xmlns:r="http://schemas.openxmlformats.org/officeDocument/2006/relationships">
+<p:sld xmlns:a="http://schemas.openxmlformats.org/drawingml/2006/main" xmlns:r="http://schemas.openxmlformats.org/officeDocument/2006/relationships" xmlns:p="http://schemas.openxmlformats.org/presentationml/2006/main">
   <p:cSld>
     <p:bg>
       <p:bgPr>
@@ -4904,7 +4677,14 @@
         <p:cNvGrpSpPr/>
         <p:nvPr/>
       </p:nvGrpSpPr>
-      <p:grpSpPr/>
+      <p:grpSpPr>
+        <a:xfrm>
+          <a:off x="0" y="0"/>
+          <a:ext cx="0" cy="0"/>
+          <a:chOff x="0" y="0"/>
+          <a:chExt cx="0" cy="0"/>
+        </a:xfrm>
+      </p:grpSpPr>
       <p:sp>
         <p:nvSpPr>
           <p:cNvPr id="2" name="badge α"/>
@@ -4942,12 +4722,12 @@
           </a:fontRef>
         </p:style>
         <p:txBody>
-          <a:bodyPr rtlCol="0" anchor="ctr" lIns="0" rIns="0" tIns="0" bIns="0"/>
+          <a:bodyPr lIns="0" tIns="0" rIns="0" bIns="0" rtlCol="0" anchor="ctr"/>
           <a:lstStyle/>
           <a:p>
             <a:pPr algn="ctr"/>
             <a:r>
-              <a:rPr sz="2800" b="1" i="0" lang="en-US">
+              <a:rPr lang="en-US" sz="2800" b="1" i="0">
                 <a:solidFill>
                   <a:srgbClr val="FFFFFF"/>
                 </a:solidFill>
@@ -4996,12 +4776,12 @@
           </a:fontRef>
         </p:style>
         <p:txBody>
-          <a:bodyPr rtlCol="0" anchor="ctr" lIns="0" rIns="0" tIns="0" bIns="0"/>
+          <a:bodyPr lIns="0" tIns="0" rIns="0" bIns="0" rtlCol="0" anchor="ctr"/>
           <a:lstStyle/>
           <a:p>
             <a:pPr algn="ctr"/>
             <a:r>
-              <a:rPr sz="2800" b="1" i="0" lang="en-US">
+              <a:rPr lang="en-US" sz="2800" b="1" i="0">
                 <a:solidFill>
                   <a:srgbClr val="FFFFFF"/>
                 </a:solidFill>
@@ -5050,12 +4830,12 @@
           </a:fontRef>
         </p:style>
         <p:txBody>
-          <a:bodyPr rtlCol="0" anchor="ctr" lIns="0" rIns="0" tIns="0" bIns="0"/>
+          <a:bodyPr lIns="0" tIns="0" rIns="0" bIns="0" rtlCol="0" anchor="ctr"/>
           <a:lstStyle/>
           <a:p>
             <a:pPr algn="ctr"/>
             <a:r>
-              <a:rPr sz="2800" b="1" i="0" lang="en-US">
+              <a:rPr lang="en-US" sz="2800" b="1" i="0">
                 <a:solidFill>
                   <a:srgbClr val="FFFFFF"/>
                 </a:solidFill>
@@ -5104,12 +4884,12 @@
           </a:fontRef>
         </p:style>
         <p:txBody>
-          <a:bodyPr rtlCol="0" anchor="ctr" lIns="0" rIns="0" tIns="0" bIns="0"/>
+          <a:bodyPr lIns="0" tIns="0" rIns="0" bIns="0" rtlCol="0" anchor="ctr"/>
           <a:lstStyle/>
           <a:p>
             <a:pPr algn="ctr"/>
             <a:r>
-              <a:rPr sz="2800" b="1" i="0" lang="en-US">
+              <a:rPr lang="en-US" sz="2800" b="1" i="0">
                 <a:solidFill>
                   <a:srgbClr val="FFFFFF"/>
                 </a:solidFill>
@@ -5138,7 +4918,7 @@
           <a:noFill/>
         </p:spPr>
         <p:txBody>
-          <a:bodyPr wrap="square" anchor="ctr" lIns="45720" rIns="45720" tIns="27432" bIns="27432">
+          <a:bodyPr wrap="square" lIns="45720" tIns="27432" rIns="45720" bIns="27432" anchor="ctr">
             <a:spAutoFit/>
           </a:bodyPr>
           <a:lstStyle/>
@@ -5149,7 +4929,7 @@
               </a:spcAft>
             </a:pPr>
             <a:r>
-              <a:rPr sz="4800" b="1" i="0" lang="he-IL">
+              <a:rPr lang="he-IL" sz="4800" b="1" i="0">
                 <a:solidFill>
                   <a:srgbClr val="FFFFFF"/>
                 </a:solidFill>
@@ -5178,7 +4958,7 @@
           <a:noFill/>
         </p:spPr>
         <p:txBody>
-          <a:bodyPr wrap="square" anchor="t" lIns="45720" rIns="45720" tIns="27432" bIns="27432">
+          <a:bodyPr wrap="square" lIns="45720" tIns="27432" rIns="45720" bIns="27432" anchor="t">
             <a:spAutoFit/>
           </a:bodyPr>
           <a:lstStyle/>
@@ -5189,7 +4969,7 @@
               </a:spcAft>
             </a:pPr>
             <a:r>
-              <a:rPr sz="2200" b="0" i="0" lang="he-IL">
+              <a:rPr lang="he-IL" sz="2200" b="0" i="0">
                 <a:solidFill>
                   <a:srgbClr val="CFC6DE"/>
                 </a:solidFill>
@@ -5218,7 +4998,7 @@
           <a:noFill/>
         </p:spPr>
         <p:txBody>
-          <a:bodyPr wrap="square" anchor="ctr" lIns="45720" rIns="45720" tIns="27432" bIns="27432">
+          <a:bodyPr wrap="square" lIns="45720" tIns="27432" rIns="45720" bIns="27432" anchor="ctr">
             <a:spAutoFit/>
           </a:bodyPr>
           <a:lstStyle/>
@@ -5229,7 +5009,7 @@
               </a:spcAft>
             </a:pPr>
             <a:r>
-              <a:rPr sz="1800" b="0" i="0" lang="he-IL">
+              <a:rPr lang="he-IL" sz="1800" b="0" i="0">
                 <a:solidFill>
                   <a:srgbClr val="CFC6DE"/>
                 </a:solidFill>
@@ -5250,7 +5030,7 @@
 </file>
 
 <file path=ppt/slides/slide10.xml><?xml version="1.0" encoding="utf-8"?>
-<p:sld xmlns:a="http://schemas.openxmlformats.org/drawingml/2006/main" xmlns:p="http://schemas.openxmlformats.org/presentationml/2006/main" xmlns:r="http://schemas.openxmlformats.org/officeDocument/2006/relationships">
+<p:sld xmlns:a="http://schemas.openxmlformats.org/drawingml/2006/main" xmlns:r="http://schemas.openxmlformats.org/officeDocument/2006/relationships" xmlns:p="http://schemas.openxmlformats.org/presentationml/2006/main">
   <p:cSld>
     <p:bg>
       <p:bgPr>
@@ -5266,7 +5046,14 @@
         <p:cNvGrpSpPr/>
         <p:nvPr/>
       </p:nvGrpSpPr>
-      <p:grpSpPr/>
+      <p:grpSpPr>
+        <a:xfrm>
+          <a:off x="0" y="0"/>
+          <a:ext cx="0" cy="0"/>
+          <a:chOff x="0" y="0"/>
+          <a:chExt cx="0" cy="0"/>
+        </a:xfrm>
+      </p:grpSpPr>
       <p:sp>
         <p:nvSpPr>
           <p:cNvPr id="2" name="Title"/>
@@ -5284,7 +5071,7 @@
           <a:noFill/>
         </p:spPr>
         <p:txBody>
-          <a:bodyPr wrap="square" anchor="ctr" lIns="45720" rIns="45720" tIns="27432" bIns="27432">
+          <a:bodyPr wrap="square" lIns="45720" tIns="27432" rIns="45720" bIns="27432" anchor="ctr">
             <a:spAutoFit/>
           </a:bodyPr>
           <a:lstStyle/>
@@ -5295,7 +5082,7 @@
               </a:spcAft>
             </a:pPr>
             <a:r>
-              <a:rPr sz="3400" b="1" i="0" lang="he-IL">
+              <a:rPr lang="he-IL" sz="3400" b="1" i="0">
                 <a:solidFill>
                   <a:srgbClr val="2B1E3F"/>
                 </a:solidFill>
@@ -5316,7 +5103,7 @@
           <p:nvPr/>
         </p:nvPicPr>
         <p:blipFill>
-          <a:blip r:embed="rId2"/>
+          <a:blip r:embed="rId3"/>
           <a:stretch>
             <a:fillRect/>
           </a:stretch>
@@ -5374,6 +5161,7 @@
           <a:lstStyle/>
           <a:p>
             <a:pPr algn="ctr"/>
+            <a:endParaRPr/>
           </a:p>
         </p:txBody>
       </p:sp>
@@ -5405,7 +5193,7 @@
               </a:spcAft>
             </a:pPr>
             <a:r>
-              <a:rPr sz="1300" b="0" i="0" lang="en-US">
+              <a:rPr lang="en-US" sz="1300" b="0" i="0">
                 <a:solidFill>
                   <a:srgbClr val="EDE8F5"/>
                 </a:solidFill>
@@ -5422,7 +5210,7 @@
               </a:spcAft>
             </a:pPr>
             <a:r>
-              <a:rPr sz="1300" b="0" i="0" lang="en-US">
+              <a:rPr lang="en-US" sz="1300" b="0" i="0">
                 <a:solidFill>
                   <a:srgbClr val="EDE8F5"/>
                 </a:solidFill>
@@ -5439,7 +5227,7 @@
               </a:spcAft>
             </a:pPr>
             <a:r>
-              <a:rPr sz="1300" b="0" i="0" lang="en-US">
+              <a:rPr lang="en-US" sz="1300" b="0" i="0">
                 <a:solidFill>
                   <a:srgbClr val="EDE8F5"/>
                 </a:solidFill>
@@ -5468,12 +5256,12 @@
           <a:noFill/>
         </p:spPr>
         <p:txBody>
-          <a:bodyPr wrap="square" anchor="t" lIns="45720" rIns="45720" tIns="27432" bIns="27432">
+          <a:bodyPr wrap="square" lIns="45720" tIns="27432" rIns="45720" bIns="27432" anchor="t">
             <a:spAutoFit/>
           </a:bodyPr>
           <a:lstStyle/>
           <a:p>
-            <a:pPr algn="r" rtl="1" marR="274320" indent="-274320">
+            <a:pPr marR="274320" indent="-274320" algn="r" rtl="1">
               <a:spcAft>
                 <a:spcPts val="1200"/>
               </a:spcAft>
@@ -5484,7 +5272,7 @@
               <a:buChar char="•"/>
             </a:pPr>
             <a:r>
-              <a:rPr sz="1600" b="0" i="0" lang="he-IL">
+              <a:rPr lang="he-IL" sz="1600" b="0" i="0">
                 <a:solidFill>
                   <a:srgbClr val="2B1E3F"/>
                 </a:solidFill>
@@ -5494,7 +5282,7 @@
               <a:t>דוגמים נתונים מהמודל — </a:t>
             </a:r>
             <a:r>
-              <a:rPr sz="1600" b="1" i="0" lang="he-IL">
+              <a:rPr lang="he-IL" sz="1600" b="1" i="0">
                 <a:solidFill>
                   <a:srgbClr val="7B5EA7"/>
                 </a:solidFill>
@@ -5504,7 +5292,7 @@
               <a:t>לפני</a:t>
             </a:r>
             <a:r>
-              <a:rPr sz="1600" b="0" i="0" lang="he-IL">
+              <a:rPr lang="he-IL" sz="1600" b="0" i="0">
                 <a:solidFill>
                   <a:srgbClr val="2B1E3F"/>
                 </a:solidFill>
@@ -5515,7 +5303,7 @@
             </a:r>
           </a:p>
           <a:p>
-            <a:pPr algn="r" rtl="1" marR="274320" indent="-274320">
+            <a:pPr marR="274320" indent="-274320" algn="r" rtl="1">
               <a:spcAft>
                 <a:spcPts val="1200"/>
               </a:spcAft>
@@ -5526,7 +5314,7 @@
               <a:buChar char="•"/>
             </a:pPr>
             <a:r>
-              <a:rPr sz="1600" b="0" i="0" lang="he-IL">
+              <a:rPr lang="he-IL" sz="1600" b="0" i="0">
                 <a:solidFill>
                   <a:srgbClr val="2B1E3F"/>
                 </a:solidFill>
@@ -5537,7 +5325,7 @@
             </a:r>
           </a:p>
           <a:p>
-            <a:pPr algn="r" rtl="1" marR="274320" indent="-274320">
+            <a:pPr marR="274320" indent="-274320" algn="r" rtl="1">
               <a:spcAft>
                 <a:spcPts val="1200"/>
               </a:spcAft>
@@ -5548,7 +5336,7 @@
               <a:buChar char="•"/>
             </a:pPr>
             <a:r>
-              <a:rPr sz="1600" b="0" i="0" lang="he-IL">
+              <a:rPr lang="he-IL" sz="1600" b="0" i="0">
                 <a:solidFill>
                   <a:srgbClr val="2B1E3F"/>
                 </a:solidFill>
@@ -5558,7 +5346,7 @@
               <a:t>הנתונים האמיתיים — בערך בין </a:t>
             </a:r>
             <a:r>
-              <a:rPr sz="1600" b="0" i="0" lang="en-US">
+              <a:rPr lang="en-US" sz="1600" b="0" i="0">
                 <a:solidFill>
                   <a:srgbClr val="2B1E3F"/>
                 </a:solidFill>
@@ -5568,7 +5356,7 @@
               <a:t>‪-2‬</a:t>
             </a:r>
             <a:r>
-              <a:rPr sz="1600" b="0" i="0" lang="he-IL">
+              <a:rPr lang="he-IL" sz="1600" b="0" i="0">
                 <a:solidFill>
                   <a:srgbClr val="2B1E3F"/>
                 </a:solidFill>
@@ -5579,7 +5367,7 @@
             </a:r>
           </a:p>
           <a:p>
-            <a:pPr algn="r" rtl="1" marR="274320" indent="-274320">
+            <a:pPr marR="274320" indent="-274320" algn="r" rtl="1">
               <a:spcAft>
                 <a:spcPts val="1200"/>
               </a:spcAft>
@@ -5590,7 +5378,7 @@
               <a:buChar char="•"/>
             </a:pPr>
             <a:r>
-              <a:rPr sz="1600" b="0" i="0" lang="he-IL">
+              <a:rPr lang="he-IL" sz="1600" b="0" i="0">
                 <a:solidFill>
                   <a:srgbClr val="2B1E3F"/>
                 </a:solidFill>
@@ -5611,7 +5399,7 @@
 </file>
 
 <file path=ppt/slides/slide11.xml><?xml version="1.0" encoding="utf-8"?>
-<p:sld xmlns:a="http://schemas.openxmlformats.org/drawingml/2006/main" xmlns:p="http://schemas.openxmlformats.org/presentationml/2006/main" xmlns:r="http://schemas.openxmlformats.org/officeDocument/2006/relationships">
+<p:sld xmlns:a="http://schemas.openxmlformats.org/drawingml/2006/main" xmlns:r="http://schemas.openxmlformats.org/officeDocument/2006/relationships" xmlns:p="http://schemas.openxmlformats.org/presentationml/2006/main">
   <p:cSld>
     <p:bg>
       <p:bgPr>
@@ -5627,7 +5415,14 @@
         <p:cNvGrpSpPr/>
         <p:nvPr/>
       </p:nvGrpSpPr>
-      <p:grpSpPr/>
+      <p:grpSpPr>
+        <a:xfrm>
+          <a:off x="0" y="0"/>
+          <a:ext cx="0" cy="0"/>
+          <a:chOff x="0" y="0"/>
+          <a:chExt cx="0" cy="0"/>
+        </a:xfrm>
+      </p:grpSpPr>
       <p:sp>
         <p:nvSpPr>
           <p:cNvPr id="2" name="Title"/>
@@ -5645,7 +5440,7 @@
           <a:noFill/>
         </p:spPr>
         <p:txBody>
-          <a:bodyPr wrap="square" anchor="ctr" lIns="45720" rIns="45720" tIns="27432" bIns="27432">
+          <a:bodyPr wrap="square" lIns="45720" tIns="27432" rIns="45720" bIns="27432" anchor="ctr">
             <a:spAutoFit/>
           </a:bodyPr>
           <a:lstStyle/>
@@ -5656,7 +5451,7 @@
               </a:spcAft>
             </a:pPr>
             <a:r>
-              <a:rPr sz="3400" b="1" i="0" lang="he-IL">
+              <a:rPr lang="he-IL" sz="3400" b="1" i="0">
                 <a:solidFill>
                   <a:srgbClr val="2B1E3F"/>
                 </a:solidFill>
@@ -5666,7 +5461,7 @@
               <a:t>הפוסטריור של </a:t>
             </a:r>
             <a:r>
-              <a:rPr sz="3400" b="1" i="0" lang="en-US">
+              <a:rPr lang="en-US" sz="3400" b="1" i="0">
                 <a:solidFill>
                   <a:srgbClr val="2B1E3F"/>
                 </a:solidFill>
@@ -5676,7 +5471,7 @@
               <a:t>μ</a:t>
             </a:r>
             <a:r>
-              <a:rPr sz="3400" b="1" i="0" lang="he-IL">
+              <a:rPr lang="he-IL" sz="3400" b="1" i="0">
                 <a:solidFill>
                   <a:srgbClr val="2B1E3F"/>
                 </a:solidFill>
@@ -5697,7 +5492,7 @@
           <p:nvPr/>
         </p:nvPicPr>
         <p:blipFill>
-          <a:blip r:embed="rId2"/>
+          <a:blip r:embed="rId3"/>
           <a:stretch>
             <a:fillRect/>
           </a:stretch>
@@ -5755,6 +5550,7 @@
           <a:lstStyle/>
           <a:p>
             <a:pPr algn="ctr"/>
+            <a:endParaRPr/>
           </a:p>
         </p:txBody>
       </p:sp>
@@ -5775,7 +5571,7 @@
           <a:noFill/>
         </p:spPr>
         <p:txBody>
-          <a:bodyPr wrap="square" anchor="ctr" lIns="45720" rIns="45720" tIns="27432" bIns="27432">
+          <a:bodyPr wrap="square" lIns="45720" tIns="27432" rIns="45720" bIns="27432" anchor="ctr">
             <a:spAutoFit/>
           </a:bodyPr>
           <a:lstStyle/>
@@ -5786,7 +5582,7 @@
               </a:spcAft>
             </a:pPr>
             <a:r>
-              <a:rPr sz="5400" b="1" i="0" lang="he-IL">
+              <a:rPr lang="he-IL" sz="5400" b="1" i="0">
                 <a:solidFill>
                   <a:srgbClr val="E4572E"/>
                 </a:solidFill>
@@ -5815,7 +5611,7 @@
           <a:noFill/>
         </p:spPr>
         <p:txBody>
-          <a:bodyPr wrap="square" anchor="t" lIns="45720" rIns="45720" tIns="27432" bIns="27432">
+          <a:bodyPr wrap="square" lIns="45720" tIns="27432" rIns="45720" bIns="27432" anchor="t">
             <a:spAutoFit/>
           </a:bodyPr>
           <a:lstStyle/>
@@ -5826,7 +5622,7 @@
               </a:spcAft>
             </a:pPr>
             <a:r>
-              <a:rPr sz="1500" b="0" i="0" lang="he-IL">
+              <a:rPr lang="he-IL" sz="1500" b="0" i="0">
                 <a:solidFill>
                   <a:srgbClr val="6B6478"/>
                 </a:solidFill>
@@ -5855,12 +5651,12 @@
           <a:noFill/>
         </p:spPr>
         <p:txBody>
-          <a:bodyPr wrap="square" anchor="t" lIns="45720" rIns="45720" tIns="27432" bIns="27432">
+          <a:bodyPr wrap="square" lIns="45720" tIns="27432" rIns="45720" bIns="27432" anchor="t">
             <a:spAutoFit/>
           </a:bodyPr>
           <a:lstStyle/>
           <a:p>
-            <a:pPr algn="r" rtl="1" marR="274320" indent="-274320">
+            <a:pPr marR="274320" indent="-274320" algn="r" rtl="1">
               <a:spcAft>
                 <a:spcPts val="1000"/>
               </a:spcAft>
@@ -5871,7 +5667,7 @@
               <a:buChar char="•"/>
             </a:pPr>
             <a:r>
-              <a:rPr sz="1600" b="0" i="0" lang="en-US">
+              <a:rPr lang="en-US" sz="1600" b="0" i="0">
                 <a:solidFill>
                   <a:srgbClr val="2B1E3F"/>
                 </a:solidFill>
@@ -5881,7 +5677,7 @@
               <a:t>‪HDI 94%‬</a:t>
             </a:r>
             <a:r>
-              <a:rPr sz="1600" b="0" i="0" lang="he-IL">
+              <a:rPr lang="he-IL" sz="1600" b="0" i="0">
                 <a:solidFill>
                   <a:srgbClr val="2B1E3F"/>
                 </a:solidFill>
@@ -5891,7 +5687,7 @@
               <a:t> של </a:t>
             </a:r>
             <a:r>
-              <a:rPr sz="1600" b="0" i="0" lang="en-US">
+              <a:rPr lang="en-US" sz="1600" b="0" i="0">
                 <a:solidFill>
                   <a:srgbClr val="2B1E3F"/>
                 </a:solidFill>
@@ -5901,7 +5697,7 @@
               <a:t>μ</a:t>
             </a:r>
             <a:r>
-              <a:rPr sz="1600" b="0" i="0" lang="he-IL">
+              <a:rPr lang="he-IL" sz="1600" b="0" i="0">
                 <a:solidFill>
                   <a:srgbClr val="2B1E3F"/>
                 </a:solidFill>
@@ -5911,7 +5707,7 @@
               <a:t>: </a:t>
             </a:r>
             <a:r>
-              <a:rPr sz="1600" b="0" i="0" lang="en-US">
+              <a:rPr lang="en-US" sz="1600" b="0" i="0">
                 <a:solidFill>
                   <a:srgbClr val="2B1E3F"/>
                 </a:solidFill>
@@ -5922,7 +5718,7 @@
             </a:r>
           </a:p>
           <a:p>
-            <a:pPr algn="r" rtl="1" marR="274320" indent="-274320">
+            <a:pPr marR="274320" indent="-274320" algn="r" rtl="1">
               <a:spcAft>
                 <a:spcPts val="1000"/>
               </a:spcAft>
@@ -5933,7 +5729,7 @@
               <a:buChar char="•"/>
             </a:pPr>
             <a:r>
-              <a:rPr sz="1600" b="0" i="0" lang="he-IL">
+              <a:rPr lang="he-IL" sz="1600" b="0" i="0">
                 <a:solidFill>
                   <a:srgbClr val="2B1E3F"/>
                 </a:solidFill>
@@ -5988,6 +5784,7 @@
           <a:lstStyle/>
           <a:p>
             <a:pPr algn="ctr"/>
+            <a:endParaRPr/>
           </a:p>
         </p:txBody>
       </p:sp>
@@ -6019,7 +5816,7 @@
               </a:spcAft>
             </a:pPr>
             <a:r>
-              <a:rPr sz="1300" b="0" i="0" lang="en-US">
+              <a:rPr lang="en-US" sz="1300" b="0" i="0">
                 <a:solidFill>
                   <a:srgbClr val="EDE8F5"/>
                 </a:solidFill>
@@ -6036,7 +5833,7 @@
               </a:spcAft>
             </a:pPr>
             <a:r>
-              <a:rPr sz="1300" b="0" i="0" lang="en-US">
+              <a:rPr lang="en-US" sz="1300" b="0" i="0">
                 <a:solidFill>
                   <a:srgbClr val="EDE8F5"/>
                 </a:solidFill>
@@ -6053,7 +5850,7 @@
               </a:spcAft>
             </a:pPr>
             <a:r>
-              <a:rPr sz="1300" b="0" i="0" lang="en-US">
+              <a:rPr lang="en-US" sz="1300" b="0" i="0">
                 <a:solidFill>
                   <a:srgbClr val="EDE8F5"/>
                 </a:solidFill>
@@ -6074,7 +5871,7 @@
 </file>
 
 <file path=ppt/slides/slide12.xml><?xml version="1.0" encoding="utf-8"?>
-<p:sld xmlns:a="http://schemas.openxmlformats.org/drawingml/2006/main" xmlns:p="http://schemas.openxmlformats.org/presentationml/2006/main" xmlns:r="http://schemas.openxmlformats.org/officeDocument/2006/relationships">
+<p:sld xmlns:a="http://schemas.openxmlformats.org/drawingml/2006/main" xmlns:r="http://schemas.openxmlformats.org/officeDocument/2006/relationships" xmlns:p="http://schemas.openxmlformats.org/presentationml/2006/main">
   <p:cSld>
     <p:bg>
       <p:bgPr>
@@ -6090,7 +5887,14 @@
         <p:cNvGrpSpPr/>
         <p:nvPr/>
       </p:nvGrpSpPr>
-      <p:grpSpPr/>
+      <p:grpSpPr>
+        <a:xfrm>
+          <a:off x="0" y="0"/>
+          <a:ext cx="0" cy="0"/>
+          <a:chOff x="0" y="0"/>
+          <a:chExt cx="0" cy="0"/>
+        </a:xfrm>
+      </p:grpSpPr>
       <p:sp>
         <p:nvSpPr>
           <p:cNvPr id="2" name="Title"/>
@@ -6108,7 +5912,7 @@
           <a:noFill/>
         </p:spPr>
         <p:txBody>
-          <a:bodyPr wrap="square" anchor="ctr" lIns="45720" rIns="45720" tIns="27432" bIns="27432">
+          <a:bodyPr wrap="square" lIns="45720" tIns="27432" rIns="45720" bIns="27432" anchor="ctr">
             <a:spAutoFit/>
           </a:bodyPr>
           <a:lstStyle/>
@@ -6119,7 +5923,7 @@
               </a:spcAft>
             </a:pPr>
             <a:r>
-              <a:rPr sz="3400" b="1" i="0" lang="he-IL">
+              <a:rPr lang="he-IL" sz="3400" b="1" i="0">
                 <a:solidFill>
                   <a:srgbClr val="2B1E3F"/>
                 </a:solidFill>
@@ -6174,6 +5978,7 @@
           <a:lstStyle/>
           <a:p>
             <a:pPr algn="ctr"/>
+            <a:endParaRPr/>
           </a:p>
         </p:txBody>
       </p:sp>
@@ -6186,7 +5991,7 @@
           <p:nvPr/>
         </p:nvPicPr>
         <p:blipFill>
-          <a:blip r:embed="rId2"/>
+          <a:blip r:embed="rId3"/>
           <a:stretch>
             <a:fillRect/>
           </a:stretch>
@@ -6210,7 +6015,7 @@
           <p:nvPr/>
         </p:nvPicPr>
         <p:blipFill>
-          <a:blip r:embed="rId3"/>
+          <a:blip r:embed="rId4"/>
           <a:stretch>
             <a:fillRect/>
           </a:stretch>
@@ -6268,6 +6073,7 @@
           <a:lstStyle/>
           <a:p>
             <a:pPr algn="ctr"/>
+            <a:endParaRPr/>
           </a:p>
         </p:txBody>
       </p:sp>
@@ -6288,7 +6094,7 @@
           <a:noFill/>
         </p:spPr>
         <p:txBody>
-          <a:bodyPr wrap="square" anchor="ctr" lIns="45720" rIns="45720" tIns="27432" bIns="27432">
+          <a:bodyPr wrap="square" lIns="45720" tIns="27432" rIns="45720" bIns="27432" anchor="ctr">
             <a:spAutoFit/>
           </a:bodyPr>
           <a:lstStyle/>
@@ -6299,7 +6105,7 @@
               </a:spcAft>
             </a:pPr>
             <a:r>
-              <a:rPr sz="3600" b="1" i="0" lang="he-IL">
+              <a:rPr lang="he-IL" sz="3600" b="1" i="0">
                 <a:solidFill>
                   <a:srgbClr val="17A398"/>
                 </a:solidFill>
@@ -6328,7 +6134,7 @@
           <a:noFill/>
         </p:spPr>
         <p:txBody>
-          <a:bodyPr wrap="square" anchor="t" lIns="45720" rIns="45720" tIns="27432" bIns="27432">
+          <a:bodyPr wrap="square" lIns="45720" tIns="27432" rIns="45720" bIns="27432" anchor="t">
             <a:spAutoFit/>
           </a:bodyPr>
           <a:lstStyle/>
@@ -6339,7 +6145,7 @@
               </a:spcAft>
             </a:pPr>
             <a:r>
-              <a:rPr sz="1300" b="0" i="0" lang="he-IL">
+              <a:rPr lang="he-IL" sz="1300" b="0" i="0">
                 <a:solidFill>
                   <a:srgbClr val="6B6478"/>
                 </a:solidFill>
@@ -6394,6 +6200,7 @@
           <a:lstStyle/>
           <a:p>
             <a:pPr algn="ctr"/>
+            <a:endParaRPr/>
           </a:p>
         </p:txBody>
       </p:sp>
@@ -6414,7 +6221,7 @@
           <a:noFill/>
         </p:spPr>
         <p:txBody>
-          <a:bodyPr wrap="square" anchor="ctr" lIns="45720" rIns="45720" tIns="27432" bIns="27432">
+          <a:bodyPr wrap="square" lIns="45720" tIns="27432" rIns="45720" bIns="27432" anchor="ctr">
             <a:spAutoFit/>
           </a:bodyPr>
           <a:lstStyle/>
@@ -6425,7 +6232,7 @@
               </a:spcAft>
             </a:pPr>
             <a:r>
-              <a:rPr sz="3600" b="1" i="0" lang="he-IL">
+              <a:rPr lang="he-IL" sz="3600" b="1" i="0">
                 <a:solidFill>
                   <a:srgbClr val="E4572E"/>
                 </a:solidFill>
@@ -6454,7 +6261,7 @@
           <a:noFill/>
         </p:spPr>
         <p:txBody>
-          <a:bodyPr wrap="square" anchor="t" lIns="45720" rIns="45720" tIns="27432" bIns="27432">
+          <a:bodyPr wrap="square" lIns="45720" tIns="27432" rIns="45720" bIns="27432" anchor="t">
             <a:spAutoFit/>
           </a:bodyPr>
           <a:lstStyle/>
@@ -6465,7 +6272,7 @@
               </a:spcAft>
             </a:pPr>
             <a:r>
-              <a:rPr sz="1300" b="0" i="0" lang="he-IL">
+              <a:rPr lang="he-IL" sz="1300" b="0" i="0">
                 <a:solidFill>
                   <a:srgbClr val="6B6478"/>
                 </a:solidFill>
@@ -6520,6 +6327,7 @@
           <a:lstStyle/>
           <a:p>
             <a:pPr algn="ctr"/>
+            <a:endParaRPr/>
           </a:p>
         </p:txBody>
       </p:sp>
@@ -6551,7 +6359,7 @@
               </a:spcAft>
             </a:pPr>
             <a:r>
-              <a:rPr sz="1200" b="0" i="0" lang="en-US">
+              <a:rPr lang="en-US" sz="1200" b="0" i="0">
                 <a:solidFill>
                   <a:srgbClr val="EDE8F5"/>
                 </a:solidFill>
@@ -6568,7 +6376,7 @@
               </a:spcAft>
             </a:pPr>
             <a:r>
-              <a:rPr sz="1200" b="0" i="0" lang="en-US">
+              <a:rPr lang="en-US" sz="1200" b="0" i="0">
                 <a:solidFill>
                   <a:srgbClr val="EDE8F5"/>
                 </a:solidFill>
@@ -6597,12 +6405,12 @@
           <a:noFill/>
         </p:spPr>
         <p:txBody>
-          <a:bodyPr wrap="square" anchor="t" lIns="45720" rIns="45720" tIns="27432" bIns="27432">
+          <a:bodyPr wrap="square" lIns="45720" tIns="27432" rIns="45720" bIns="27432" anchor="t">
             <a:spAutoFit/>
           </a:bodyPr>
           <a:lstStyle/>
           <a:p>
-            <a:pPr algn="r" rtl="1" marR="274320" indent="-274320">
+            <a:pPr marR="274320" indent="-274320" algn="r" rtl="1">
               <a:spcAft>
                 <a:spcPts val="800"/>
               </a:spcAft>
@@ -6613,7 +6421,7 @@
               <a:buChar char="•"/>
             </a:pPr>
             <a:r>
-              <a:rPr sz="1500" b="0" i="0" lang="he-IL">
+              <a:rPr lang="he-IL" sz="1500" b="0" i="0">
                 <a:solidFill>
                   <a:srgbClr val="2B1E3F"/>
                 </a:solidFill>
@@ -6623,7 +6431,7 @@
               <a:t>לכל דגימה של </a:t>
             </a:r>
             <a:r>
-              <a:rPr sz="1500" b="0" i="0" lang="en-US">
+              <a:rPr lang="en-US" sz="1500" b="0" i="0">
                 <a:solidFill>
                   <a:srgbClr val="2B1E3F"/>
                 </a:solidFill>
@@ -6633,7 +6441,7 @@
               <a:t>μ</a:t>
             </a:r>
             <a:r>
-              <a:rPr sz="1500" b="0" i="0" lang="he-IL">
+              <a:rPr lang="he-IL" sz="1500" b="0" i="0">
                 <a:solidFill>
                   <a:srgbClr val="2B1E3F"/>
                 </a:solidFill>
@@ -6643,7 +6451,7 @@
               <a:t> ו-</a:t>
             </a:r>
             <a:r>
-              <a:rPr sz="1500" b="0" i="0" lang="en-US">
+              <a:rPr lang="en-US" sz="1500" b="0" i="0">
                 <a:solidFill>
                   <a:srgbClr val="2B1E3F"/>
                 </a:solidFill>
@@ -6653,7 +6461,7 @@
               <a:t>σ</a:t>
             </a:r>
             <a:r>
-              <a:rPr sz="1500" b="0" i="0" lang="he-IL">
+              <a:rPr lang="he-IL" sz="1500" b="0" i="0">
                 <a:solidFill>
                   <a:srgbClr val="2B1E3F"/>
                 </a:solidFill>
@@ -6664,7 +6472,7 @@
             </a:r>
           </a:p>
           <a:p>
-            <a:pPr algn="r" rtl="1" marR="274320" indent="-274320">
+            <a:pPr marR="274320" indent="-274320" algn="r" rtl="1">
               <a:spcAft>
                 <a:spcPts val="800"/>
               </a:spcAft>
@@ -6675,7 +6483,7 @@
               <a:buChar char="•"/>
             </a:pPr>
             <a:r>
-              <a:rPr sz="1500" b="0" i="0" lang="he-IL">
+              <a:rPr lang="he-IL" sz="1500" b="0" i="0">
                 <a:solidFill>
                   <a:srgbClr val="2B1E3F"/>
                 </a:solidFill>
@@ -6696,7 +6504,7 @@
 </file>
 
 <file path=ppt/slides/slide13.xml><?xml version="1.0" encoding="utf-8"?>
-<p:sld xmlns:a="http://schemas.openxmlformats.org/drawingml/2006/main" xmlns:p="http://schemas.openxmlformats.org/presentationml/2006/main" xmlns:r="http://schemas.openxmlformats.org/officeDocument/2006/relationships">
+<p:sld xmlns:a="http://schemas.openxmlformats.org/drawingml/2006/main" xmlns:r="http://schemas.openxmlformats.org/officeDocument/2006/relationships" xmlns:p="http://schemas.openxmlformats.org/presentationml/2006/main">
   <p:cSld>
     <p:bg>
       <p:bgPr>
@@ -6712,7 +6520,14 @@
         <p:cNvGrpSpPr/>
         <p:nvPr/>
       </p:nvGrpSpPr>
-      <p:grpSpPr/>
+      <p:grpSpPr>
+        <a:xfrm>
+          <a:off x="0" y="0"/>
+          <a:ext cx="0" cy="0"/>
+          <a:chOff x="0" y="0"/>
+          <a:chExt cx="0" cy="0"/>
+        </a:xfrm>
+      </p:grpSpPr>
       <p:sp>
         <p:nvSpPr>
           <p:cNvPr id="2" name="Title"/>
@@ -6730,7 +6545,7 @@
           <a:noFill/>
         </p:spPr>
         <p:txBody>
-          <a:bodyPr wrap="square" anchor="ctr" lIns="45720" rIns="45720" tIns="27432" bIns="27432">
+          <a:bodyPr wrap="square" lIns="45720" tIns="27432" rIns="45720" bIns="27432" anchor="ctr">
             <a:spAutoFit/>
           </a:bodyPr>
           <a:lstStyle/>
@@ -6741,7 +6556,7 @@
               </a:spcAft>
             </a:pPr>
             <a:r>
-              <a:rPr sz="3400" b="1" i="0" lang="he-IL">
+              <a:rPr lang="he-IL" sz="3400" b="1" i="0">
                 <a:solidFill>
                   <a:srgbClr val="2B1E3F"/>
                 </a:solidFill>
@@ -6762,7 +6577,7 @@
           <p:nvPr/>
         </p:nvPicPr>
         <p:blipFill>
-          <a:blip r:embed="rId2"/>
+          <a:blip r:embed="rId3"/>
           <a:stretch>
             <a:fillRect/>
           </a:stretch>
@@ -6820,6 +6635,7 @@
           <a:lstStyle/>
           <a:p>
             <a:pPr algn="ctr"/>
+            <a:endParaRPr/>
           </a:p>
         </p:txBody>
       </p:sp>
@@ -6851,7 +6667,7 @@
               </a:spcAft>
             </a:pPr>
             <a:r>
-              <a:rPr sz="1200" b="0" i="0" lang="en-US">
+              <a:rPr lang="en-US" sz="1200" b="0" i="0">
                 <a:solidFill>
                   <a:srgbClr val="EDE8F5"/>
                 </a:solidFill>
@@ -6868,7 +6684,7 @@
               </a:spcAft>
             </a:pPr>
             <a:r>
-              <a:rPr sz="1200" b="0" i="0" lang="en-US">
+              <a:rPr lang="en-US" sz="1200" b="0" i="0">
                 <a:solidFill>
                   <a:srgbClr val="EDE8F5"/>
                 </a:solidFill>
@@ -6897,12 +6713,12 @@
           <a:noFill/>
         </p:spPr>
         <p:txBody>
-          <a:bodyPr wrap="square" anchor="t" lIns="45720" rIns="45720" tIns="27432" bIns="27432">
+          <a:bodyPr wrap="square" lIns="45720" tIns="27432" rIns="45720" bIns="27432" anchor="t">
             <a:spAutoFit/>
           </a:bodyPr>
           <a:lstStyle/>
           <a:p>
-            <a:pPr algn="r" rtl="1" marR="274320" indent="-274320">
+            <a:pPr marR="274320" indent="-274320" algn="r" rtl="1">
               <a:spcAft>
                 <a:spcPts val="1200"/>
               </a:spcAft>
@@ -6913,7 +6729,7 @@
               <a:buChar char="•"/>
             </a:pPr>
             <a:r>
-              <a:rPr sz="1600" b="0" i="0" lang="he-IL">
+              <a:rPr lang="he-IL" sz="1600" b="0" i="0">
                 <a:solidFill>
                   <a:srgbClr val="2B1E3F"/>
                 </a:solidFill>
@@ -6924,7 +6740,7 @@
             </a:r>
           </a:p>
           <a:p>
-            <a:pPr algn="r" rtl="1" marR="274320" indent="-274320">
+            <a:pPr marR="274320" indent="-274320" algn="r" rtl="1">
               <a:spcAft>
                 <a:spcPts val="1200"/>
               </a:spcAft>
@@ -6935,7 +6751,7 @@
               <a:buChar char="•"/>
             </a:pPr>
             <a:r>
-              <a:rPr sz="1600" b="0" i="0" lang="he-IL">
+              <a:rPr lang="he-IL" sz="1600" b="0" i="0">
                 <a:solidFill>
                   <a:srgbClr val="2B1E3F"/>
                 </a:solidFill>
@@ -6946,7 +6762,7 @@
             </a:r>
           </a:p>
           <a:p>
-            <a:pPr algn="r" rtl="1" marR="274320" indent="-274320">
+            <a:pPr marR="274320" indent="-274320" algn="r" rtl="1">
               <a:spcAft>
                 <a:spcPts val="1200"/>
               </a:spcAft>
@@ -6957,7 +6773,7 @@
               <a:buChar char="•"/>
             </a:pPr>
             <a:r>
-              <a:rPr sz="1600" b="0" i="0" lang="he-IL">
+              <a:rPr lang="he-IL" sz="1600" b="0" i="0">
                 <a:solidFill>
                   <a:srgbClr val="2B1E3F"/>
                 </a:solidFill>
@@ -6968,7 +6784,7 @@
             </a:r>
           </a:p>
           <a:p>
-            <a:pPr algn="r" rtl="1" marR="274320" indent="-274320">
+            <a:pPr marR="274320" indent="-274320" algn="r" rtl="1">
               <a:spcAft>
                 <a:spcPts val="1200"/>
               </a:spcAft>
@@ -6979,7 +6795,7 @@
               <a:buChar char="•"/>
             </a:pPr>
             <a:r>
-              <a:rPr sz="1600" b="0" i="0" lang="he-IL">
+              <a:rPr lang="he-IL" sz="1600" b="0" i="0">
                 <a:solidFill>
                   <a:srgbClr val="2B1E3F"/>
                 </a:solidFill>
@@ -7000,7 +6816,7 @@
 </file>
 
 <file path=ppt/slides/slide14.xml><?xml version="1.0" encoding="utf-8"?>
-<p:sld xmlns:a="http://schemas.openxmlformats.org/drawingml/2006/main" xmlns:p="http://schemas.openxmlformats.org/presentationml/2006/main" xmlns:r="http://schemas.openxmlformats.org/officeDocument/2006/relationships">
+<p:sld xmlns:a="http://schemas.openxmlformats.org/drawingml/2006/main" xmlns:r="http://schemas.openxmlformats.org/officeDocument/2006/relationships" xmlns:p="http://schemas.openxmlformats.org/presentationml/2006/main">
   <p:cSld>
     <p:bg>
       <p:bgPr>
@@ -7016,7 +6832,14 @@
         <p:cNvGrpSpPr/>
         <p:nvPr/>
       </p:nvGrpSpPr>
-      <p:grpSpPr/>
+      <p:grpSpPr>
+        <a:xfrm>
+          <a:off x="0" y="0"/>
+          <a:ext cx="0" cy="0"/>
+          <a:chOff x="0" y="0"/>
+          <a:chExt cx="0" cy="0"/>
+        </a:xfrm>
+      </p:grpSpPr>
       <p:sp>
         <p:nvSpPr>
           <p:cNvPr id="2" name="Title"/>
@@ -7034,7 +6857,7 @@
           <a:noFill/>
         </p:spPr>
         <p:txBody>
-          <a:bodyPr wrap="square" anchor="ctr" lIns="45720" rIns="45720" tIns="27432" bIns="27432">
+          <a:bodyPr wrap="square" lIns="45720" tIns="27432" rIns="45720" bIns="27432" anchor="ctr">
             <a:spAutoFit/>
           </a:bodyPr>
           <a:lstStyle/>
@@ -7045,7 +6868,7 @@
               </a:spcAft>
             </a:pPr>
             <a:r>
-              <a:rPr sz="3400" b="1" i="0" lang="he-IL">
+              <a:rPr lang="he-IL" sz="3400" b="1" i="0">
                 <a:solidFill>
                   <a:srgbClr val="2B1E3F"/>
                 </a:solidFill>
@@ -7066,7 +6889,7 @@
           <p:nvPr/>
         </p:nvPicPr>
         <p:blipFill>
-          <a:blip r:embed="rId2"/>
+          <a:blip r:embed="rId3"/>
           <a:stretch>
             <a:fillRect/>
           </a:stretch>
@@ -7124,6 +6947,7 @@
           <a:lstStyle/>
           <a:p>
             <a:pPr algn="ctr"/>
+            <a:endParaRPr/>
           </a:p>
         </p:txBody>
       </p:sp>
@@ -7144,7 +6968,7 @@
           <a:noFill/>
         </p:spPr>
         <p:txBody>
-          <a:bodyPr wrap="square" anchor="ctr" lIns="45720" rIns="45720" tIns="27432" bIns="27432">
+          <a:bodyPr wrap="square" lIns="45720" tIns="27432" rIns="45720" bIns="27432" anchor="ctr">
             <a:spAutoFit/>
           </a:bodyPr>
           <a:lstStyle/>
@@ -7155,7 +6979,7 @@
               </a:spcAft>
             </a:pPr>
             <a:r>
-              <a:rPr sz="2400" b="1" i="0" lang="he-IL">
+              <a:rPr lang="he-IL" sz="2400" b="1" i="0">
                 <a:solidFill>
                   <a:srgbClr val="17A398"/>
                 </a:solidFill>
@@ -7184,7 +7008,7 @@
           <a:noFill/>
         </p:spPr>
         <p:txBody>
-          <a:bodyPr wrap="square" anchor="t" lIns="45720" rIns="45720" tIns="27432" bIns="27432">
+          <a:bodyPr wrap="square" lIns="45720" tIns="27432" rIns="45720" bIns="27432" anchor="t">
             <a:spAutoFit/>
           </a:bodyPr>
           <a:lstStyle/>
@@ -7195,7 +7019,7 @@
               </a:spcAft>
             </a:pPr>
             <a:r>
-              <a:rPr sz="1300" b="0" i="0" lang="he-IL">
+              <a:rPr lang="he-IL" sz="1300" b="0" i="0">
                 <a:solidFill>
                   <a:srgbClr val="6B6478"/>
                 </a:solidFill>
@@ -7250,6 +7074,7 @@
           <a:lstStyle/>
           <a:p>
             <a:pPr algn="ctr"/>
+            <a:endParaRPr/>
           </a:p>
         </p:txBody>
       </p:sp>
@@ -7270,7 +7095,7 @@
           <a:noFill/>
         </p:spPr>
         <p:txBody>
-          <a:bodyPr wrap="square" anchor="ctr" lIns="45720" rIns="45720" tIns="27432" bIns="27432">
+          <a:bodyPr wrap="square" lIns="45720" tIns="27432" rIns="45720" bIns="27432" anchor="ctr">
             <a:spAutoFit/>
           </a:bodyPr>
           <a:lstStyle/>
@@ -7281,7 +7106,7 @@
               </a:spcAft>
             </a:pPr>
             <a:r>
-              <a:rPr sz="2400" b="1" i="0" lang="he-IL">
+              <a:rPr lang="he-IL" sz="2400" b="1" i="0">
                 <a:solidFill>
                   <a:srgbClr val="7B5EA7"/>
                 </a:solidFill>
@@ -7310,7 +7135,7 @@
           <a:noFill/>
         </p:spPr>
         <p:txBody>
-          <a:bodyPr wrap="square" anchor="t" lIns="45720" rIns="45720" tIns="27432" bIns="27432">
+          <a:bodyPr wrap="square" lIns="45720" tIns="27432" rIns="45720" bIns="27432" anchor="t">
             <a:spAutoFit/>
           </a:bodyPr>
           <a:lstStyle/>
@@ -7321,7 +7146,7 @@
               </a:spcAft>
             </a:pPr>
             <a:r>
-              <a:rPr sz="1300" b="0" i="0" lang="he-IL">
+              <a:rPr lang="he-IL" sz="1300" b="0" i="0">
                 <a:solidFill>
                   <a:srgbClr val="6B6478"/>
                 </a:solidFill>
@@ -7350,12 +7175,12 @@
           <a:noFill/>
         </p:spPr>
         <p:txBody>
-          <a:bodyPr wrap="square" anchor="t" lIns="45720" rIns="45720" tIns="27432" bIns="27432">
+          <a:bodyPr wrap="square" lIns="45720" tIns="27432" rIns="45720" bIns="27432" anchor="t">
             <a:spAutoFit/>
           </a:bodyPr>
           <a:lstStyle/>
           <a:p>
-            <a:pPr algn="r" rtl="1" marR="274320" indent="-274320">
+            <a:pPr marR="274320" indent="-274320" algn="r" rtl="1">
               <a:spcAft>
                 <a:spcPts val="1000"/>
               </a:spcAft>
@@ -7366,7 +7191,7 @@
               <a:buChar char="•"/>
             </a:pPr>
             <a:r>
-              <a:rPr sz="1600" b="0" i="0" lang="he-IL">
+              <a:rPr lang="he-IL" sz="1600" b="0" i="0">
                 <a:solidFill>
                   <a:srgbClr val="2B1E3F"/>
                 </a:solidFill>
@@ -7377,7 +7202,7 @@
             </a:r>
           </a:p>
           <a:p>
-            <a:pPr algn="r" rtl="1" marR="274320" indent="-274320">
+            <a:pPr marR="274320" indent="-274320" algn="r" rtl="1">
               <a:spcAft>
                 <a:spcPts val="1000"/>
               </a:spcAft>
@@ -7388,7 +7213,7 @@
               <a:buChar char="•"/>
             </a:pPr>
             <a:r>
-              <a:rPr sz="1600" b="0" i="0" lang="he-IL">
+              <a:rPr lang="he-IL" sz="1600" b="0" i="0">
                 <a:solidFill>
                   <a:srgbClr val="2B1E3F"/>
                 </a:solidFill>
@@ -7399,7 +7224,7 @@
             </a:r>
           </a:p>
           <a:p>
-            <a:pPr algn="r" rtl="1" marR="274320" indent="-274320">
+            <a:pPr marR="274320" indent="-274320" algn="r" rtl="1">
               <a:spcAft>
                 <a:spcPts val="1000"/>
               </a:spcAft>
@@ -7410,7 +7235,7 @@
               <a:buChar char="•"/>
             </a:pPr>
             <a:r>
-              <a:rPr sz="1600" b="1" i="0" lang="he-IL">
+              <a:rPr lang="he-IL" sz="1600" b="1" i="0">
                 <a:solidFill>
                   <a:srgbClr val="E4572E"/>
                 </a:solidFill>
@@ -7420,7 +7245,7 @@
               <a:t>תצפיות חריגות</a:t>
             </a:r>
             <a:r>
-              <a:rPr sz="1600" b="0" i="0" lang="he-IL">
+              <a:rPr lang="he-IL" sz="1600" b="0" i="0">
                 <a:solidFill>
                   <a:srgbClr val="2B1E3F"/>
                 </a:solidFill>
@@ -7431,7 +7256,7 @@
             </a:r>
           </a:p>
           <a:p>
-            <a:pPr algn="r" rtl="1" marR="274320" indent="-274320">
+            <a:pPr marR="274320" indent="-274320" algn="r" rtl="1">
               <a:spcAft>
                 <a:spcPts val="1000"/>
               </a:spcAft>
@@ -7442,7 +7267,7 @@
               <a:buChar char="•"/>
             </a:pPr>
             <a:r>
-              <a:rPr sz="1600" b="0" i="0" lang="he-IL">
+              <a:rPr lang="he-IL" sz="1600" b="0" i="0">
                 <a:solidFill>
                   <a:srgbClr val="2B1E3F"/>
                 </a:solidFill>
@@ -7463,7 +7288,7 @@
 </file>
 
 <file path=ppt/slides/slide15.xml><?xml version="1.0" encoding="utf-8"?>
-<p:sld xmlns:a="http://schemas.openxmlformats.org/drawingml/2006/main" xmlns:p="http://schemas.openxmlformats.org/presentationml/2006/main" xmlns:r="http://schemas.openxmlformats.org/officeDocument/2006/relationships">
+<p:sld xmlns:a="http://schemas.openxmlformats.org/drawingml/2006/main" xmlns:r="http://schemas.openxmlformats.org/officeDocument/2006/relationships" xmlns:p="http://schemas.openxmlformats.org/presentationml/2006/main">
   <p:cSld>
     <p:bg>
       <p:bgPr>
@@ -7479,7 +7304,14 @@
         <p:cNvGrpSpPr/>
         <p:nvPr/>
       </p:nvGrpSpPr>
-      <p:grpSpPr/>
+      <p:grpSpPr>
+        <a:xfrm>
+          <a:off x="0" y="0"/>
+          <a:ext cx="0" cy="0"/>
+          <a:chOff x="0" y="0"/>
+          <a:chExt cx="0" cy="0"/>
+        </a:xfrm>
+      </p:grpSpPr>
       <p:sp>
         <p:nvSpPr>
           <p:cNvPr id="2" name="Title"/>
@@ -7497,7 +7329,7 @@
           <a:noFill/>
         </p:spPr>
         <p:txBody>
-          <a:bodyPr wrap="square" anchor="ctr" lIns="45720" rIns="45720" tIns="27432" bIns="27432">
+          <a:bodyPr wrap="square" lIns="45720" tIns="27432" rIns="45720" bIns="27432" anchor="ctr">
             <a:spAutoFit/>
           </a:bodyPr>
           <a:lstStyle/>
@@ -7508,7 +7340,7 @@
               </a:spcAft>
             </a:pPr>
             <a:r>
-              <a:rPr sz="3400" b="1" i="0" lang="he-IL">
+              <a:rPr lang="he-IL" sz="3400" b="1" i="0">
                 <a:solidFill>
                   <a:srgbClr val="2B1E3F"/>
                 </a:solidFill>
@@ -7529,7 +7361,7 @@
           <p:nvPr/>
         </p:nvPicPr>
         <p:blipFill>
-          <a:blip r:embed="rId2"/>
+          <a:blip r:embed="rId3"/>
           <a:stretch>
             <a:fillRect/>
           </a:stretch>
@@ -7587,6 +7419,7 @@
           <a:lstStyle/>
           <a:p>
             <a:pPr algn="ctr"/>
+            <a:endParaRPr/>
           </a:p>
         </p:txBody>
       </p:sp>
@@ -7627,12 +7460,12 @@
           </a:fontRef>
         </p:style>
         <p:txBody>
-          <a:bodyPr rtlCol="0" anchor="ctr" lIns="0" rIns="0" tIns="0" bIns="0"/>
+          <a:bodyPr lIns="0" tIns="0" rIns="0" bIns="0" rtlCol="0" anchor="ctr"/>
           <a:lstStyle/>
           <a:p>
             <a:pPr algn="ctr"/>
             <a:r>
-              <a:rPr sz="2000" b="1" i="0" lang="en-US">
+              <a:rPr lang="en-US" sz="2000" b="1" i="0">
                 <a:solidFill>
                   <a:srgbClr val="FFFFFF"/>
                 </a:solidFill>
@@ -7661,7 +7494,7 @@
           <a:noFill/>
         </p:spPr>
         <p:txBody>
-          <a:bodyPr wrap="square" anchor="t" lIns="45720" rIns="45720" tIns="27432" bIns="27432">
+          <a:bodyPr wrap="square" lIns="45720" tIns="27432" rIns="45720" bIns="27432" anchor="t">
             <a:spAutoFit/>
           </a:bodyPr>
           <a:lstStyle/>
@@ -7672,7 +7505,7 @@
               </a:spcAft>
             </a:pPr>
             <a:r>
-              <a:rPr sz="1600" b="1" i="0" lang="he-IL">
+              <a:rPr lang="he-IL" sz="1600" b="1" i="0">
                 <a:solidFill>
                   <a:srgbClr val="2B1E3F"/>
                 </a:solidFill>
@@ -7701,7 +7534,7 @@
           <a:noFill/>
         </p:spPr>
         <p:txBody>
-          <a:bodyPr wrap="square" anchor="t" lIns="45720" rIns="45720" tIns="27432" bIns="27432">
+          <a:bodyPr wrap="square" lIns="45720" tIns="27432" rIns="45720" bIns="27432" anchor="t">
             <a:spAutoFit/>
           </a:bodyPr>
           <a:lstStyle/>
@@ -7712,7 +7545,7 @@
               </a:spcAft>
             </a:pPr>
             <a:r>
-              <a:rPr sz="1200" b="0" i="0" lang="he-IL">
+              <a:rPr lang="he-IL" sz="1200" b="0" i="0">
                 <a:solidFill>
                   <a:srgbClr val="6B6478"/>
                 </a:solidFill>
@@ -7767,6 +7600,7 @@
           <a:lstStyle/>
           <a:p>
             <a:pPr algn="ctr"/>
+            <a:endParaRPr/>
           </a:p>
         </p:txBody>
       </p:sp>
@@ -7807,12 +7641,12 @@
           </a:fontRef>
         </p:style>
         <p:txBody>
-          <a:bodyPr rtlCol="0" anchor="ctr" lIns="0" rIns="0" tIns="0" bIns="0"/>
+          <a:bodyPr lIns="0" tIns="0" rIns="0" bIns="0" rtlCol="0" anchor="ctr"/>
           <a:lstStyle/>
           <a:p>
             <a:pPr algn="ctr"/>
             <a:r>
-              <a:rPr sz="2000" b="1" i="0" lang="en-US">
+              <a:rPr lang="en-US" sz="2000" b="1" i="0">
                 <a:solidFill>
                   <a:srgbClr val="FFFFFF"/>
                 </a:solidFill>
@@ -7841,7 +7675,7 @@
           <a:noFill/>
         </p:spPr>
         <p:txBody>
-          <a:bodyPr wrap="square" anchor="t" lIns="45720" rIns="45720" tIns="27432" bIns="27432">
+          <a:bodyPr wrap="square" lIns="45720" tIns="27432" rIns="45720" bIns="27432" anchor="t">
             <a:spAutoFit/>
           </a:bodyPr>
           <a:lstStyle/>
@@ -7852,7 +7686,7 @@
               </a:spcAft>
             </a:pPr>
             <a:r>
-              <a:rPr sz="1600" b="1" i="0" lang="he-IL">
+              <a:rPr lang="he-IL" sz="1600" b="1" i="0">
                 <a:solidFill>
                   <a:srgbClr val="2B1E3F"/>
                 </a:solidFill>
@@ -7881,7 +7715,7 @@
           <a:noFill/>
         </p:spPr>
         <p:txBody>
-          <a:bodyPr wrap="square" anchor="t" lIns="45720" rIns="45720" tIns="27432" bIns="27432">
+          <a:bodyPr wrap="square" lIns="45720" tIns="27432" rIns="45720" bIns="27432" anchor="t">
             <a:spAutoFit/>
           </a:bodyPr>
           <a:lstStyle/>
@@ -7892,7 +7726,7 @@
               </a:spcAft>
             </a:pPr>
             <a:r>
-              <a:rPr sz="1200" b="0" i="0" lang="he-IL">
+              <a:rPr lang="he-IL" sz="1200" b="0" i="0">
                 <a:solidFill>
                   <a:srgbClr val="6B6478"/>
                 </a:solidFill>
@@ -7947,6 +7781,7 @@
           <a:lstStyle/>
           <a:p>
             <a:pPr algn="ctr"/>
+            <a:endParaRPr/>
           </a:p>
         </p:txBody>
       </p:sp>
@@ -7987,12 +7822,12 @@
           </a:fontRef>
         </p:style>
         <p:txBody>
-          <a:bodyPr rtlCol="0" anchor="ctr" lIns="0" rIns="0" tIns="0" bIns="0"/>
+          <a:bodyPr lIns="0" tIns="0" rIns="0" bIns="0" rtlCol="0" anchor="ctr"/>
           <a:lstStyle/>
           <a:p>
             <a:pPr algn="ctr"/>
             <a:r>
-              <a:rPr sz="2000" b="1" i="0" lang="en-US">
+              <a:rPr lang="en-US" sz="2000" b="1" i="0">
                 <a:solidFill>
                   <a:srgbClr val="FFFFFF"/>
                 </a:solidFill>
@@ -8021,7 +7856,7 @@
           <a:noFill/>
         </p:spPr>
         <p:txBody>
-          <a:bodyPr wrap="square" anchor="t" lIns="45720" rIns="45720" tIns="27432" bIns="27432">
+          <a:bodyPr wrap="square" lIns="45720" tIns="27432" rIns="45720" bIns="27432" anchor="t">
             <a:spAutoFit/>
           </a:bodyPr>
           <a:lstStyle/>
@@ -8032,7 +7867,7 @@
               </a:spcAft>
             </a:pPr>
             <a:r>
-              <a:rPr sz="1600" b="1" i="0" lang="he-IL">
+              <a:rPr lang="he-IL" sz="1600" b="1" i="0">
                 <a:solidFill>
                   <a:srgbClr val="2B1E3F"/>
                 </a:solidFill>
@@ -8061,7 +7896,7 @@
           <a:noFill/>
         </p:spPr>
         <p:txBody>
-          <a:bodyPr wrap="square" anchor="t" lIns="45720" rIns="45720" tIns="27432" bIns="27432">
+          <a:bodyPr wrap="square" lIns="45720" tIns="27432" rIns="45720" bIns="27432" anchor="t">
             <a:spAutoFit/>
           </a:bodyPr>
           <a:lstStyle/>
@@ -8072,7 +7907,7 @@
               </a:spcAft>
             </a:pPr>
             <a:r>
-              <a:rPr sz="1200" b="0" i="0" lang="en-US">
+              <a:rPr lang="en-US" sz="1200" b="0" i="0">
                 <a:solidFill>
                   <a:srgbClr val="6B6478"/>
                 </a:solidFill>
@@ -8082,7 +7917,7 @@
               <a:t>ν</a:t>
             </a:r>
             <a:r>
-              <a:rPr sz="1200" b="0" i="0" lang="he-IL">
+              <a:rPr lang="he-IL" sz="1200" b="0" i="0">
                 <a:solidFill>
                   <a:srgbClr val="6B6478"/>
                 </a:solidFill>
@@ -8092,7 +7927,7 @@
               <a:t> קטן — זנבות כבדים; </a:t>
             </a:r>
             <a:r>
-              <a:rPr sz="1200" b="0" i="0" lang="en-US">
+              <a:rPr lang="en-US" sz="1200" b="0" i="0">
                 <a:solidFill>
                   <a:srgbClr val="6B6478"/>
                 </a:solidFill>
@@ -8102,7 +7937,7 @@
               <a:t>ν</a:t>
             </a:r>
             <a:r>
-              <a:rPr sz="1200" b="0" i="0" lang="he-IL">
+              <a:rPr lang="he-IL" sz="1200" b="0" i="0">
                 <a:solidFill>
                   <a:srgbClr val="6B6478"/>
                 </a:solidFill>
@@ -8157,6 +7992,7 @@
           <a:lstStyle/>
           <a:p>
             <a:pPr algn="ctr"/>
+            <a:endParaRPr/>
           </a:p>
         </p:txBody>
       </p:sp>
@@ -8177,12 +8013,12 @@
           <a:noFill/>
         </p:spPr>
         <p:txBody>
-          <a:bodyPr wrap="square" anchor="t" lIns="45720" rIns="45720" tIns="27432" bIns="27432">
+          <a:bodyPr wrap="square" lIns="45720" tIns="27432" rIns="45720" bIns="27432" anchor="t">
             <a:spAutoFit/>
           </a:bodyPr>
           <a:lstStyle/>
           <a:p>
-            <a:pPr algn="r" rtl="1" marR="274320" indent="-274320">
+            <a:pPr marR="274320" indent="-274320" algn="r" rtl="1">
               <a:spcAft>
                 <a:spcPts val="600"/>
               </a:spcAft>
@@ -8193,7 +8029,7 @@
               <a:buChar char="•"/>
             </a:pPr>
             <a:r>
-              <a:rPr sz="1600" b="0" i="0" lang="he-IL">
+              <a:rPr lang="he-IL" sz="1600" b="0" i="0">
                 <a:solidFill>
                   <a:srgbClr val="2B1E3F"/>
                 </a:solidFill>
@@ -8204,7 +8040,7 @@
             </a:r>
           </a:p>
           <a:p>
-            <a:pPr algn="r" rtl="1" marR="274320" indent="-274320">
+            <a:pPr marR="274320" indent="-274320" algn="r" rtl="1">
               <a:spcAft>
                 <a:spcPts val="600"/>
               </a:spcAft>
@@ -8215,7 +8051,7 @@
               <a:buChar char="•"/>
             </a:pPr>
             <a:r>
-              <a:rPr sz="1600" b="0" i="0" lang="he-IL">
+              <a:rPr lang="he-IL" sz="1600" b="0" i="0">
                 <a:solidFill>
                   <a:srgbClr val="2B1E3F"/>
                 </a:solidFill>
@@ -8225,7 +8061,7 @@
               <a:t>prior ל-</a:t>
             </a:r>
             <a:r>
-              <a:rPr sz="1600" b="0" i="0" lang="en-US">
+              <a:rPr lang="en-US" sz="1600" b="0" i="0">
                 <a:solidFill>
                   <a:srgbClr val="2B1E3F"/>
                 </a:solidFill>
@@ -8235,7 +8071,7 @@
               <a:t>ν</a:t>
             </a:r>
             <a:r>
-              <a:rPr sz="1600" b="0" i="0" lang="he-IL">
+              <a:rPr lang="he-IL" sz="1600" b="0" i="0">
                 <a:solidFill>
                   <a:srgbClr val="2B1E3F"/>
                 </a:solidFill>
@@ -8256,7 +8092,7 @@
 </file>
 
 <file path=ppt/slides/slide16.xml><?xml version="1.0" encoding="utf-8"?>
-<p:sld xmlns:a="http://schemas.openxmlformats.org/drawingml/2006/main" xmlns:p="http://schemas.openxmlformats.org/presentationml/2006/main" xmlns:r="http://schemas.openxmlformats.org/officeDocument/2006/relationships">
+<p:sld xmlns:a="http://schemas.openxmlformats.org/drawingml/2006/main" xmlns:r="http://schemas.openxmlformats.org/officeDocument/2006/relationships" xmlns:p="http://schemas.openxmlformats.org/presentationml/2006/main">
   <p:cSld>
     <p:bg>
       <p:bgPr>
@@ -8272,7 +8108,14 @@
         <p:cNvGrpSpPr/>
         <p:nvPr/>
       </p:nvGrpSpPr>
-      <p:grpSpPr/>
+      <p:grpSpPr>
+        <a:xfrm>
+          <a:off x="0" y="0"/>
+          <a:ext cx="0" cy="0"/>
+          <a:chOff x="0" y="0"/>
+          <a:chExt cx="0" cy="0"/>
+        </a:xfrm>
+      </p:grpSpPr>
       <p:sp>
         <p:nvSpPr>
           <p:cNvPr id="2" name="Title"/>
@@ -8290,7 +8133,7 @@
           <a:noFill/>
         </p:spPr>
         <p:txBody>
-          <a:bodyPr wrap="square" anchor="ctr" lIns="45720" rIns="45720" tIns="27432" bIns="27432">
+          <a:bodyPr wrap="square" lIns="45720" tIns="27432" rIns="45720" bIns="27432" anchor="ctr">
             <a:spAutoFit/>
           </a:bodyPr>
           <a:lstStyle/>
@@ -8301,7 +8144,7 @@
               </a:spcAft>
             </a:pPr>
             <a:r>
-              <a:rPr sz="3400" b="1" i="0" lang="he-IL">
+              <a:rPr lang="he-IL" sz="3400" b="1" i="0">
                 <a:solidFill>
                   <a:srgbClr val="2B1E3F"/>
                 </a:solidFill>
@@ -8311,7 +8154,7 @@
               <a:t>המודל: שתי קבוצות, </a:t>
             </a:r>
             <a:r>
-              <a:rPr sz="3400" b="1" i="0" lang="en-US">
+              <a:rPr lang="en-US" sz="3400" b="1" i="0">
                 <a:solidFill>
                   <a:srgbClr val="2B1E3F"/>
                 </a:solidFill>
@@ -8321,7 +8164,7 @@
               <a:t>ν</a:t>
             </a:r>
             <a:r>
-              <a:rPr sz="3400" b="1" i="0" lang="he-IL">
+              <a:rPr lang="he-IL" sz="3400" b="1" i="0">
                 <a:solidFill>
                   <a:srgbClr val="2B1E3F"/>
                 </a:solidFill>
@@ -8376,6 +8219,7 @@
           <a:lstStyle/>
           <a:p>
             <a:pPr algn="ctr"/>
+            <a:endParaRPr/>
           </a:p>
         </p:txBody>
       </p:sp>
@@ -8388,7 +8232,7 @@
           <p:nvPr/>
         </p:nvPicPr>
         <p:blipFill>
-          <a:blip r:embed="rId2"/>
+          <a:blip r:embed="rId3"/>
           <a:stretch>
             <a:fillRect/>
           </a:stretch>
@@ -8412,7 +8256,7 @@
           <p:nvPr/>
         </p:nvPicPr>
         <p:blipFill>
-          <a:blip r:embed="rId3"/>
+          <a:blip r:embed="rId4"/>
           <a:stretch>
             <a:fillRect/>
           </a:stretch>
@@ -8470,6 +8314,7 @@
           <a:lstStyle/>
           <a:p>
             <a:pPr algn="ctr"/>
+            <a:endParaRPr/>
           </a:p>
         </p:txBody>
       </p:sp>
@@ -8501,7 +8346,7 @@
               </a:spcAft>
             </a:pPr>
             <a:r>
-              <a:rPr sz="1200" b="0" i="0" lang="en-US">
+              <a:rPr lang="en-US" sz="1200" b="0" i="0">
                 <a:solidFill>
                   <a:srgbClr val="EDE8F5"/>
                 </a:solidFill>
@@ -8518,7 +8363,7 @@
               </a:spcAft>
             </a:pPr>
             <a:r>
-              <a:rPr sz="1200" b="0" i="0" lang="en-US">
+              <a:rPr lang="en-US" sz="1200" b="0" i="0">
                 <a:solidFill>
                   <a:srgbClr val="EDE8F5"/>
                 </a:solidFill>
@@ -8535,7 +8380,7 @@
               </a:spcAft>
             </a:pPr>
             <a:r>
-              <a:rPr sz="1200" b="0" i="0" lang="en-US">
+              <a:rPr lang="en-US" sz="1200" b="0" i="0">
                 <a:solidFill>
                   <a:srgbClr val="EDE8F5"/>
                 </a:solidFill>
@@ -8552,7 +8397,7 @@
               </a:spcAft>
             </a:pPr>
             <a:r>
-              <a:rPr sz="1200" b="0" i="0" lang="en-US">
+              <a:rPr lang="en-US" sz="1200" b="0" i="0">
                 <a:solidFill>
                   <a:srgbClr val="EDE8F5"/>
                 </a:solidFill>
@@ -8569,7 +8414,7 @@
               </a:spcAft>
             </a:pPr>
             <a:r>
-              <a:rPr sz="1200" b="0" i="0" lang="en-US">
+              <a:rPr lang="en-US" sz="1200" b="0" i="0">
                 <a:solidFill>
                   <a:srgbClr val="EDE8F5"/>
                 </a:solidFill>
@@ -8586,7 +8431,7 @@
               </a:spcAft>
             </a:pPr>
             <a:r>
-              <a:rPr sz="1200" b="0" i="0" lang="en-US">
+              <a:rPr lang="en-US" sz="1200" b="0" i="0">
                 <a:solidFill>
                   <a:srgbClr val="EDE8F5"/>
                 </a:solidFill>
@@ -8603,7 +8448,7 @@
               </a:spcAft>
             </a:pPr>
             <a:r>
-              <a:rPr sz="1200" b="0" i="0" lang="en-US">
+              <a:rPr lang="en-US" sz="1200" b="0" i="0">
                 <a:solidFill>
                   <a:srgbClr val="EDE8F5"/>
                 </a:solidFill>
@@ -8620,7 +8465,7 @@
               </a:spcAft>
             </a:pPr>
             <a:r>
-              <a:rPr sz="1200" b="0" i="0" lang="en-US">
+              <a:rPr lang="en-US" sz="1200" b="0" i="0">
                 <a:solidFill>
                   <a:srgbClr val="EDE8F5"/>
                 </a:solidFill>
@@ -8637,7 +8482,7 @@
               </a:spcAft>
             </a:pPr>
             <a:r>
-              <a:rPr sz="1200" b="0" i="0" lang="en-US">
+              <a:rPr lang="en-US" sz="1200" b="0" i="0">
                 <a:solidFill>
                   <a:srgbClr val="EDE8F5"/>
                 </a:solidFill>
@@ -8654,7 +8499,7 @@
               </a:spcAft>
             </a:pPr>
             <a:r>
-              <a:rPr sz="1200" b="0" i="0" lang="en-US">
+              <a:rPr lang="en-US" sz="1200" b="0" i="0">
                 <a:solidFill>
                   <a:srgbClr val="EDE8F5"/>
                 </a:solidFill>
@@ -8671,7 +8516,7 @@
               </a:spcAft>
             </a:pPr>
             <a:r>
-              <a:rPr sz="1200" b="0" i="0" lang="en-US">
+              <a:rPr lang="en-US" sz="1200" b="0" i="0">
                 <a:solidFill>
                   <a:srgbClr val="EDE8F5"/>
                 </a:solidFill>
@@ -8726,6 +8571,7 @@
           <a:lstStyle/>
           <a:p>
             <a:pPr algn="ctr"/>
+            <a:endParaRPr/>
           </a:p>
         </p:txBody>
       </p:sp>
@@ -8746,7 +8592,7 @@
           <a:noFill/>
         </p:spPr>
         <p:txBody>
-          <a:bodyPr wrap="square" anchor="t" lIns="45720" rIns="45720" tIns="27432" bIns="27432">
+          <a:bodyPr wrap="square" lIns="45720" tIns="27432" rIns="45720" bIns="27432" anchor="t">
             <a:spAutoFit/>
           </a:bodyPr>
           <a:lstStyle/>
@@ -8757,7 +8603,7 @@
               </a:spcAft>
             </a:pPr>
             <a:r>
-              <a:rPr sz="1600" b="1" i="0" lang="he-IL">
+              <a:rPr lang="he-IL" sz="1600" b="1" i="0">
                 <a:solidFill>
                   <a:srgbClr val="17A398"/>
                 </a:solidFill>
@@ -8786,7 +8632,7 @@
           <a:noFill/>
         </p:spPr>
         <p:txBody>
-          <a:bodyPr wrap="square" anchor="t" lIns="45720" rIns="45720" tIns="27432" bIns="27432">
+          <a:bodyPr wrap="square" lIns="45720" tIns="27432" rIns="45720" bIns="27432" anchor="t">
             <a:spAutoFit/>
           </a:bodyPr>
           <a:lstStyle/>
@@ -8797,7 +8643,7 @@
               </a:spcAft>
             </a:pPr>
             <a:r>
-              <a:rPr sz="1300" b="0" i="0" lang="he-IL">
+              <a:rPr lang="he-IL" sz="1300" b="0" i="0">
                 <a:solidFill>
                   <a:srgbClr val="6B6478"/>
                 </a:solidFill>
@@ -8852,6 +8698,7 @@
           <a:lstStyle/>
           <a:p>
             <a:pPr algn="ctr"/>
+            <a:endParaRPr/>
           </a:p>
         </p:txBody>
       </p:sp>
@@ -8872,7 +8719,7 @@
           <a:noFill/>
         </p:spPr>
         <p:txBody>
-          <a:bodyPr wrap="square" anchor="t" lIns="45720" rIns="45720" tIns="27432" bIns="27432">
+          <a:bodyPr wrap="square" lIns="45720" tIns="27432" rIns="45720" bIns="27432" anchor="t">
             <a:spAutoFit/>
           </a:bodyPr>
           <a:lstStyle/>
@@ -8883,7 +8730,7 @@
               </a:spcAft>
             </a:pPr>
             <a:r>
-              <a:rPr sz="1600" b="1" i="0" lang="en-US">
+              <a:rPr lang="en-US" sz="1600" b="1" i="0">
                 <a:solidFill>
                   <a:srgbClr val="7B5EA7"/>
                 </a:solidFill>
@@ -8893,7 +8740,7 @@
               <a:t>σ</a:t>
             </a:r>
             <a:r>
-              <a:rPr sz="1600" b="1" i="0" lang="he-IL">
+              <a:rPr lang="he-IL" sz="1600" b="1" i="0">
                 <a:solidFill>
                   <a:srgbClr val="7B5EA7"/>
                 </a:solidFill>
@@ -8922,7 +8769,7 @@
           <a:noFill/>
         </p:spPr>
         <p:txBody>
-          <a:bodyPr wrap="square" anchor="t" lIns="45720" rIns="45720" tIns="27432" bIns="27432">
+          <a:bodyPr wrap="square" lIns="45720" tIns="27432" rIns="45720" bIns="27432" anchor="t">
             <a:spAutoFit/>
           </a:bodyPr>
           <a:lstStyle/>
@@ -8933,7 +8780,7 @@
               </a:spcAft>
             </a:pPr>
             <a:r>
-              <a:rPr sz="1300" b="0" i="0" lang="he-IL">
+              <a:rPr lang="he-IL" sz="1300" b="0" i="0">
                 <a:solidFill>
                   <a:srgbClr val="6B6478"/>
                 </a:solidFill>
@@ -8988,6 +8835,7 @@
           <a:lstStyle/>
           <a:p>
             <a:pPr algn="ctr"/>
+            <a:endParaRPr/>
           </a:p>
         </p:txBody>
       </p:sp>
@@ -9008,7 +8856,7 @@
           <a:noFill/>
         </p:spPr>
         <p:txBody>
-          <a:bodyPr wrap="square" anchor="t" lIns="45720" rIns="45720" tIns="27432" bIns="27432">
+          <a:bodyPr wrap="square" lIns="45720" tIns="27432" rIns="45720" bIns="27432" anchor="t">
             <a:spAutoFit/>
           </a:bodyPr>
           <a:lstStyle/>
@@ -9019,7 +8867,7 @@
               </a:spcAft>
             </a:pPr>
             <a:r>
-              <a:rPr sz="1600" b="1" i="0" lang="en-US">
+              <a:rPr lang="en-US" sz="1600" b="1" i="0">
                 <a:solidFill>
                   <a:srgbClr val="E4572E"/>
                 </a:solidFill>
@@ -9029,7 +8877,7 @@
               <a:t>ν</a:t>
             </a:r>
             <a:r>
-              <a:rPr sz="1600" b="1" i="0" lang="he-IL">
+              <a:rPr lang="he-IL" sz="1600" b="1" i="0">
                 <a:solidFill>
                   <a:srgbClr val="E4572E"/>
                 </a:solidFill>
@@ -9058,7 +8906,7 @@
           <a:noFill/>
         </p:spPr>
         <p:txBody>
-          <a:bodyPr wrap="square" anchor="t" lIns="45720" rIns="45720" tIns="27432" bIns="27432">
+          <a:bodyPr wrap="square" lIns="45720" tIns="27432" rIns="45720" bIns="27432" anchor="t">
             <a:spAutoFit/>
           </a:bodyPr>
           <a:lstStyle/>
@@ -9069,7 +8917,7 @@
               </a:spcAft>
             </a:pPr>
             <a:r>
-              <a:rPr sz="1300" b="0" i="0" lang="he-IL">
+              <a:rPr lang="he-IL" sz="1300" b="0" i="0">
                 <a:solidFill>
                   <a:srgbClr val="6B6478"/>
                 </a:solidFill>
@@ -9090,7 +8938,7 @@
 </file>
 
 <file path=ppt/slides/slide17.xml><?xml version="1.0" encoding="utf-8"?>
-<p:sld xmlns:a="http://schemas.openxmlformats.org/drawingml/2006/main" xmlns:p="http://schemas.openxmlformats.org/presentationml/2006/main" xmlns:r="http://schemas.openxmlformats.org/officeDocument/2006/relationships">
+<p:sld xmlns:a="http://schemas.openxmlformats.org/drawingml/2006/main" xmlns:r="http://schemas.openxmlformats.org/officeDocument/2006/relationships" xmlns:p="http://schemas.openxmlformats.org/presentationml/2006/main">
   <p:cSld>
     <p:bg>
       <p:bgPr>
@@ -9106,7 +8954,14 @@
         <p:cNvGrpSpPr/>
         <p:nvPr/>
       </p:nvGrpSpPr>
-      <p:grpSpPr/>
+      <p:grpSpPr>
+        <a:xfrm>
+          <a:off x="0" y="0"/>
+          <a:ext cx="0" cy="0"/>
+          <a:chOff x="0" y="0"/>
+          <a:chExt cx="0" cy="0"/>
+        </a:xfrm>
+      </p:grpSpPr>
       <p:sp>
         <p:nvSpPr>
           <p:cNvPr id="2" name="Title"/>
@@ -9124,7 +8979,7 @@
           <a:noFill/>
         </p:spPr>
         <p:txBody>
-          <a:bodyPr wrap="square" anchor="ctr" lIns="45720" rIns="45720" tIns="27432" bIns="27432">
+          <a:bodyPr wrap="square" lIns="45720" tIns="27432" rIns="45720" bIns="27432" anchor="ctr">
             <a:spAutoFit/>
           </a:bodyPr>
           <a:lstStyle/>
@@ -9135,7 +8990,7 @@
               </a:spcAft>
             </a:pPr>
             <a:r>
-              <a:rPr sz="3400" b="1" i="0" lang="he-IL">
+              <a:rPr lang="he-IL" sz="3400" b="1" i="0">
                 <a:solidFill>
                   <a:srgbClr val="2B1E3F"/>
                 </a:solidFill>
@@ -9190,6 +9045,7 @@
           <a:lstStyle/>
           <a:p>
             <a:pPr algn="ctr"/>
+            <a:endParaRPr/>
           </a:p>
         </p:txBody>
       </p:sp>
@@ -9202,7 +9058,7 @@
           <p:nvPr/>
         </p:nvPicPr>
         <p:blipFill>
-          <a:blip r:embed="rId2"/>
+          <a:blip r:embed="rId3"/>
           <a:stretch>
             <a:fillRect/>
           </a:stretch>
@@ -9260,6 +9116,7 @@
           <a:lstStyle/>
           <a:p>
             <a:pPr algn="ctr"/>
+            <a:endParaRPr/>
           </a:p>
         </p:txBody>
       </p:sp>
@@ -9291,7 +9148,7 @@
               </a:spcAft>
             </a:pPr>
             <a:r>
-              <a:rPr sz="1300" b="0" i="0" lang="en-US">
+              <a:rPr lang="en-US" sz="1300" b="0" i="0">
                 <a:solidFill>
                   <a:srgbClr val="EDE8F5"/>
                 </a:solidFill>
@@ -9308,7 +9165,7 @@
               </a:spcAft>
             </a:pPr>
             <a:r>
-              <a:rPr sz="1300" b="0" i="0" lang="en-US">
+              <a:rPr lang="en-US" sz="1300" b="0" i="0">
                 <a:solidFill>
                   <a:srgbClr val="EDE8F5"/>
                 </a:solidFill>
@@ -9325,7 +9182,7 @@
               </a:spcAft>
             </a:pPr>
             <a:r>
-              <a:rPr sz="1300" b="0" i="0" lang="en-US">
+              <a:rPr lang="en-US" sz="1300" b="0" i="0">
                 <a:solidFill>
                   <a:srgbClr val="EDE8F5"/>
                 </a:solidFill>
@@ -9342,7 +9199,7 @@
               </a:spcAft>
             </a:pPr>
             <a:r>
-              <a:rPr sz="1300" b="0" i="0" lang="en-US">
+              <a:rPr lang="en-US" sz="1300" b="0" i="0">
                 <a:solidFill>
                   <a:srgbClr val="EDE8F5"/>
                 </a:solidFill>
@@ -9359,7 +9216,7 @@
               </a:spcAft>
             </a:pPr>
             <a:r>
-              <a:rPr sz="1300" b="0" i="0" lang="en-US">
+              <a:rPr lang="en-US" sz="1300" b="0" i="0">
                 <a:solidFill>
                   <a:srgbClr val="EDE8F5"/>
                 </a:solidFill>
@@ -9376,7 +9233,7 @@
               </a:spcAft>
             </a:pPr>
             <a:r>
-              <a:rPr sz="1300" b="0" i="0" lang="en-US">
+              <a:rPr lang="en-US" sz="1300" b="0" i="0">
                 <a:solidFill>
                   <a:srgbClr val="EDE8F5"/>
                 </a:solidFill>
@@ -9431,6 +9288,7 @@
           <a:lstStyle/>
           <a:p>
             <a:pPr algn="ctr"/>
+            <a:endParaRPr/>
           </a:p>
         </p:txBody>
       </p:sp>
@@ -9471,12 +9329,12 @@
           </a:fontRef>
         </p:style>
         <p:txBody>
-          <a:bodyPr rtlCol="0" anchor="ctr" lIns="0" rIns="0" tIns="0" bIns="0"/>
+          <a:bodyPr lIns="0" tIns="0" rIns="0" bIns="0" rtlCol="0" anchor="ctr"/>
           <a:lstStyle/>
           <a:p>
             <a:pPr algn="ctr"/>
             <a:r>
-              <a:rPr sz="2200" b="1" i="0" lang="en-US">
+              <a:rPr lang="en-US" sz="2200" b="1" i="0">
                 <a:solidFill>
                   <a:srgbClr val="FFFFFF"/>
                 </a:solidFill>
@@ -9505,7 +9363,7 @@
           <a:noFill/>
         </p:spPr>
         <p:txBody>
-          <a:bodyPr wrap="square" anchor="ctr" lIns="45720" rIns="45720" tIns="27432" bIns="27432">
+          <a:bodyPr wrap="square" lIns="45720" tIns="27432" rIns="45720" bIns="27432" anchor="ctr">
             <a:spAutoFit/>
           </a:bodyPr>
           <a:lstStyle/>
@@ -9516,7 +9374,7 @@
               </a:spcAft>
             </a:pPr>
             <a:r>
-              <a:rPr sz="1700" b="1" i="0" lang="he-IL">
+              <a:rPr lang="he-IL" sz="1700" b="1" i="0">
                 <a:solidFill>
                   <a:srgbClr val="2B1E3F"/>
                 </a:solidFill>
@@ -9545,7 +9403,7 @@
           <a:noFill/>
         </p:spPr>
         <p:txBody>
-          <a:bodyPr wrap="square" anchor="t" lIns="45720" rIns="45720" tIns="27432" bIns="27432">
+          <a:bodyPr wrap="square" lIns="45720" tIns="27432" rIns="45720" bIns="27432" anchor="t">
             <a:spAutoFit/>
           </a:bodyPr>
           <a:lstStyle/>
@@ -9556,7 +9414,7 @@
               </a:spcAft>
             </a:pPr>
             <a:r>
-              <a:rPr sz="1400" b="0" i="0" lang="he-IL">
+              <a:rPr lang="he-IL" sz="1400" b="0" i="0">
                 <a:solidFill>
                   <a:srgbClr val="6B6478"/>
                 </a:solidFill>
@@ -9611,6 +9469,7 @@
           <a:lstStyle/>
           <a:p>
             <a:pPr algn="ctr"/>
+            <a:endParaRPr/>
           </a:p>
         </p:txBody>
       </p:sp>
@@ -9651,12 +9510,12 @@
           </a:fontRef>
         </p:style>
         <p:txBody>
-          <a:bodyPr rtlCol="0" anchor="ctr" lIns="0" rIns="0" tIns="0" bIns="0"/>
+          <a:bodyPr lIns="0" tIns="0" rIns="0" bIns="0" rtlCol="0" anchor="ctr"/>
           <a:lstStyle/>
           <a:p>
             <a:pPr algn="ctr"/>
             <a:r>
-              <a:rPr sz="2200" b="1" i="0" lang="en-US">
+              <a:rPr lang="en-US" sz="2200" b="1" i="0">
                 <a:solidFill>
                   <a:srgbClr val="FFFFFF"/>
                 </a:solidFill>
@@ -9685,7 +9544,7 @@
           <a:noFill/>
         </p:spPr>
         <p:txBody>
-          <a:bodyPr wrap="square" anchor="ctr" lIns="45720" rIns="45720" tIns="27432" bIns="27432">
+          <a:bodyPr wrap="square" lIns="45720" tIns="27432" rIns="45720" bIns="27432" anchor="ctr">
             <a:spAutoFit/>
           </a:bodyPr>
           <a:lstStyle/>
@@ -9696,7 +9555,7 @@
               </a:spcAft>
             </a:pPr>
             <a:r>
-              <a:rPr sz="1700" b="1" i="0" lang="he-IL">
+              <a:rPr lang="he-IL" sz="1700" b="1" i="0">
                 <a:solidFill>
                   <a:srgbClr val="2B1E3F"/>
                 </a:solidFill>
@@ -9725,7 +9584,7 @@
           <a:noFill/>
         </p:spPr>
         <p:txBody>
-          <a:bodyPr wrap="square" anchor="t" lIns="45720" rIns="45720" tIns="27432" bIns="27432">
+          <a:bodyPr wrap="square" lIns="45720" tIns="27432" rIns="45720" bIns="27432" anchor="t">
             <a:spAutoFit/>
           </a:bodyPr>
           <a:lstStyle/>
@@ -9736,7 +9595,7 @@
               </a:spcAft>
             </a:pPr>
             <a:r>
-              <a:rPr sz="1400" b="0" i="0" lang="he-IL">
+              <a:rPr lang="he-IL" sz="1400" b="0" i="0">
                 <a:solidFill>
                   <a:srgbClr val="6B6478"/>
                 </a:solidFill>
@@ -9791,6 +9650,7 @@
           <a:lstStyle/>
           <a:p>
             <a:pPr algn="ctr"/>
+            <a:endParaRPr/>
           </a:p>
         </p:txBody>
       </p:sp>
@@ -9831,12 +9691,12 @@
           </a:fontRef>
         </p:style>
         <p:txBody>
-          <a:bodyPr rtlCol="0" anchor="ctr" lIns="0" rIns="0" tIns="0" bIns="0"/>
+          <a:bodyPr lIns="0" tIns="0" rIns="0" bIns="0" rtlCol="0" anchor="ctr"/>
           <a:lstStyle/>
           <a:p>
             <a:pPr algn="ctr"/>
             <a:r>
-              <a:rPr sz="2200" b="1" i="0" lang="he-IL">
+              <a:rPr lang="he-IL" sz="2200" b="1" i="0">
                 <a:solidFill>
                   <a:srgbClr val="FFFFFF"/>
                 </a:solidFill>
@@ -9865,7 +9725,7 @@
           <a:noFill/>
         </p:spPr>
         <p:txBody>
-          <a:bodyPr wrap="square" anchor="ctr" lIns="45720" rIns="45720" tIns="27432" bIns="27432">
+          <a:bodyPr wrap="square" lIns="45720" tIns="27432" rIns="45720" bIns="27432" anchor="ctr">
             <a:spAutoFit/>
           </a:bodyPr>
           <a:lstStyle/>
@@ -9876,7 +9736,7 @@
               </a:spcAft>
             </a:pPr>
             <a:r>
-              <a:rPr sz="1700" b="1" i="0" lang="he-IL">
+              <a:rPr lang="he-IL" sz="1700" b="1" i="0">
                 <a:solidFill>
                   <a:srgbClr val="2B1E3F"/>
                 </a:solidFill>
@@ -9905,7 +9765,7 @@
           <a:noFill/>
         </p:spPr>
         <p:txBody>
-          <a:bodyPr wrap="square" anchor="t" lIns="45720" rIns="45720" tIns="27432" bIns="27432">
+          <a:bodyPr wrap="square" lIns="45720" tIns="27432" rIns="45720" bIns="27432" anchor="t">
             <a:spAutoFit/>
           </a:bodyPr>
           <a:lstStyle/>
@@ -9916,7 +9776,7 @@
               </a:spcAft>
             </a:pPr>
             <a:r>
-              <a:rPr sz="1400" b="0" i="0" lang="he-IL">
+              <a:rPr lang="he-IL" sz="1400" b="0" i="0">
                 <a:solidFill>
                   <a:srgbClr val="6B6478"/>
                 </a:solidFill>
@@ -9937,7 +9797,7 @@
 </file>
 
 <file path=ppt/slides/slide18.xml><?xml version="1.0" encoding="utf-8"?>
-<p:sld xmlns:a="http://schemas.openxmlformats.org/drawingml/2006/main" xmlns:p="http://schemas.openxmlformats.org/presentationml/2006/main" xmlns:r="http://schemas.openxmlformats.org/officeDocument/2006/relationships">
+<p:sld xmlns:a="http://schemas.openxmlformats.org/drawingml/2006/main" xmlns:r="http://schemas.openxmlformats.org/officeDocument/2006/relationships" xmlns:p="http://schemas.openxmlformats.org/presentationml/2006/main">
   <p:cSld>
     <p:bg>
       <p:bgPr>
@@ -9953,7 +9813,14 @@
         <p:cNvGrpSpPr/>
         <p:nvPr/>
       </p:nvGrpSpPr>
-      <p:grpSpPr/>
+      <p:grpSpPr>
+        <a:xfrm>
+          <a:off x="0" y="0"/>
+          <a:ext cx="0" cy="0"/>
+          <a:chOff x="0" y="0"/>
+          <a:chExt cx="0" cy="0"/>
+        </a:xfrm>
+      </p:grpSpPr>
       <p:sp>
         <p:nvSpPr>
           <p:cNvPr id="2" name="Title"/>
@@ -9971,7 +9838,7 @@
           <a:noFill/>
         </p:spPr>
         <p:txBody>
-          <a:bodyPr wrap="square" anchor="ctr" lIns="45720" rIns="45720" tIns="27432" bIns="27432">
+          <a:bodyPr wrap="square" lIns="45720" tIns="27432" rIns="45720" bIns="27432" anchor="ctr">
             <a:spAutoFit/>
           </a:bodyPr>
           <a:lstStyle/>
@@ -9982,7 +9849,7 @@
               </a:spcAft>
             </a:pPr>
             <a:r>
-              <a:rPr sz="3400" b="1" i="0" lang="he-IL">
+              <a:rPr lang="he-IL" sz="3400" b="1" i="0">
                 <a:solidFill>
                   <a:srgbClr val="2B1E3F"/>
                 </a:solidFill>
@@ -10003,7 +9870,7 @@
           <p:nvPr/>
         </p:nvPicPr>
         <p:blipFill>
-          <a:blip r:embed="rId2"/>
+          <a:blip r:embed="rId3"/>
           <a:stretch>
             <a:fillRect/>
           </a:stretch>
@@ -10061,6 +9928,7 @@
           <a:lstStyle/>
           <a:p>
             <a:pPr algn="ctr"/>
+            <a:endParaRPr/>
           </a:p>
         </p:txBody>
       </p:sp>
@@ -10081,7 +9949,7 @@
           <a:noFill/>
         </p:spPr>
         <p:txBody>
-          <a:bodyPr wrap="square" anchor="ctr" lIns="45720" rIns="45720" tIns="27432" bIns="27432">
+          <a:bodyPr wrap="square" lIns="45720" tIns="27432" rIns="45720" bIns="27432" anchor="ctr">
             <a:spAutoFit/>
           </a:bodyPr>
           <a:lstStyle/>
@@ -10092,7 +9960,7 @@
               </a:spcAft>
             </a:pPr>
             <a:r>
-              <a:rPr sz="2800" b="1" i="0" lang="he-IL">
+              <a:rPr lang="he-IL" sz="2800" b="1" i="0">
                 <a:solidFill>
                   <a:srgbClr val="E4572E"/>
                 </a:solidFill>
@@ -10121,7 +9989,7 @@
           <a:noFill/>
         </p:spPr>
         <p:txBody>
-          <a:bodyPr wrap="square" anchor="t" lIns="45720" rIns="45720" tIns="27432" bIns="27432">
+          <a:bodyPr wrap="square" lIns="45720" tIns="27432" rIns="45720" bIns="27432" anchor="t">
             <a:spAutoFit/>
           </a:bodyPr>
           <a:lstStyle/>
@@ -10132,7 +10000,7 @@
               </a:spcAft>
             </a:pPr>
             <a:r>
-              <a:rPr sz="1300" b="0" i="0" lang="he-IL">
+              <a:rPr lang="he-IL" sz="1300" b="0" i="0">
                 <a:solidFill>
                   <a:srgbClr val="6B6478"/>
                 </a:solidFill>
@@ -10187,6 +10055,7 @@
           <a:lstStyle/>
           <a:p>
             <a:pPr algn="ctr"/>
+            <a:endParaRPr/>
           </a:p>
         </p:txBody>
       </p:sp>
@@ -10207,7 +10076,7 @@
           <a:noFill/>
         </p:spPr>
         <p:txBody>
-          <a:bodyPr wrap="square" anchor="ctr" lIns="45720" rIns="45720" tIns="27432" bIns="27432">
+          <a:bodyPr wrap="square" lIns="45720" tIns="27432" rIns="45720" bIns="27432" anchor="ctr">
             <a:spAutoFit/>
           </a:bodyPr>
           <a:lstStyle/>
@@ -10218,7 +10087,7 @@
               </a:spcAft>
             </a:pPr>
             <a:r>
-              <a:rPr sz="2800" b="1" i="0" lang="he-IL">
+              <a:rPr lang="he-IL" sz="2800" b="1" i="0">
                 <a:solidFill>
                   <a:srgbClr val="17A398"/>
                 </a:solidFill>
@@ -10247,7 +10116,7 @@
           <a:noFill/>
         </p:spPr>
         <p:txBody>
-          <a:bodyPr wrap="square" anchor="t" lIns="45720" rIns="45720" tIns="27432" bIns="27432">
+          <a:bodyPr wrap="square" lIns="45720" tIns="27432" rIns="45720" bIns="27432" anchor="t">
             <a:spAutoFit/>
           </a:bodyPr>
           <a:lstStyle/>
@@ -10258,7 +10127,7 @@
               </a:spcAft>
             </a:pPr>
             <a:r>
-              <a:rPr sz="1300" b="0" i="0" lang="he-IL">
+              <a:rPr lang="he-IL" sz="1300" b="0" i="0">
                 <a:solidFill>
                   <a:srgbClr val="6B6478"/>
                 </a:solidFill>
@@ -10313,6 +10182,7 @@
           <a:lstStyle/>
           <a:p>
             <a:pPr algn="ctr"/>
+            <a:endParaRPr/>
           </a:p>
         </p:txBody>
       </p:sp>
@@ -10333,7 +10203,7 @@
           <a:noFill/>
         </p:spPr>
         <p:txBody>
-          <a:bodyPr wrap="square" anchor="ctr" lIns="45720" rIns="45720" tIns="27432" bIns="27432">
+          <a:bodyPr wrap="square" lIns="45720" tIns="27432" rIns="45720" bIns="27432" anchor="ctr">
             <a:spAutoFit/>
           </a:bodyPr>
           <a:lstStyle/>
@@ -10344,7 +10214,7 @@
               </a:spcAft>
             </a:pPr>
             <a:r>
-              <a:rPr sz="2800" b="1" i="0" lang="he-IL">
+              <a:rPr lang="he-IL" sz="2800" b="1" i="0">
                 <a:solidFill>
                   <a:srgbClr val="7B5EA7"/>
                 </a:solidFill>
@@ -10373,7 +10243,7 @@
           <a:noFill/>
         </p:spPr>
         <p:txBody>
-          <a:bodyPr wrap="square" anchor="t" lIns="45720" rIns="45720" tIns="27432" bIns="27432">
+          <a:bodyPr wrap="square" lIns="45720" tIns="27432" rIns="45720" bIns="27432" anchor="t">
             <a:spAutoFit/>
           </a:bodyPr>
           <a:lstStyle/>
@@ -10384,7 +10254,7 @@
               </a:spcAft>
             </a:pPr>
             <a:r>
-              <a:rPr sz="1300" b="0" i="0" lang="he-IL">
+              <a:rPr lang="he-IL" sz="1300" b="0" i="0">
                 <a:solidFill>
                   <a:srgbClr val="6B6478"/>
                 </a:solidFill>
@@ -10439,6 +10309,7 @@
           <a:lstStyle/>
           <a:p>
             <a:pPr algn="ctr"/>
+            <a:endParaRPr/>
           </a:p>
         </p:txBody>
       </p:sp>
@@ -10459,7 +10330,7 @@
           <a:noFill/>
         </p:spPr>
         <p:txBody>
-          <a:bodyPr wrap="square" anchor="ctr" lIns="45720" rIns="45720" tIns="27432" bIns="27432">
+          <a:bodyPr wrap="square" lIns="45720" tIns="27432" rIns="45720" bIns="27432" anchor="ctr">
             <a:spAutoFit/>
           </a:bodyPr>
           <a:lstStyle/>
@@ -10470,7 +10341,7 @@
               </a:spcAft>
             </a:pPr>
             <a:r>
-              <a:rPr sz="2800" b="1" i="0" lang="he-IL">
+              <a:rPr lang="he-IL" sz="2800" b="1" i="0">
                 <a:solidFill>
                   <a:srgbClr val="2B1E3F"/>
                 </a:solidFill>
@@ -10499,7 +10370,7 @@
           <a:noFill/>
         </p:spPr>
         <p:txBody>
-          <a:bodyPr wrap="square" anchor="t" lIns="45720" rIns="45720" tIns="27432" bIns="27432">
+          <a:bodyPr wrap="square" lIns="45720" tIns="27432" rIns="45720" bIns="27432" anchor="t">
             <a:spAutoFit/>
           </a:bodyPr>
           <a:lstStyle/>
@@ -10510,7 +10381,7 @@
               </a:spcAft>
             </a:pPr>
             <a:r>
-              <a:rPr sz="1300" b="0" i="0" lang="en-US">
+              <a:rPr lang="en-US" sz="1300" b="0" i="0">
                 <a:solidFill>
                   <a:srgbClr val="6B6478"/>
                 </a:solidFill>
@@ -10520,7 +10391,7 @@
               <a:t>ν</a:t>
             </a:r>
             <a:r>
-              <a:rPr sz="1300" b="0" i="0" lang="he-IL">
+              <a:rPr lang="he-IL" sz="1300" b="0" i="0">
                 <a:solidFill>
                   <a:srgbClr val="6B6478"/>
                 </a:solidFill>
@@ -10541,7 +10412,7 @@
 </file>
 
 <file path=ppt/slides/slide19.xml><?xml version="1.0" encoding="utf-8"?>
-<p:sld xmlns:a="http://schemas.openxmlformats.org/drawingml/2006/main" xmlns:p="http://schemas.openxmlformats.org/presentationml/2006/main" xmlns:r="http://schemas.openxmlformats.org/officeDocument/2006/relationships">
+<p:sld xmlns:a="http://schemas.openxmlformats.org/drawingml/2006/main" xmlns:r="http://schemas.openxmlformats.org/officeDocument/2006/relationships" xmlns:p="http://schemas.openxmlformats.org/presentationml/2006/main">
   <p:cSld>
     <p:bg>
       <p:bgPr>
@@ -10557,7 +10428,14 @@
         <p:cNvGrpSpPr/>
         <p:nvPr/>
       </p:nvGrpSpPr>
-      <p:grpSpPr/>
+      <p:grpSpPr>
+        <a:xfrm>
+          <a:off x="0" y="0"/>
+          <a:ext cx="0" cy="0"/>
+          <a:chOff x="0" y="0"/>
+          <a:chExt cx="0" cy="0"/>
+        </a:xfrm>
+      </p:grpSpPr>
       <p:sp>
         <p:nvSpPr>
           <p:cNvPr id="2" name="Title"/>
@@ -10575,7 +10453,7 @@
           <a:noFill/>
         </p:spPr>
         <p:txBody>
-          <a:bodyPr wrap="square" anchor="ctr" lIns="45720" rIns="45720" tIns="27432" bIns="27432">
+          <a:bodyPr wrap="square" lIns="45720" tIns="27432" rIns="45720" bIns="27432" anchor="ctr">
             <a:spAutoFit/>
           </a:bodyPr>
           <a:lstStyle/>
@@ -10586,7 +10464,7 @@
               </a:spcAft>
             </a:pPr>
             <a:r>
-              <a:rPr sz="3400" b="1" i="0" lang="he-IL">
+              <a:rPr lang="he-IL" sz="3400" b="1" i="0">
                 <a:solidFill>
                   <a:srgbClr val="2B1E3F"/>
                 </a:solidFill>
@@ -10596,7 +10474,7 @@
               <a:t>רגישות ל-prior: </a:t>
             </a:r>
             <a:r>
-              <a:rPr sz="3400" b="1" i="0" lang="en-US">
+              <a:rPr lang="en-US" sz="3400" b="1" i="0">
                 <a:solidFill>
                   <a:srgbClr val="2B1E3F"/>
                 </a:solidFill>
@@ -10606,7 +10484,7 @@
               <a:t>ν</a:t>
             </a:r>
             <a:r>
-              <a:rPr sz="3400" b="1" i="0" lang="he-IL">
+              <a:rPr lang="he-IL" sz="3400" b="1" i="0">
                 <a:solidFill>
                   <a:srgbClr val="2B1E3F"/>
                 </a:solidFill>
@@ -10627,7 +10505,7 @@
           <p:nvPr/>
         </p:nvPicPr>
         <p:blipFill>
-          <a:blip r:embed="rId2"/>
+          <a:blip r:embed="rId3"/>
           <a:stretch>
             <a:fillRect/>
           </a:stretch>
@@ -10685,6 +10563,7 @@
           <a:lstStyle/>
           <a:p>
             <a:pPr algn="ctr"/>
+            <a:endParaRPr/>
           </a:p>
         </p:txBody>
       </p:sp>
@@ -10716,7 +10595,7 @@
               </a:spcAft>
             </a:pPr>
             <a:r>
-              <a:rPr sz="1400" b="0" i="0" lang="en-US">
+              <a:rPr lang="en-US" sz="1400" b="0" i="0">
                 <a:solidFill>
                   <a:srgbClr val="9C8FB5"/>
                 </a:solidFill>
@@ -10733,7 +10612,7 @@
               </a:spcAft>
             </a:pPr>
             <a:r>
-              <a:rPr sz="1400" b="0" i="0" lang="en-US">
+              <a:rPr lang="en-US" sz="1400" b="0" i="0">
                 <a:solidFill>
                   <a:srgbClr val="EDE8F5"/>
                 </a:solidFill>
@@ -10788,6 +10667,7 @@
           <a:lstStyle/>
           <a:p>
             <a:pPr algn="ctr"/>
+            <a:endParaRPr/>
           </a:p>
         </p:txBody>
       </p:sp>
@@ -10808,12 +10688,12 @@
           <a:noFill/>
         </p:spPr>
         <p:txBody>
-          <a:bodyPr wrap="square" anchor="ctr" lIns="45720" rIns="45720" tIns="27432" bIns="27432">
+          <a:bodyPr wrap="square" lIns="45720" tIns="27432" rIns="45720" bIns="27432" anchor="ctr">
             <a:spAutoFit/>
           </a:bodyPr>
           <a:lstStyle/>
           <a:p>
-            <a:pPr algn="r" rtl="1" marR="274320" indent="-274320">
+            <a:pPr marR="274320" indent="-274320" algn="r" rtl="1">
               <a:spcAft>
                 <a:spcPts val="600"/>
               </a:spcAft>
@@ -10824,7 +10704,7 @@
               <a:buChar char="•"/>
             </a:pPr>
             <a:r>
-              <a:rPr sz="1600" b="1" i="0" lang="he-IL">
+              <a:rPr lang="he-IL" sz="1600" b="1" i="0">
                 <a:solidFill>
                   <a:srgbClr val="2B1E3F"/>
                 </a:solidFill>
@@ -10835,7 +10715,7 @@
             </a:r>
           </a:p>
           <a:p>
-            <a:pPr algn="r" rtl="1" marR="274320" indent="-274320">
+            <a:pPr marR="274320" indent="-274320" algn="r" rtl="1">
               <a:spcAft>
                 <a:spcPts val="600"/>
               </a:spcAft>
@@ -10846,7 +10726,7 @@
               <a:buChar char="•"/>
             </a:pPr>
             <a:r>
-              <a:rPr sz="1600" b="1" i="0" lang="he-IL">
+              <a:rPr lang="he-IL" sz="1600" b="1" i="0">
                 <a:solidFill>
                   <a:srgbClr val="2B1E3F"/>
                 </a:solidFill>
@@ -10867,7 +10747,7 @@
 </file>
 
 <file path=ppt/slides/slide2.xml><?xml version="1.0" encoding="utf-8"?>
-<p:sld xmlns:a="http://schemas.openxmlformats.org/drawingml/2006/main" xmlns:p="http://schemas.openxmlformats.org/presentationml/2006/main" xmlns:r="http://schemas.openxmlformats.org/officeDocument/2006/relationships">
+<p:sld xmlns:a="http://schemas.openxmlformats.org/drawingml/2006/main" xmlns:r="http://schemas.openxmlformats.org/officeDocument/2006/relationships" xmlns:p="http://schemas.openxmlformats.org/presentationml/2006/main">
   <p:cSld>
     <p:bg>
       <p:bgPr>
@@ -10883,7 +10763,14 @@
         <p:cNvGrpSpPr/>
         <p:nvPr/>
       </p:nvGrpSpPr>
-      <p:grpSpPr/>
+      <p:grpSpPr>
+        <a:xfrm>
+          <a:off x="0" y="0"/>
+          <a:ext cx="0" cy="0"/>
+          <a:chOff x="0" y="0"/>
+          <a:chExt cx="0" cy="0"/>
+        </a:xfrm>
+      </p:grpSpPr>
       <p:sp>
         <p:nvSpPr>
           <p:cNvPr id="2" name="Title"/>
@@ -10901,7 +10788,7 @@
           <a:noFill/>
         </p:spPr>
         <p:txBody>
-          <a:bodyPr wrap="square" anchor="ctr" lIns="45720" rIns="45720" tIns="27432" bIns="27432">
+          <a:bodyPr wrap="square" lIns="45720" tIns="27432" rIns="45720" bIns="27432" anchor="ctr">
             <a:spAutoFit/>
           </a:bodyPr>
           <a:lstStyle/>
@@ -10912,7 +10799,7 @@
               </a:spcAft>
             </a:pPr>
             <a:r>
-              <a:rPr sz="3400" b="1" i="0" lang="he-IL">
+              <a:rPr lang="he-IL" sz="3400" b="1" i="0">
                 <a:solidFill>
                   <a:srgbClr val="2B1E3F"/>
                 </a:solidFill>
@@ -10967,6 +10854,7 @@
           <a:lstStyle/>
           <a:p>
             <a:pPr algn="ctr"/>
+            <a:endParaRPr/>
           </a:p>
         </p:txBody>
       </p:sp>
@@ -11007,12 +10895,12 @@
           </a:fontRef>
         </p:style>
         <p:txBody>
-          <a:bodyPr rtlCol="0" anchor="ctr" lIns="0" rIns="0" tIns="0" bIns="0"/>
+          <a:bodyPr lIns="0" tIns="0" rIns="0" bIns="0" rtlCol="0" anchor="ctr"/>
           <a:lstStyle/>
           <a:p>
             <a:pPr algn="ctr"/>
             <a:r>
-              <a:rPr sz="2800" b="1" i="0" lang="en-US">
+              <a:rPr lang="en-US" sz="2800" b="1" i="0">
                 <a:solidFill>
                   <a:srgbClr val="FFFFFF"/>
                 </a:solidFill>
@@ -11041,7 +10929,7 @@
           <a:noFill/>
         </p:spPr>
         <p:txBody>
-          <a:bodyPr wrap="square" anchor="t" lIns="45720" rIns="45720" tIns="27432" bIns="27432">
+          <a:bodyPr wrap="square" lIns="45720" tIns="27432" rIns="45720" bIns="27432" anchor="t">
             <a:spAutoFit/>
           </a:bodyPr>
           <a:lstStyle/>
@@ -11052,7 +10940,7 @@
               </a:spcAft>
             </a:pPr>
             <a:r>
-              <a:rPr sz="2100" b="1" i="0" lang="he-IL">
+              <a:rPr lang="he-IL" sz="2100" b="1" i="0">
                 <a:solidFill>
                   <a:srgbClr val="2B1E3F"/>
                 </a:solidFill>
@@ -11081,7 +10969,7 @@
           <a:noFill/>
         </p:spPr>
         <p:txBody>
-          <a:bodyPr wrap="square" anchor="t" lIns="45720" rIns="45720" tIns="27432" bIns="27432">
+          <a:bodyPr wrap="square" lIns="45720" tIns="27432" rIns="45720" bIns="27432" anchor="t">
             <a:spAutoFit/>
           </a:bodyPr>
           <a:lstStyle/>
@@ -11092,7 +10980,7 @@
               </a:spcAft>
             </a:pPr>
             <a:r>
-              <a:rPr sz="1600" b="0" i="0" lang="he-IL">
+              <a:rPr lang="he-IL" sz="1600" b="0" i="0">
                 <a:solidFill>
                   <a:srgbClr val="6B6478"/>
                 </a:solidFill>
@@ -11147,6 +11035,7 @@
           <a:lstStyle/>
           <a:p>
             <a:pPr algn="ctr"/>
+            <a:endParaRPr/>
           </a:p>
         </p:txBody>
       </p:sp>
@@ -11187,12 +11076,12 @@
           </a:fontRef>
         </p:style>
         <p:txBody>
-          <a:bodyPr rtlCol="0" anchor="ctr" lIns="0" rIns="0" tIns="0" bIns="0"/>
+          <a:bodyPr lIns="0" tIns="0" rIns="0" bIns="0" rtlCol="0" anchor="ctr"/>
           <a:lstStyle/>
           <a:p>
             <a:pPr algn="ctr"/>
             <a:r>
-              <a:rPr sz="2800" b="1" i="0" lang="en-US">
+              <a:rPr lang="en-US" sz="2800" b="1" i="0">
                 <a:solidFill>
                   <a:srgbClr val="FFFFFF"/>
                 </a:solidFill>
@@ -11221,7 +11110,7 @@
           <a:noFill/>
         </p:spPr>
         <p:txBody>
-          <a:bodyPr wrap="square" anchor="t" lIns="45720" rIns="45720" tIns="27432" bIns="27432">
+          <a:bodyPr wrap="square" lIns="45720" tIns="27432" rIns="45720" bIns="27432" anchor="t">
             <a:spAutoFit/>
           </a:bodyPr>
           <a:lstStyle/>
@@ -11232,7 +11121,7 @@
               </a:spcAft>
             </a:pPr>
             <a:r>
-              <a:rPr sz="2100" b="1" i="0" lang="he-IL">
+              <a:rPr lang="he-IL" sz="2100" b="1" i="0">
                 <a:solidFill>
                   <a:srgbClr val="2B1E3F"/>
                 </a:solidFill>
@@ -11261,7 +11150,7 @@
           <a:noFill/>
         </p:spPr>
         <p:txBody>
-          <a:bodyPr wrap="square" anchor="t" lIns="45720" rIns="45720" tIns="27432" bIns="27432">
+          <a:bodyPr wrap="square" lIns="45720" tIns="27432" rIns="45720" bIns="27432" anchor="t">
             <a:spAutoFit/>
           </a:bodyPr>
           <a:lstStyle/>
@@ -11272,7 +11161,7 @@
               </a:spcAft>
             </a:pPr>
             <a:r>
-              <a:rPr sz="1600" b="0" i="0" lang="he-IL">
+              <a:rPr lang="he-IL" sz="1600" b="0" i="0">
                 <a:solidFill>
                   <a:srgbClr val="6B6478"/>
                 </a:solidFill>
@@ -11327,6 +11216,7 @@
           <a:lstStyle/>
           <a:p>
             <a:pPr algn="ctr"/>
+            <a:endParaRPr/>
           </a:p>
         </p:txBody>
       </p:sp>
@@ -11367,12 +11257,12 @@
           </a:fontRef>
         </p:style>
         <p:txBody>
-          <a:bodyPr rtlCol="0" anchor="ctr" lIns="0" rIns="0" tIns="0" bIns="0"/>
+          <a:bodyPr lIns="0" tIns="0" rIns="0" bIns="0" rtlCol="0" anchor="ctr"/>
           <a:lstStyle/>
           <a:p>
             <a:pPr algn="ctr"/>
             <a:r>
-              <a:rPr sz="2800" b="1" i="0" lang="en-US">
+              <a:rPr lang="en-US" sz="2800" b="1" i="0">
                 <a:solidFill>
                   <a:srgbClr val="FFFFFF"/>
                 </a:solidFill>
@@ -11401,7 +11291,7 @@
           <a:noFill/>
         </p:spPr>
         <p:txBody>
-          <a:bodyPr wrap="square" anchor="t" lIns="45720" rIns="45720" tIns="27432" bIns="27432">
+          <a:bodyPr wrap="square" lIns="45720" tIns="27432" rIns="45720" bIns="27432" anchor="t">
             <a:spAutoFit/>
           </a:bodyPr>
           <a:lstStyle/>
@@ -11412,7 +11302,7 @@
               </a:spcAft>
             </a:pPr>
             <a:r>
-              <a:rPr sz="2100" b="1" i="0" lang="he-IL">
+              <a:rPr lang="he-IL" sz="2100" b="1" i="0">
                 <a:solidFill>
                   <a:srgbClr val="2B1E3F"/>
                 </a:solidFill>
@@ -11441,7 +11331,7 @@
           <a:noFill/>
         </p:spPr>
         <p:txBody>
-          <a:bodyPr wrap="square" anchor="t" lIns="45720" rIns="45720" tIns="27432" bIns="27432">
+          <a:bodyPr wrap="square" lIns="45720" tIns="27432" rIns="45720" bIns="27432" anchor="t">
             <a:spAutoFit/>
           </a:bodyPr>
           <a:lstStyle/>
@@ -11452,7 +11342,7 @@
               </a:spcAft>
             </a:pPr>
             <a:r>
-              <a:rPr sz="1600" b="0" i="0" lang="he-IL">
+              <a:rPr lang="he-IL" sz="1600" b="0" i="0">
                 <a:solidFill>
                   <a:srgbClr val="6B6478"/>
                 </a:solidFill>
@@ -11507,6 +11397,7 @@
           <a:lstStyle/>
           <a:p>
             <a:pPr algn="ctr"/>
+            <a:endParaRPr/>
           </a:p>
         </p:txBody>
       </p:sp>
@@ -11527,7 +11418,7 @@
           <a:noFill/>
         </p:spPr>
         <p:txBody>
-          <a:bodyPr wrap="square" anchor="ctr" lIns="45720" rIns="45720" tIns="27432" bIns="27432">
+          <a:bodyPr wrap="square" lIns="45720" tIns="27432" rIns="45720" bIns="27432" anchor="ctr">
             <a:spAutoFit/>
           </a:bodyPr>
           <a:lstStyle/>
@@ -11538,7 +11429,7 @@
               </a:spcAft>
             </a:pPr>
             <a:r>
-              <a:rPr sz="1700" b="1" i="0" lang="he-IL">
+              <a:rPr lang="he-IL" sz="1700" b="1" i="0">
                 <a:solidFill>
                   <a:srgbClr val="7B5EA7"/>
                 </a:solidFill>
@@ -11559,7 +11450,7 @@
 </file>
 
 <file path=ppt/slides/slide20.xml><?xml version="1.0" encoding="utf-8"?>
-<p:sld xmlns:a="http://schemas.openxmlformats.org/drawingml/2006/main" xmlns:p="http://schemas.openxmlformats.org/presentationml/2006/main" xmlns:r="http://schemas.openxmlformats.org/officeDocument/2006/relationships">
+<p:sld xmlns:a="http://schemas.openxmlformats.org/drawingml/2006/main" xmlns:r="http://schemas.openxmlformats.org/officeDocument/2006/relationships" xmlns:p="http://schemas.openxmlformats.org/presentationml/2006/main">
   <p:cSld>
     <p:bg>
       <p:bgPr>
@@ -11575,7 +11466,14 @@
         <p:cNvGrpSpPr/>
         <p:nvPr/>
       </p:nvGrpSpPr>
-      <p:grpSpPr/>
+      <p:grpSpPr>
+        <a:xfrm>
+          <a:off x="0" y="0"/>
+          <a:ext cx="0" cy="0"/>
+          <a:chOff x="0" y="0"/>
+          <a:chExt cx="0" cy="0"/>
+        </a:xfrm>
+      </p:grpSpPr>
       <p:sp>
         <p:nvSpPr>
           <p:cNvPr id="2" name="Title"/>
@@ -11593,7 +11491,7 @@
           <a:noFill/>
         </p:spPr>
         <p:txBody>
-          <a:bodyPr wrap="square" anchor="ctr" lIns="45720" rIns="45720" tIns="27432" bIns="27432">
+          <a:bodyPr wrap="square" lIns="45720" tIns="27432" rIns="45720" bIns="27432" anchor="ctr">
             <a:spAutoFit/>
           </a:bodyPr>
           <a:lstStyle/>
@@ -11604,7 +11502,7 @@
               </a:spcAft>
             </a:pPr>
             <a:r>
-              <a:rPr sz="3400" b="1" i="0" lang="he-IL">
+              <a:rPr lang="he-IL" sz="3400" b="1" i="0">
                 <a:solidFill>
                   <a:srgbClr val="FFFFFF"/>
                 </a:solidFill>
@@ -11653,12 +11551,12 @@
           </a:fontRef>
         </p:style>
         <p:txBody>
-          <a:bodyPr rtlCol="0" anchor="ctr" lIns="0" rIns="0" tIns="0" bIns="0"/>
+          <a:bodyPr lIns="0" tIns="0" rIns="0" bIns="0" rtlCol="0" anchor="ctr"/>
           <a:lstStyle/>
           <a:p>
             <a:pPr algn="ctr"/>
             <a:r>
-              <a:rPr sz="2400" b="1" i="0" lang="en-US">
+              <a:rPr lang="en-US" sz="2400" b="1" i="0">
                 <a:solidFill>
                   <a:srgbClr val="FFFFFF"/>
                 </a:solidFill>
@@ -11687,7 +11585,7 @@
           <a:noFill/>
         </p:spPr>
         <p:txBody>
-          <a:bodyPr wrap="square" anchor="ctr" lIns="45720" rIns="45720" tIns="27432" bIns="27432">
+          <a:bodyPr wrap="square" lIns="45720" tIns="27432" rIns="45720" bIns="27432" anchor="ctr">
             <a:spAutoFit/>
           </a:bodyPr>
           <a:lstStyle/>
@@ -11698,7 +11596,7 @@
               </a:spcAft>
             </a:pPr>
             <a:r>
-              <a:rPr sz="2100" b="0" i="0" lang="he-IL">
+              <a:rPr lang="he-IL" sz="2100" b="0" i="0">
                 <a:solidFill>
                   <a:srgbClr val="FFFFFF"/>
                 </a:solidFill>
@@ -11747,12 +11645,12 @@
           </a:fontRef>
         </p:style>
         <p:txBody>
-          <a:bodyPr rtlCol="0" anchor="ctr" lIns="0" rIns="0" tIns="0" bIns="0"/>
+          <a:bodyPr lIns="0" tIns="0" rIns="0" bIns="0" rtlCol="0" anchor="ctr"/>
           <a:lstStyle/>
           <a:p>
             <a:pPr algn="ctr"/>
             <a:r>
-              <a:rPr sz="2400" b="1" i="0" lang="en-US">
+              <a:rPr lang="en-US" sz="2400" b="1" i="0">
                 <a:solidFill>
                   <a:srgbClr val="FFFFFF"/>
                 </a:solidFill>
@@ -11781,7 +11679,7 @@
           <a:noFill/>
         </p:spPr>
         <p:txBody>
-          <a:bodyPr wrap="square" anchor="ctr" lIns="45720" rIns="45720" tIns="27432" bIns="27432">
+          <a:bodyPr wrap="square" lIns="45720" tIns="27432" rIns="45720" bIns="27432" anchor="ctr">
             <a:spAutoFit/>
           </a:bodyPr>
           <a:lstStyle/>
@@ -11792,7 +11690,7 @@
               </a:spcAft>
             </a:pPr>
             <a:r>
-              <a:rPr sz="2100" b="0" i="0" lang="he-IL">
+              <a:rPr lang="he-IL" sz="2100" b="0" i="0">
                 <a:solidFill>
                   <a:srgbClr val="FFFFFF"/>
                 </a:solidFill>
@@ -11841,12 +11739,12 @@
           </a:fontRef>
         </p:style>
         <p:txBody>
-          <a:bodyPr rtlCol="0" anchor="ctr" lIns="0" rIns="0" tIns="0" bIns="0"/>
+          <a:bodyPr lIns="0" tIns="0" rIns="0" bIns="0" rtlCol="0" anchor="ctr"/>
           <a:lstStyle/>
           <a:p>
             <a:pPr algn="ctr"/>
             <a:r>
-              <a:rPr sz="2400" b="1" i="0" lang="en-US">
+              <a:rPr lang="en-US" sz="2400" b="1" i="0">
                 <a:solidFill>
                   <a:srgbClr val="FFFFFF"/>
                 </a:solidFill>
@@ -11875,7 +11773,7 @@
           <a:noFill/>
         </p:spPr>
         <p:txBody>
-          <a:bodyPr wrap="square" anchor="ctr" lIns="45720" rIns="45720" tIns="27432" bIns="27432">
+          <a:bodyPr wrap="square" lIns="45720" tIns="27432" rIns="45720" bIns="27432" anchor="ctr">
             <a:spAutoFit/>
           </a:bodyPr>
           <a:lstStyle/>
@@ -11886,7 +11784,7 @@
               </a:spcAft>
             </a:pPr>
             <a:r>
-              <a:rPr sz="2100" b="0" i="0" lang="he-IL">
+              <a:rPr lang="he-IL" sz="2100" b="0" i="0">
                 <a:solidFill>
                   <a:srgbClr val="FFFFFF"/>
                 </a:solidFill>
@@ -11935,12 +11833,12 @@
           </a:fontRef>
         </p:style>
         <p:txBody>
-          <a:bodyPr rtlCol="0" anchor="ctr" lIns="0" rIns="0" tIns="0" bIns="0"/>
+          <a:bodyPr lIns="0" tIns="0" rIns="0" bIns="0" rtlCol="0" anchor="ctr"/>
           <a:lstStyle/>
           <a:p>
             <a:pPr algn="ctr"/>
             <a:r>
-              <a:rPr sz="2400" b="1" i="0" lang="en-US">
+              <a:rPr lang="en-US" sz="2400" b="1" i="0">
                 <a:solidFill>
                   <a:srgbClr val="FFFFFF"/>
                 </a:solidFill>
@@ -11969,7 +11867,7 @@
           <a:noFill/>
         </p:spPr>
         <p:txBody>
-          <a:bodyPr wrap="square" anchor="ctr" lIns="45720" rIns="45720" tIns="27432" bIns="27432">
+          <a:bodyPr wrap="square" lIns="45720" tIns="27432" rIns="45720" bIns="27432" anchor="ctr">
             <a:spAutoFit/>
           </a:bodyPr>
           <a:lstStyle/>
@@ -11980,7 +11878,7 @@
               </a:spcAft>
             </a:pPr>
             <a:r>
-              <a:rPr sz="2100" b="0" i="0" lang="he-IL">
+              <a:rPr lang="he-IL" sz="2100" b="0" i="0">
                 <a:solidFill>
                   <a:srgbClr val="FFFFFF"/>
                 </a:solidFill>
@@ -12001,7 +11899,7 @@
 </file>
 
 <file path=ppt/slides/slide3.xml><?xml version="1.0" encoding="utf-8"?>
-<p:sld xmlns:a="http://schemas.openxmlformats.org/drawingml/2006/main" xmlns:p="http://schemas.openxmlformats.org/presentationml/2006/main" xmlns:r="http://schemas.openxmlformats.org/officeDocument/2006/relationships">
+<p:sld xmlns:a="http://schemas.openxmlformats.org/drawingml/2006/main" xmlns:r="http://schemas.openxmlformats.org/officeDocument/2006/relationships" xmlns:p="http://schemas.openxmlformats.org/presentationml/2006/main">
   <p:cSld>
     <p:bg>
       <p:bgPr>
@@ -12017,7 +11915,14 @@
         <p:cNvGrpSpPr/>
         <p:nvPr/>
       </p:nvGrpSpPr>
-      <p:grpSpPr/>
+      <p:grpSpPr>
+        <a:xfrm>
+          <a:off x="0" y="0"/>
+          <a:ext cx="0" cy="0"/>
+          <a:chOff x="0" y="0"/>
+          <a:chExt cx="0" cy="0"/>
+        </a:xfrm>
+      </p:grpSpPr>
       <p:sp>
         <p:nvSpPr>
           <p:cNvPr id="2" name="Title"/>
@@ -12035,7 +11940,7 @@
           <a:noFill/>
         </p:spPr>
         <p:txBody>
-          <a:bodyPr wrap="square" anchor="ctr" lIns="45720" rIns="45720" tIns="27432" bIns="27432">
+          <a:bodyPr wrap="square" lIns="45720" tIns="27432" rIns="45720" bIns="27432" anchor="ctr">
             <a:spAutoFit/>
           </a:bodyPr>
           <a:lstStyle/>
@@ -12046,7 +11951,7 @@
               </a:spcAft>
             </a:pPr>
             <a:r>
-              <a:rPr sz="3400" b="1" i="0" lang="he-IL">
+              <a:rPr lang="he-IL" sz="3400" b="1" i="0">
                 <a:solidFill>
                   <a:srgbClr val="2B1E3F"/>
                 </a:solidFill>
@@ -12067,7 +11972,7 @@
           <p:nvPr/>
         </p:nvPicPr>
         <p:blipFill>
-          <a:blip r:embed="rId2"/>
+          <a:blip r:embed="rId3"/>
           <a:stretch>
             <a:fillRect/>
           </a:stretch>
@@ -12125,6 +12030,7 @@
           <a:lstStyle/>
           <a:p>
             <a:pPr algn="ctr"/>
+            <a:endParaRPr/>
           </a:p>
         </p:txBody>
       </p:sp>
@@ -12156,7 +12062,7 @@
               </a:spcAft>
             </a:pPr>
             <a:r>
-              <a:rPr sz="1200" b="0" i="0" lang="en-US">
+              <a:rPr lang="en-US" sz="1200" b="0" i="0">
                 <a:solidFill>
                   <a:srgbClr val="EDE8F5"/>
                 </a:solidFill>
@@ -12173,7 +12079,7 @@
               </a:spcAft>
             </a:pPr>
             <a:r>
-              <a:rPr sz="1200" b="0" i="0" lang="en-US">
+              <a:rPr lang="en-US" sz="1200" b="0" i="0">
                 <a:solidFill>
                   <a:srgbClr val="EDE8F5"/>
                 </a:solidFill>
@@ -12190,7 +12096,7 @@
               </a:spcAft>
             </a:pPr>
             <a:r>
-              <a:rPr sz="1200" b="0" i="0" lang="en-US">
+              <a:rPr lang="en-US" sz="1200" b="0" i="0">
                 <a:solidFill>
                   <a:srgbClr val="EDE8F5"/>
                 </a:solidFill>
@@ -12207,7 +12113,7 @@
               </a:spcAft>
             </a:pPr>
             <a:r>
-              <a:rPr sz="1200" b="0" i="0" lang="en-US">
+              <a:rPr lang="en-US" sz="1200" b="0" i="0">
                 <a:solidFill>
                   <a:srgbClr val="EDE8F5"/>
                 </a:solidFill>
@@ -12224,7 +12130,7 @@
               </a:spcAft>
             </a:pPr>
             <a:r>
-              <a:rPr sz="1200" b="0" i="0" lang="en-US">
+              <a:rPr lang="en-US" sz="1200" b="0" i="0">
                 <a:solidFill>
                   <a:srgbClr val="EDE8F5"/>
                 </a:solidFill>
@@ -12241,7 +12147,7 @@
               </a:spcAft>
             </a:pPr>
             <a:r>
-              <a:rPr sz="1200" b="0" i="0" lang="en-US">
+              <a:rPr lang="en-US" sz="1200" b="0" i="0">
                 <a:solidFill>
                   <a:srgbClr val="EDE8F5"/>
                 </a:solidFill>
@@ -12296,6 +12202,7 @@
           <a:lstStyle/>
           <a:p>
             <a:pPr algn="ctr"/>
+            <a:endParaRPr/>
           </a:p>
         </p:txBody>
       </p:sp>
@@ -12316,7 +12223,7 @@
           <a:noFill/>
         </p:spPr>
         <p:txBody>
-          <a:bodyPr wrap="square" anchor="ctr" lIns="45720" rIns="45720" tIns="27432" bIns="27432">
+          <a:bodyPr wrap="square" lIns="45720" tIns="27432" rIns="45720" bIns="27432" anchor="ctr">
             <a:spAutoFit/>
           </a:bodyPr>
           <a:lstStyle/>
@@ -12327,7 +12234,7 @@
               </a:spcAft>
             </a:pPr>
             <a:r>
-              <a:rPr sz="2200" b="1" i="0" lang="he-IL">
+              <a:rPr lang="he-IL" sz="2200" b="1" i="0">
                 <a:solidFill>
                   <a:srgbClr val="2B1E3F"/>
                 </a:solidFill>
@@ -12356,7 +12263,7 @@
           <a:noFill/>
         </p:spPr>
         <p:txBody>
-          <a:bodyPr wrap="square" anchor="t" lIns="45720" rIns="45720" tIns="27432" bIns="27432">
+          <a:bodyPr wrap="square" lIns="45720" tIns="27432" rIns="45720" bIns="27432" anchor="t">
             <a:spAutoFit/>
           </a:bodyPr>
           <a:lstStyle/>
@@ -12367,7 +12274,7 @@
               </a:spcAft>
             </a:pPr>
             <a:r>
-              <a:rPr sz="1500" b="0" i="0" lang="en-US">
+              <a:rPr lang="en-US" sz="1500" b="0" i="0">
                 <a:solidFill>
                   <a:srgbClr val="6B6478"/>
                 </a:solidFill>
@@ -12422,6 +12329,7 @@
           <a:lstStyle/>
           <a:p>
             <a:pPr algn="ctr"/>
+            <a:endParaRPr/>
           </a:p>
         </p:txBody>
       </p:sp>
@@ -12442,7 +12350,7 @@
           <a:noFill/>
         </p:spPr>
         <p:txBody>
-          <a:bodyPr wrap="square" anchor="ctr" lIns="45720" rIns="45720" tIns="27432" bIns="27432">
+          <a:bodyPr wrap="square" lIns="45720" tIns="27432" rIns="45720" bIns="27432" anchor="ctr">
             <a:spAutoFit/>
           </a:bodyPr>
           <a:lstStyle/>
@@ -12453,7 +12361,7 @@
               </a:spcAft>
             </a:pPr>
             <a:r>
-              <a:rPr sz="2200" b="1" i="0" lang="he-IL">
+              <a:rPr lang="he-IL" sz="2200" b="1" i="0">
                 <a:solidFill>
                   <a:srgbClr val="17A398"/>
                 </a:solidFill>
@@ -12482,7 +12390,7 @@
           <a:noFill/>
         </p:spPr>
         <p:txBody>
-          <a:bodyPr wrap="square" anchor="t" lIns="45720" rIns="45720" tIns="27432" bIns="27432">
+          <a:bodyPr wrap="square" lIns="45720" tIns="27432" rIns="45720" bIns="27432" anchor="t">
             <a:spAutoFit/>
           </a:bodyPr>
           <a:lstStyle/>
@@ -12493,7 +12401,7 @@
               </a:spcAft>
             </a:pPr>
             <a:r>
-              <a:rPr sz="1500" b="0" i="0" lang="en-US">
+              <a:rPr lang="en-US" sz="1500" b="0" i="0">
                 <a:solidFill>
                   <a:srgbClr val="6B6478"/>
                 </a:solidFill>
@@ -12548,6 +12456,7 @@
           <a:lstStyle/>
           <a:p>
             <a:pPr algn="ctr"/>
+            <a:endParaRPr/>
           </a:p>
         </p:txBody>
       </p:sp>
@@ -12568,7 +12477,7 @@
           <a:noFill/>
         </p:spPr>
         <p:txBody>
-          <a:bodyPr wrap="square" anchor="ctr" lIns="45720" rIns="45720" tIns="27432" bIns="27432">
+          <a:bodyPr wrap="square" lIns="45720" tIns="27432" rIns="45720" bIns="27432" anchor="ctr">
             <a:spAutoFit/>
           </a:bodyPr>
           <a:lstStyle/>
@@ -12579,7 +12488,7 @@
               </a:spcAft>
             </a:pPr>
             <a:r>
-              <a:rPr sz="2200" b="1" i="0" lang="he-IL">
+              <a:rPr lang="he-IL" sz="2200" b="1" i="0">
                 <a:solidFill>
                   <a:srgbClr val="7B5EA7"/>
                 </a:solidFill>
@@ -12608,7 +12517,7 @@
           <a:noFill/>
         </p:spPr>
         <p:txBody>
-          <a:bodyPr wrap="square" anchor="t" lIns="45720" rIns="45720" tIns="27432" bIns="27432">
+          <a:bodyPr wrap="square" lIns="45720" tIns="27432" rIns="45720" bIns="27432" anchor="t">
             <a:spAutoFit/>
           </a:bodyPr>
           <a:lstStyle/>
@@ -12619,7 +12528,7 @@
               </a:spcAft>
             </a:pPr>
             <a:r>
-              <a:rPr sz="1500" b="0" i="0" lang="en-US">
+              <a:rPr lang="en-US" sz="1500" b="0" i="0">
                 <a:solidFill>
                   <a:srgbClr val="6B6478"/>
                 </a:solidFill>
@@ -12674,6 +12583,7 @@
           <a:lstStyle/>
           <a:p>
             <a:pPr algn="ctr"/>
+            <a:endParaRPr/>
           </a:p>
         </p:txBody>
       </p:sp>
@@ -12694,7 +12604,7 @@
           <a:noFill/>
         </p:spPr>
         <p:txBody>
-          <a:bodyPr wrap="square" anchor="ctr" lIns="45720" rIns="45720" tIns="27432" bIns="27432">
+          <a:bodyPr wrap="square" lIns="45720" tIns="27432" rIns="45720" bIns="27432" anchor="ctr">
             <a:spAutoFit/>
           </a:bodyPr>
           <a:lstStyle/>
@@ -12705,7 +12615,7 @@
               </a:spcAft>
             </a:pPr>
             <a:r>
-              <a:rPr sz="2200" b="1" i="0" lang="he-IL">
+              <a:rPr lang="he-IL" sz="2200" b="1" i="0">
                 <a:solidFill>
                   <a:srgbClr val="E4572E"/>
                 </a:solidFill>
@@ -12734,7 +12644,7 @@
           <a:noFill/>
         </p:spPr>
         <p:txBody>
-          <a:bodyPr wrap="square" anchor="t" lIns="45720" rIns="45720" tIns="27432" bIns="27432">
+          <a:bodyPr wrap="square" lIns="45720" tIns="27432" rIns="45720" bIns="27432" anchor="t">
             <a:spAutoFit/>
           </a:bodyPr>
           <a:lstStyle/>
@@ -12745,7 +12655,7 @@
               </a:spcAft>
             </a:pPr>
             <a:r>
-              <a:rPr sz="1500" b="0" i="0" lang="en-US">
+              <a:rPr lang="en-US" sz="1500" b="0" i="0">
                 <a:solidFill>
                   <a:srgbClr val="6B6478"/>
                 </a:solidFill>
@@ -12774,7 +12684,7 @@
           <a:noFill/>
         </p:spPr>
         <p:txBody>
-          <a:bodyPr wrap="square" anchor="t" lIns="45720" rIns="45720" tIns="27432" bIns="27432">
+          <a:bodyPr wrap="square" lIns="45720" tIns="27432" rIns="45720" bIns="27432" anchor="t">
             <a:spAutoFit/>
           </a:bodyPr>
           <a:lstStyle/>
@@ -12785,7 +12695,7 @@
               </a:spcAft>
             </a:pPr>
             <a:r>
-              <a:rPr sz="1500" b="0" i="0" lang="he-IL">
+              <a:rPr lang="he-IL" sz="1500" b="0" i="0">
                 <a:solidFill>
                   <a:srgbClr val="6B6478"/>
                 </a:solidFill>
@@ -12814,12 +12724,12 @@
           <a:noFill/>
         </p:spPr>
         <p:txBody>
-          <a:bodyPr wrap="square" anchor="t" lIns="45720" rIns="45720" tIns="27432" bIns="27432">
+          <a:bodyPr wrap="square" lIns="45720" tIns="27432" rIns="45720" bIns="27432" anchor="t">
             <a:spAutoFit/>
           </a:bodyPr>
           <a:lstStyle/>
           <a:p>
-            <a:pPr algn="r" rtl="1" marR="274320" indent="-274320">
+            <a:pPr marR="274320" indent="-274320" algn="r" rtl="1">
               <a:spcAft>
                 <a:spcPts val="1000"/>
               </a:spcAft>
@@ -12830,7 +12740,7 @@
               <a:buChar char="•"/>
             </a:pPr>
             <a:r>
-              <a:rPr sz="1600" b="0" i="0" lang="he-IL">
+              <a:rPr lang="he-IL" sz="1600" b="0" i="0">
                 <a:solidFill>
                   <a:srgbClr val="2B1E3F"/>
                 </a:solidFill>
@@ -12841,7 +12751,7 @@
             </a:r>
           </a:p>
           <a:p>
-            <a:pPr algn="r" rtl="1" marR="274320" indent="-274320">
+            <a:pPr marR="274320" indent="-274320" algn="r" rtl="1">
               <a:spcAft>
                 <a:spcPts val="1000"/>
               </a:spcAft>
@@ -12852,7 +12762,7 @@
               <a:buChar char="•"/>
             </a:pPr>
             <a:r>
-              <a:rPr sz="1600" b="0" i="0" lang="en-US">
+              <a:rPr lang="en-US" sz="1600" b="0" i="0">
                 <a:solidFill>
                   <a:srgbClr val="2B1E3F"/>
                 </a:solidFill>
@@ -12862,7 +12772,7 @@
               <a:t>‪X1‬</a:t>
             </a:r>
             <a:r>
-              <a:rPr sz="1600" b="0" i="0" lang="he-IL">
+              <a:rPr lang="he-IL" sz="1600" b="0" i="0">
                 <a:solidFill>
                   <a:srgbClr val="2B1E3F"/>
                 </a:solidFill>
@@ -12873,7 +12783,7 @@
             </a:r>
           </a:p>
           <a:p>
-            <a:pPr algn="r" rtl="1" marR="274320" indent="-274320">
+            <a:pPr marR="274320" indent="-274320" algn="r" rtl="1">
               <a:spcAft>
                 <a:spcPts val="1000"/>
               </a:spcAft>
@@ -12884,7 +12794,7 @@
               <a:buChar char="•"/>
             </a:pPr>
             <a:r>
-              <a:rPr sz="1600" b="0" i="0" lang="en-US">
+              <a:rPr lang="en-US" sz="1600" b="0" i="0">
                 <a:solidFill>
                   <a:srgbClr val="2B1E3F"/>
                 </a:solidFill>
@@ -12894,7 +12804,7 @@
               <a:t>‪X2‬</a:t>
             </a:r>
             <a:r>
-              <a:rPr sz="1600" b="0" i="0" lang="he-IL">
+              <a:rPr lang="he-IL" sz="1600" b="0" i="0">
                 <a:solidFill>
                   <a:srgbClr val="2B1E3F"/>
                 </a:solidFill>
@@ -12905,7 +12815,7 @@
             </a:r>
           </a:p>
           <a:p>
-            <a:pPr algn="r" rtl="1" marR="274320" indent="-274320">
+            <a:pPr marR="274320" indent="-274320" algn="r" rtl="1">
               <a:spcAft>
                 <a:spcPts val="1000"/>
               </a:spcAft>
@@ -12916,7 +12826,7 @@
               <a:buChar char="•"/>
             </a:pPr>
             <a:r>
-              <a:rPr sz="1600" b="0" i="0" lang="he-IL">
+              <a:rPr lang="he-IL" sz="1600" b="0" i="0">
                 <a:solidFill>
                   <a:srgbClr val="2B1E3F"/>
                 </a:solidFill>
@@ -12937,7 +12847,7 @@
 </file>
 
 <file path=ppt/slides/slide4.xml><?xml version="1.0" encoding="utf-8"?>
-<p:sld xmlns:a="http://schemas.openxmlformats.org/drawingml/2006/main" xmlns:p="http://schemas.openxmlformats.org/presentationml/2006/main" xmlns:r="http://schemas.openxmlformats.org/officeDocument/2006/relationships">
+<p:sld xmlns:a="http://schemas.openxmlformats.org/drawingml/2006/main" xmlns:r="http://schemas.openxmlformats.org/officeDocument/2006/relationships" xmlns:p="http://schemas.openxmlformats.org/presentationml/2006/main">
   <p:cSld>
     <p:bg>
       <p:bgPr>
@@ -12953,7 +12863,14 @@
         <p:cNvGrpSpPr/>
         <p:nvPr/>
       </p:nvGrpSpPr>
-      <p:grpSpPr/>
+      <p:grpSpPr>
+        <a:xfrm>
+          <a:off x="0" y="0"/>
+          <a:ext cx="0" cy="0"/>
+          <a:chOff x="0" y="0"/>
+          <a:chExt cx="0" cy="0"/>
+        </a:xfrm>
+      </p:grpSpPr>
       <p:sp>
         <p:nvSpPr>
           <p:cNvPr id="2" name="Title"/>
@@ -12971,7 +12888,7 @@
           <a:noFill/>
         </p:spPr>
         <p:txBody>
-          <a:bodyPr wrap="square" anchor="ctr" lIns="45720" rIns="45720" tIns="27432" bIns="27432">
+          <a:bodyPr wrap="square" lIns="45720" tIns="27432" rIns="45720" bIns="27432" anchor="ctr">
             <a:spAutoFit/>
           </a:bodyPr>
           <a:lstStyle/>
@@ -12982,7 +12899,7 @@
               </a:spcAft>
             </a:pPr>
             <a:r>
-              <a:rPr sz="3400" b="1" i="0" lang="he-IL">
+              <a:rPr lang="he-IL" sz="3400" b="1" i="0">
                 <a:solidFill>
                   <a:srgbClr val="2B1E3F"/>
                 </a:solidFill>
@@ -13037,6 +12954,7 @@
           <a:lstStyle/>
           <a:p>
             <a:pPr algn="ctr"/>
+            <a:endParaRPr/>
           </a:p>
         </p:txBody>
       </p:sp>
@@ -13049,7 +12967,7 @@
           <p:nvPr/>
         </p:nvPicPr>
         <p:blipFill>
-          <a:blip r:embed="rId2"/>
+          <a:blip r:embed="rId3"/>
           <a:stretch>
             <a:fillRect/>
           </a:stretch>
@@ -13073,7 +12991,7 @@
           <p:nvPr/>
         </p:nvPicPr>
         <p:blipFill>
-          <a:blip r:embed="rId3"/>
+          <a:blip r:embed="rId4"/>
           <a:stretch>
             <a:fillRect/>
           </a:stretch>
@@ -13105,12 +13023,12 @@
           <a:noFill/>
         </p:spPr>
         <p:txBody>
-          <a:bodyPr wrap="square" anchor="t" lIns="45720" rIns="45720" tIns="27432" bIns="27432">
+          <a:bodyPr wrap="square" lIns="45720" tIns="27432" rIns="45720" bIns="27432" anchor="t">
             <a:spAutoFit/>
           </a:bodyPr>
           <a:lstStyle/>
           <a:p>
-            <a:pPr algn="r" rtl="1" marR="274320" indent="-274320">
+            <a:pPr marR="274320" indent="-274320" algn="r" rtl="1">
               <a:spcAft>
                 <a:spcPts val="1000"/>
               </a:spcAft>
@@ -13121,7 +13039,7 @@
               <a:buChar char="•"/>
             </a:pPr>
             <a:r>
-              <a:rPr sz="1600" b="0" i="0" lang="he-IL">
+              <a:rPr lang="he-IL" sz="1600" b="0" i="0">
                 <a:solidFill>
                   <a:srgbClr val="2B1E3F"/>
                 </a:solidFill>
@@ -13132,7 +13050,7 @@
             </a:r>
           </a:p>
           <a:p>
-            <a:pPr algn="r" rtl="1" marR="274320" indent="-274320">
+            <a:pPr marR="274320" indent="-274320" algn="r" rtl="1">
               <a:spcAft>
                 <a:spcPts val="1000"/>
               </a:spcAft>
@@ -13143,7 +13061,7 @@
               <a:buChar char="•"/>
             </a:pPr>
             <a:r>
-              <a:rPr sz="1600" b="0" i="0" lang="he-IL">
+              <a:rPr lang="he-IL" sz="1600" b="0" i="0">
                 <a:solidFill>
                   <a:srgbClr val="2B1E3F"/>
                 </a:solidFill>
@@ -13198,6 +13116,7 @@
           <a:lstStyle/>
           <a:p>
             <a:pPr algn="ctr"/>
+            <a:endParaRPr/>
           </a:p>
         </p:txBody>
       </p:sp>
@@ -13229,82 +13148,54 @@
               </a:spcAft>
             </a:pPr>
             <a:r>
-              <a:rPr sz="1300" b="0" i="0" lang="en-US">
+              <a:rPr lang="en-US" sz="1300" b="0" i="0" dirty="0">
                 <a:solidFill>
                   <a:srgbClr val="EDE8F5"/>
                 </a:solidFill>
                 <a:latin typeface="Courier New"/>
                 <a:cs typeface="Courier New"/>
               </a:rPr>
-              <a:t>with pm.Model() as basic_model:</a:t>
-            </a:r>
-          </a:p>
-          <a:p>
-            <a:pPr algn="l" rtl="0">
-              <a:spcAft>
-                <a:spcPts val="0"/>
-              </a:spcAft>
-            </a:pPr>
-            <a:r>
-              <a:rPr sz="1300" b="0" i="0" lang="en-US">
+              <a:t>with </a:t>
+            </a:r>
+            <a:r>
+              <a:rPr lang="en-US" sz="1300" b="0" i="0" dirty="0" err="1">
                 <a:solidFill>
                   <a:srgbClr val="EDE8F5"/>
                 </a:solidFill>
                 <a:latin typeface="Courier New"/>
                 <a:cs typeface="Courier New"/>
               </a:rPr>
-              <a:t>    alpha = pm.Normal('alpha', mu=0, sigma=100)</a:t>
-            </a:r>
-          </a:p>
-          <a:p>
-            <a:pPr algn="l" rtl="0">
-              <a:spcAft>
-                <a:spcPts val="0"/>
-              </a:spcAft>
-            </a:pPr>
-            <a:r>
-              <a:rPr sz="1300" b="0" i="0" lang="en-US">
+              <a:t>pm.Model</a:t>
+            </a:r>
+            <a:r>
+              <a:rPr lang="en-US" sz="1300" b="0" i="0" dirty="0">
                 <a:solidFill>
                   <a:srgbClr val="EDE8F5"/>
                 </a:solidFill>
                 <a:latin typeface="Courier New"/>
                 <a:cs typeface="Courier New"/>
               </a:rPr>
-              <a:t>    beta = pm.Normal('beta', mu=0, sigma=100, shape=2)</a:t>
-            </a:r>
-          </a:p>
-          <a:p>
-            <a:pPr algn="l" rtl="0">
-              <a:spcAft>
-                <a:spcPts val="0"/>
-              </a:spcAft>
-            </a:pPr>
-            <a:r>
-              <a:rPr sz="1300" b="0" i="0" lang="en-US">
+              <a:t>() as </a:t>
+            </a:r>
+            <a:r>
+              <a:rPr lang="en-US" sz="1300" b="0" i="0" dirty="0" err="1">
                 <a:solidFill>
                   <a:srgbClr val="EDE8F5"/>
                 </a:solidFill>
                 <a:latin typeface="Courier New"/>
                 <a:cs typeface="Courier New"/>
               </a:rPr>
-              <a:t>    sigma = pm.HalfNormal('sigma', sigma=100)</a:t>
-            </a:r>
-          </a:p>
-          <a:p>
-            <a:pPr algn="l" rtl="0">
-              <a:spcAft>
-                <a:spcPts val="0"/>
-              </a:spcAft>
-            </a:pPr>
-            <a:r>
-              <a:rPr sz="1300" b="0" i="0" lang="en-US">
+              <a:t>basic_model</a:t>
+            </a:r>
+            <a:r>
+              <a:rPr lang="en-US" sz="1300" b="0" i="0" dirty="0">
                 <a:solidFill>
                   <a:srgbClr val="EDE8F5"/>
                 </a:solidFill>
                 <a:latin typeface="Courier New"/>
                 <a:cs typeface="Courier New"/>
               </a:rPr>
-              <a:t> </a:t>
+              <a:t>:</a:t>
             </a:r>
           </a:p>
           <a:p>
@@ -13314,48 +13205,34 @@
               </a:spcAft>
             </a:pPr>
             <a:r>
-              <a:rPr sz="1300" b="0" i="0" lang="en-US">
+              <a:rPr lang="en-US" sz="1300" b="0" i="0" dirty="0">
                 <a:solidFill>
                   <a:srgbClr val="EDE8F5"/>
                 </a:solidFill>
                 <a:latin typeface="Courier New"/>
                 <a:cs typeface="Courier New"/>
               </a:rPr>
-              <a:t>    mu = alpha + beta[0]*X1 + beta[1]*X2</a:t>
-            </a:r>
-          </a:p>
-          <a:p>
-            <a:pPr algn="l" rtl="0">
-              <a:spcAft>
-                <a:spcPts val="0"/>
-              </a:spcAft>
-            </a:pPr>
-            <a:r>
-              <a:rPr sz="1300" b="0" i="0" lang="en-US">
+              <a:t>    alpha = </a:t>
+            </a:r>
+            <a:r>
+              <a:rPr lang="en-US" sz="1300" b="0" i="0" dirty="0" err="1">
                 <a:solidFill>
                   <a:srgbClr val="EDE8F5"/>
                 </a:solidFill>
                 <a:latin typeface="Courier New"/>
                 <a:cs typeface="Courier New"/>
               </a:rPr>
-              <a:t>    Y_obs = pm.Normal('Y_obs', mu=mu, sigma=sigma,</a:t>
-            </a:r>
-          </a:p>
-          <a:p>
-            <a:pPr algn="l" rtl="0">
-              <a:spcAft>
-                <a:spcPts val="0"/>
-              </a:spcAft>
-            </a:pPr>
-            <a:r>
-              <a:rPr sz="1300" b="0" i="0" lang="en-US">
+              <a:t>pm.Normal</a:t>
+            </a:r>
+            <a:r>
+              <a:rPr lang="en-US" sz="1300" b="0" i="0" dirty="0">
                 <a:solidFill>
                   <a:srgbClr val="EDE8F5"/>
                 </a:solidFill>
                 <a:latin typeface="Courier New"/>
                 <a:cs typeface="Courier New"/>
               </a:rPr>
-              <a:t>                      observed=Y)</a:t>
+              <a:t>('alpha', mu=0, sigma=100)</a:t>
             </a:r>
           </a:p>
           <a:p>
@@ -13365,14 +13242,236 @@
               </a:spcAft>
             </a:pPr>
             <a:r>
-              <a:rPr sz="1300" b="0" i="0" lang="en-US">
+              <a:rPr lang="en-US" sz="1300" b="0" i="0" dirty="0">
                 <a:solidFill>
                   <a:srgbClr val="EDE8F5"/>
                 </a:solidFill>
                 <a:latin typeface="Courier New"/>
                 <a:cs typeface="Courier New"/>
               </a:rPr>
-              <a:t>    trace = pm.sample(5000)</a:t>
+              <a:t>    beta = </a:t>
+            </a:r>
+            <a:r>
+              <a:rPr lang="en-US" sz="1300" b="0" i="0" dirty="0" err="1">
+                <a:solidFill>
+                  <a:srgbClr val="EDE8F5"/>
+                </a:solidFill>
+                <a:latin typeface="Courier New"/>
+                <a:cs typeface="Courier New"/>
+              </a:rPr>
+              <a:t>pm.Normal</a:t>
+            </a:r>
+            <a:r>
+              <a:rPr lang="en-US" sz="1300" b="0" i="0" dirty="0">
+                <a:solidFill>
+                  <a:srgbClr val="EDE8F5"/>
+                </a:solidFill>
+                <a:latin typeface="Courier New"/>
+                <a:cs typeface="Courier New"/>
+              </a:rPr>
+              <a:t>('beta', mu=0, sigma=100, shape=2)</a:t>
+            </a:r>
+          </a:p>
+          <a:p>
+            <a:pPr algn="l" rtl="0">
+              <a:spcAft>
+                <a:spcPts val="0"/>
+              </a:spcAft>
+            </a:pPr>
+            <a:r>
+              <a:rPr lang="en-US" sz="1300" b="0" i="0" dirty="0">
+                <a:solidFill>
+                  <a:srgbClr val="EDE8F5"/>
+                </a:solidFill>
+                <a:latin typeface="Courier New"/>
+                <a:cs typeface="Courier New"/>
+              </a:rPr>
+              <a:t>    sigma = </a:t>
+            </a:r>
+            <a:r>
+              <a:rPr lang="en-US" sz="1300" b="0" i="0" dirty="0" err="1">
+                <a:solidFill>
+                  <a:srgbClr val="EDE8F5"/>
+                </a:solidFill>
+                <a:latin typeface="Courier New"/>
+                <a:cs typeface="Courier New"/>
+              </a:rPr>
+              <a:t>pm.HalfNormal</a:t>
+            </a:r>
+            <a:r>
+              <a:rPr lang="en-US" sz="1300" b="0" i="0" dirty="0">
+                <a:solidFill>
+                  <a:srgbClr val="EDE8F5"/>
+                </a:solidFill>
+                <a:latin typeface="Courier New"/>
+                <a:cs typeface="Courier New"/>
+              </a:rPr>
+              <a:t>('sigma', sigma=100)</a:t>
+            </a:r>
+          </a:p>
+          <a:p>
+            <a:pPr algn="l" rtl="0">
+              <a:spcAft>
+                <a:spcPts val="0"/>
+              </a:spcAft>
+            </a:pPr>
+            <a:r>
+              <a:rPr lang="en-US" sz="1300" b="0" i="0" dirty="0">
+                <a:solidFill>
+                  <a:srgbClr val="EDE8F5"/>
+                </a:solidFill>
+                <a:latin typeface="Courier New"/>
+                <a:cs typeface="Courier New"/>
+              </a:rPr>
+              <a:t> </a:t>
+            </a:r>
+          </a:p>
+          <a:p>
+            <a:pPr algn="l" rtl="0">
+              <a:spcAft>
+                <a:spcPts val="0"/>
+              </a:spcAft>
+            </a:pPr>
+            <a:r>
+              <a:rPr lang="en-US" sz="1300" b="0" i="0" dirty="0">
+                <a:solidFill>
+                  <a:srgbClr val="EDE8F5"/>
+                </a:solidFill>
+                <a:latin typeface="Courier New"/>
+                <a:cs typeface="Courier New"/>
+              </a:rPr>
+              <a:t>    mu = alpha + beta[0]*X1 + beta[1]*X2</a:t>
+            </a:r>
+          </a:p>
+          <a:p>
+            <a:pPr algn="l" rtl="0">
+              <a:spcAft>
+                <a:spcPts val="0"/>
+              </a:spcAft>
+            </a:pPr>
+            <a:r>
+              <a:rPr lang="en-US" sz="1300" b="0" i="0" dirty="0">
+                <a:solidFill>
+                  <a:srgbClr val="EDE8F5"/>
+                </a:solidFill>
+                <a:latin typeface="Courier New"/>
+                <a:cs typeface="Courier New"/>
+              </a:rPr>
+              <a:t>    </a:t>
+            </a:r>
+            <a:r>
+              <a:rPr lang="en-US" sz="1300" b="0" i="0" dirty="0" err="1">
+                <a:solidFill>
+                  <a:srgbClr val="EDE8F5"/>
+                </a:solidFill>
+                <a:latin typeface="Courier New"/>
+                <a:cs typeface="Courier New"/>
+              </a:rPr>
+              <a:t>Y_obs</a:t>
+            </a:r>
+            <a:r>
+              <a:rPr lang="en-US" sz="1300" b="0" i="0" dirty="0">
+                <a:solidFill>
+                  <a:srgbClr val="EDE8F5"/>
+                </a:solidFill>
+                <a:latin typeface="Courier New"/>
+                <a:cs typeface="Courier New"/>
+              </a:rPr>
+              <a:t> = </a:t>
+            </a:r>
+            <a:r>
+              <a:rPr lang="en-US" sz="1300" b="0" i="0" dirty="0" err="1">
+                <a:solidFill>
+                  <a:srgbClr val="EDE8F5"/>
+                </a:solidFill>
+                <a:latin typeface="Courier New"/>
+                <a:cs typeface="Courier New"/>
+              </a:rPr>
+              <a:t>pm.Normal</a:t>
+            </a:r>
+            <a:r>
+              <a:rPr lang="en-US" sz="1300" b="0" i="0" dirty="0">
+                <a:solidFill>
+                  <a:srgbClr val="EDE8F5"/>
+                </a:solidFill>
+                <a:latin typeface="Courier New"/>
+                <a:cs typeface="Courier New"/>
+              </a:rPr>
+              <a:t>('</a:t>
+            </a:r>
+            <a:r>
+              <a:rPr lang="en-US" sz="1300" b="0" i="0" dirty="0" err="1">
+                <a:solidFill>
+                  <a:srgbClr val="EDE8F5"/>
+                </a:solidFill>
+                <a:latin typeface="Courier New"/>
+                <a:cs typeface="Courier New"/>
+              </a:rPr>
+              <a:t>Y_obs</a:t>
+            </a:r>
+            <a:r>
+              <a:rPr lang="en-US" sz="1300" b="0" i="0" dirty="0">
+                <a:solidFill>
+                  <a:srgbClr val="EDE8F5"/>
+                </a:solidFill>
+                <a:latin typeface="Courier New"/>
+                <a:cs typeface="Courier New"/>
+              </a:rPr>
+              <a:t>', mu=mu, sigma=sigma,</a:t>
+            </a:r>
+          </a:p>
+          <a:p>
+            <a:pPr algn="l" rtl="0">
+              <a:spcAft>
+                <a:spcPts val="0"/>
+              </a:spcAft>
+            </a:pPr>
+            <a:r>
+              <a:rPr lang="en-US" sz="1300" b="0" i="0" dirty="0">
+                <a:solidFill>
+                  <a:srgbClr val="EDE8F5"/>
+                </a:solidFill>
+                <a:latin typeface="Courier New"/>
+                <a:cs typeface="Courier New"/>
+              </a:rPr>
+              <a:t>                      observed=Y)</a:t>
+            </a:r>
+          </a:p>
+          <a:p>
+            <a:pPr algn="l" rtl="0">
+              <a:spcAft>
+                <a:spcPts val="0"/>
+              </a:spcAft>
+            </a:pPr>
+            <a:r>
+              <a:rPr lang="en-US" sz="1300" b="0" i="0" dirty="0">
+                <a:solidFill>
+                  <a:srgbClr val="EDE8F5"/>
+                </a:solidFill>
+                <a:latin typeface="Courier New"/>
+                <a:cs typeface="Courier New"/>
+              </a:rPr>
+              <a:t>    trace = </a:t>
+            </a:r>
+            <a:r>
+              <a:rPr lang="en-US" sz="1300" b="0" i="0" dirty="0" err="1">
+                <a:solidFill>
+                  <a:srgbClr val="EDE8F5"/>
+                </a:solidFill>
+                <a:latin typeface="Courier New"/>
+                <a:cs typeface="Courier New"/>
+              </a:rPr>
+              <a:t>pm.sample</a:t>
+            </a:r>
+            <a:r>
+              <a:rPr lang="en-US" sz="1300" b="0" i="0" dirty="0">
+                <a:solidFill>
+                  <a:srgbClr val="EDE8F5"/>
+                </a:solidFill>
+                <a:latin typeface="Courier New"/>
+                <a:cs typeface="Courier New"/>
+              </a:rPr>
+              <a:t>(5000)</a:t>
             </a:r>
           </a:p>
         </p:txBody>
@@ -13420,6 +13519,7 @@
           <a:lstStyle/>
           <a:p>
             <a:pPr algn="ctr"/>
+            <a:endParaRPr/>
           </a:p>
         </p:txBody>
       </p:sp>
@@ -13440,7 +13540,7 @@
           <a:noFill/>
         </p:spPr>
         <p:txBody>
-          <a:bodyPr wrap="square" anchor="t" lIns="45720" rIns="45720" tIns="27432" bIns="27432">
+          <a:bodyPr wrap="square" lIns="45720" tIns="27432" rIns="45720" bIns="27432" anchor="t">
             <a:spAutoFit/>
           </a:bodyPr>
           <a:lstStyle/>
@@ -13451,7 +13551,7 @@
               </a:spcAft>
             </a:pPr>
             <a:r>
-              <a:rPr sz="1600" b="1" i="0" lang="en-US">
+              <a:rPr lang="en-US" sz="1600" b="1" i="0">
                 <a:solidFill>
                   <a:srgbClr val="17A398"/>
                 </a:solidFill>
@@ -13472,7 +13572,7 @@
         <p:spPr>
           <a:xfrm>
             <a:off x="7955279" y="3931920"/>
-            <a:ext cx="3547872" cy="365760"/>
+            <a:ext cx="3547872" cy="270843"/>
           </a:xfrm>
           <a:prstGeom prst="rect">
             <a:avLst/>
@@ -13480,7 +13580,7 @@
           <a:noFill/>
         </p:spPr>
         <p:txBody>
-          <a:bodyPr wrap="square" anchor="t" lIns="45720" rIns="45720" tIns="27432" bIns="27432">
+          <a:bodyPr wrap="square" lIns="45720" tIns="27432" rIns="45720" bIns="27432" anchor="t">
             <a:spAutoFit/>
           </a:bodyPr>
           <a:lstStyle/>
@@ -13491,7 +13591,7 @@
               </a:spcAft>
             </a:pPr>
             <a:r>
-              <a:rPr sz="1400" b="0" i="0" lang="he-IL">
+              <a:rPr lang="he-IL" sz="1400" b="0" i="0" dirty="0">
                 <a:solidFill>
                   <a:srgbClr val="6B6478"/>
                 </a:solidFill>
@@ -13501,45 +13601,42 @@
               <a:t>וקטור של שני מקדמים — </a:t>
             </a:r>
             <a:r>
-              <a:rPr sz="1400" b="0" i="0" lang="en-US">
+              <a:rPr lang="en-US" sz="1400" b="0" i="0" dirty="0">
                 <a:solidFill>
                   <a:srgbClr val="6B6478"/>
                 </a:solidFill>
                 <a:latin typeface="Arial"/>
                 <a:cs typeface="Arial"/>
               </a:rPr>
-              <a:t>β</a:t>
-            </a:r>
-            <a:r>
-              <a:rPr sz="1400" b="0" i="0" lang="he-IL">
+              <a:t>β[0]</a:t>
+            </a:r>
+            <a:r>
+              <a:rPr lang="he-IL" sz="1400" b="0" i="0" dirty="0">
                 <a:solidFill>
                   <a:srgbClr val="6B6478"/>
                 </a:solidFill>
                 <a:latin typeface="Arial"/>
                 <a:cs typeface="Arial"/>
               </a:rPr>
-              <a:t>[0] ו-</a:t>
-            </a:r>
-            <a:r>
-              <a:rPr sz="1400" b="0" i="0" lang="en-US">
+              <a:t> ו-</a:t>
+            </a:r>
+            <a:r>
+              <a:rPr lang="en-US" sz="1400" b="0" i="0" dirty="0">
                 <a:solidFill>
                   <a:srgbClr val="6B6478"/>
                 </a:solidFill>
                 <a:latin typeface="Arial"/>
                 <a:cs typeface="Arial"/>
               </a:rPr>
-              <a:t>β</a:t>
-            </a:r>
-            <a:r>
-              <a:rPr sz="1400" b="0" i="0" lang="he-IL">
-                <a:solidFill>
-                  <a:srgbClr val="6B6478"/>
-                </a:solidFill>
-                <a:latin typeface="Arial"/>
-                <a:cs typeface="Arial"/>
-              </a:rPr>
-              <a:t>[1]</a:t>
-            </a:r>
+              <a:t>β[1]</a:t>
+            </a:r>
+            <a:endParaRPr lang="he-IL" sz="1400" b="0" i="0" dirty="0">
+              <a:solidFill>
+                <a:srgbClr val="6B6478"/>
+              </a:solidFill>
+              <a:latin typeface="Arial"/>
+              <a:cs typeface="Arial"/>
+            </a:endParaRPr>
           </a:p>
         </p:txBody>
       </p:sp>
@@ -13586,6 +13683,7 @@
           <a:lstStyle/>
           <a:p>
             <a:pPr algn="ctr"/>
+            <a:endParaRPr/>
           </a:p>
         </p:txBody>
       </p:sp>
@@ -13606,7 +13704,7 @@
           <a:noFill/>
         </p:spPr>
         <p:txBody>
-          <a:bodyPr wrap="square" anchor="t" lIns="45720" rIns="45720" tIns="27432" bIns="27432">
+          <a:bodyPr wrap="square" lIns="45720" tIns="27432" rIns="45720" bIns="27432" anchor="t">
             <a:spAutoFit/>
           </a:bodyPr>
           <a:lstStyle/>
@@ -13617,7 +13715,7 @@
               </a:spcAft>
             </a:pPr>
             <a:r>
-              <a:rPr sz="1600" b="1" i="0" lang="en-US">
+              <a:rPr lang="en-US" sz="1600" b="1" i="0" dirty="0" err="1">
                 <a:solidFill>
                   <a:srgbClr val="7B5EA7"/>
                 </a:solidFill>
@@ -13626,6 +13724,13 @@
               </a:rPr>
               <a:t>HalfNormal</a:t>
             </a:r>
+            <a:endParaRPr lang="en-US" sz="1600" b="1" i="0" dirty="0">
+              <a:solidFill>
+                <a:srgbClr val="7B5EA7"/>
+              </a:solidFill>
+              <a:latin typeface="Arial"/>
+              <a:cs typeface="Arial"/>
+            </a:endParaRPr>
           </a:p>
         </p:txBody>
       </p:sp>
@@ -13646,7 +13751,7 @@
           <a:noFill/>
         </p:spPr>
         <p:txBody>
-          <a:bodyPr wrap="square" anchor="t" lIns="45720" rIns="45720" tIns="27432" bIns="27432">
+          <a:bodyPr wrap="square" lIns="45720" tIns="27432" rIns="45720" bIns="27432" anchor="t">
             <a:spAutoFit/>
           </a:bodyPr>
           <a:lstStyle/>
@@ -13657,7 +13762,7 @@
               </a:spcAft>
             </a:pPr>
             <a:r>
-              <a:rPr sz="1400" b="0" i="0" lang="he-IL">
+              <a:rPr lang="he-IL" sz="1400" b="0" i="0">
                 <a:solidFill>
                   <a:srgbClr val="6B6478"/>
                 </a:solidFill>
@@ -13712,6 +13817,7 @@
           <a:lstStyle/>
           <a:p>
             <a:pPr algn="ctr"/>
+            <a:endParaRPr/>
           </a:p>
         </p:txBody>
       </p:sp>
@@ -13732,7 +13838,7 @@
           <a:noFill/>
         </p:spPr>
         <p:txBody>
-          <a:bodyPr wrap="square" anchor="t" lIns="45720" rIns="45720" tIns="27432" bIns="27432">
+          <a:bodyPr wrap="square" lIns="45720" tIns="27432" rIns="45720" bIns="27432" anchor="t">
             <a:spAutoFit/>
           </a:bodyPr>
           <a:lstStyle/>
@@ -13743,7 +13849,7 @@
               </a:spcAft>
             </a:pPr>
             <a:r>
-              <a:rPr sz="1600" b="1" i="0" lang="en-US">
+              <a:rPr lang="en-US" sz="1600" b="1" i="0">
                 <a:solidFill>
                   <a:srgbClr val="E4572E"/>
                 </a:solidFill>
@@ -13772,7 +13878,7 @@
           <a:noFill/>
         </p:spPr>
         <p:txBody>
-          <a:bodyPr wrap="square" anchor="t" lIns="45720" rIns="45720" tIns="27432" bIns="27432">
+          <a:bodyPr wrap="square" lIns="45720" tIns="27432" rIns="45720" bIns="27432" anchor="t">
             <a:spAutoFit/>
           </a:bodyPr>
           <a:lstStyle/>
@@ -13783,7 +13889,7 @@
               </a:spcAft>
             </a:pPr>
             <a:r>
-              <a:rPr sz="1400" b="0" i="0" lang="he-IL">
+              <a:rPr lang="he-IL" sz="1400" b="0" i="0" dirty="0">
                 <a:solidFill>
                   <a:srgbClr val="6B6478"/>
                 </a:solidFill>
@@ -13804,7 +13910,7 @@
 </file>
 
 <file path=ppt/slides/slide5.xml><?xml version="1.0" encoding="utf-8"?>
-<p:sld xmlns:a="http://schemas.openxmlformats.org/drawingml/2006/main" xmlns:p="http://schemas.openxmlformats.org/presentationml/2006/main" xmlns:r="http://schemas.openxmlformats.org/officeDocument/2006/relationships">
+<p:sld xmlns:a="http://schemas.openxmlformats.org/drawingml/2006/main" xmlns:r="http://schemas.openxmlformats.org/officeDocument/2006/relationships" xmlns:p="http://schemas.openxmlformats.org/presentationml/2006/main">
   <p:cSld>
     <p:bg>
       <p:bgPr>
@@ -13820,7 +13926,14 @@
         <p:cNvGrpSpPr/>
         <p:nvPr/>
       </p:nvGrpSpPr>
-      <p:grpSpPr/>
+      <p:grpSpPr>
+        <a:xfrm>
+          <a:off x="0" y="0"/>
+          <a:ext cx="0" cy="0"/>
+          <a:chOff x="0" y="0"/>
+          <a:chExt cx="0" cy="0"/>
+        </a:xfrm>
+      </p:grpSpPr>
       <p:sp>
         <p:nvSpPr>
           <p:cNvPr id="2" name="Title"/>
@@ -13838,7 +13951,7 @@
           <a:noFill/>
         </p:spPr>
         <p:txBody>
-          <a:bodyPr wrap="square" anchor="ctr" lIns="45720" rIns="45720" tIns="27432" bIns="27432">
+          <a:bodyPr wrap="square" lIns="45720" tIns="27432" rIns="45720" bIns="27432" anchor="ctr">
             <a:spAutoFit/>
           </a:bodyPr>
           <a:lstStyle/>
@@ -13849,7 +13962,7 @@
               </a:spcAft>
             </a:pPr>
             <a:r>
-              <a:rPr sz="3400" b="1" i="0" lang="he-IL">
+              <a:rPr lang="he-IL" sz="3400" b="1" i="0">
                 <a:solidFill>
                   <a:srgbClr val="2B1E3F"/>
                 </a:solidFill>
@@ -13859,7 +13972,7 @@
               <a:t>איך נראה prior של </a:t>
             </a:r>
             <a:r>
-              <a:rPr sz="3400" b="1" i="0" lang="en-US">
+              <a:rPr lang="en-US" sz="3400" b="1" i="0">
                 <a:solidFill>
                   <a:srgbClr val="2B1E3F"/>
                 </a:solidFill>
@@ -13869,7 +13982,7 @@
               <a:t>‪HalfNormal(100)‬</a:t>
             </a:r>
             <a:r>
-              <a:rPr sz="3400" b="1" i="0" lang="he-IL">
+              <a:rPr lang="he-IL" sz="3400" b="1" i="0">
                 <a:solidFill>
                   <a:srgbClr val="2B1E3F"/>
                 </a:solidFill>
@@ -13890,7 +14003,7 @@
           <p:nvPr/>
         </p:nvPicPr>
         <p:blipFill>
-          <a:blip r:embed="rId2"/>
+          <a:blip r:embed="rId3"/>
           <a:stretch>
             <a:fillRect/>
           </a:stretch>
@@ -13948,6 +14061,7 @@
           <a:lstStyle/>
           <a:p>
             <a:pPr algn="ctr"/>
+            <a:endParaRPr/>
           </a:p>
         </p:txBody>
       </p:sp>
@@ -13979,7 +14093,7 @@
               </a:spcAft>
             </a:pPr>
             <a:r>
-              <a:rPr sz="1300" b="0" i="0" lang="en-US">
+              <a:rPr lang="en-US" sz="1300" b="0" i="0">
                 <a:solidFill>
                   <a:srgbClr val="EDE8F5"/>
                 </a:solidFill>
@@ -13996,7 +14110,7 @@
               </a:spcAft>
             </a:pPr>
             <a:r>
-              <a:rPr sz="1300" b="0" i="0" lang="en-US">
+              <a:rPr lang="en-US" sz="1300" b="0" i="0">
                 <a:solidFill>
                   <a:srgbClr val="EDE8F5"/>
                 </a:solidFill>
@@ -14051,6 +14165,7 @@
           <a:lstStyle/>
           <a:p>
             <a:pPr algn="ctr"/>
+            <a:endParaRPr/>
           </a:p>
         </p:txBody>
       </p:sp>
@@ -14091,12 +14206,12 @@
           </a:fontRef>
         </p:style>
         <p:txBody>
-          <a:bodyPr rtlCol="0" anchor="ctr" lIns="0" rIns="0" tIns="0" bIns="0"/>
+          <a:bodyPr lIns="0" tIns="0" rIns="0" bIns="0" rtlCol="0" anchor="ctr"/>
           <a:lstStyle/>
           <a:p>
             <a:pPr algn="ctr"/>
             <a:r>
-              <a:rPr sz="2400" b="1" i="0" lang="en-US">
+              <a:rPr lang="en-US" sz="2400" b="1" i="0">
                 <a:solidFill>
                   <a:srgbClr val="FFFFFF"/>
                 </a:solidFill>
@@ -14125,7 +14240,7 @@
           <a:noFill/>
         </p:spPr>
         <p:txBody>
-          <a:bodyPr wrap="square" anchor="ctr" lIns="45720" rIns="45720" tIns="27432" bIns="27432">
+          <a:bodyPr wrap="square" lIns="45720" tIns="27432" rIns="45720" bIns="27432" anchor="ctr">
             <a:spAutoFit/>
           </a:bodyPr>
           <a:lstStyle/>
@@ -14136,7 +14251,7 @@
               </a:spcAft>
             </a:pPr>
             <a:r>
-              <a:rPr sz="2000" b="1" i="0" lang="he-IL">
+              <a:rPr lang="he-IL" sz="2000" b="1" i="0">
                 <a:solidFill>
                   <a:srgbClr val="2B1E3F"/>
                 </a:solidFill>
@@ -14165,7 +14280,7 @@
           <a:noFill/>
         </p:spPr>
         <p:txBody>
-          <a:bodyPr wrap="square" anchor="t" lIns="45720" rIns="45720" tIns="27432" bIns="27432">
+          <a:bodyPr wrap="square" lIns="45720" tIns="27432" rIns="45720" bIns="27432" anchor="t">
             <a:spAutoFit/>
           </a:bodyPr>
           <a:lstStyle/>
@@ -14176,7 +14291,7 @@
               </a:spcAft>
             </a:pPr>
             <a:r>
-              <a:rPr sz="1600" b="0" i="0" lang="he-IL">
+              <a:rPr lang="he-IL" sz="1600" b="0" i="0">
                 <a:solidFill>
                   <a:srgbClr val="6B6478"/>
                 </a:solidFill>
@@ -14186,7 +14301,7 @@
               <a:t>לוקחים </a:t>
             </a:r>
             <a:r>
-              <a:rPr sz="1600" b="0" i="0" lang="en-US">
+              <a:rPr lang="en-US" sz="1600" b="0" i="0">
                 <a:solidFill>
                   <a:srgbClr val="6B6478"/>
                 </a:solidFill>
@@ -14196,7 +14311,7 @@
               <a:t>‪N(0, 100)‬</a:t>
             </a:r>
             <a:r>
-              <a:rPr sz="1600" b="0" i="0" lang="he-IL">
+              <a:rPr lang="he-IL" sz="1600" b="0" i="0">
                 <a:solidFill>
                   <a:srgbClr val="6B6478"/>
                 </a:solidFill>
@@ -14251,6 +14366,7 @@
           <a:lstStyle/>
           <a:p>
             <a:pPr algn="ctr"/>
+            <a:endParaRPr/>
           </a:p>
         </p:txBody>
       </p:sp>
@@ -14291,12 +14407,12 @@
           </a:fontRef>
         </p:style>
         <p:txBody>
-          <a:bodyPr rtlCol="0" anchor="ctr" lIns="0" rIns="0" tIns="0" bIns="0"/>
+          <a:bodyPr lIns="0" tIns="0" rIns="0" bIns="0" rtlCol="0" anchor="ctr"/>
           <a:lstStyle/>
           <a:p>
             <a:pPr algn="ctr"/>
             <a:r>
-              <a:rPr sz="2400" b="1" i="0" lang="en-US">
+              <a:rPr lang="en-US" sz="2400" b="1" i="0">
                 <a:solidFill>
                   <a:srgbClr val="FFFFFF"/>
                 </a:solidFill>
@@ -14325,7 +14441,7 @@
           <a:noFill/>
         </p:spPr>
         <p:txBody>
-          <a:bodyPr wrap="square" anchor="ctr" lIns="45720" rIns="45720" tIns="27432" bIns="27432">
+          <a:bodyPr wrap="square" lIns="45720" tIns="27432" rIns="45720" bIns="27432" anchor="ctr">
             <a:spAutoFit/>
           </a:bodyPr>
           <a:lstStyle/>
@@ -14336,7 +14452,7 @@
               </a:spcAft>
             </a:pPr>
             <a:r>
-              <a:rPr sz="2000" b="1" i="0" lang="he-IL">
+              <a:rPr lang="he-IL" sz="2000" b="1" i="0">
                 <a:solidFill>
                   <a:srgbClr val="2B1E3F"/>
                 </a:solidFill>
@@ -14365,7 +14481,7 @@
           <a:noFill/>
         </p:spPr>
         <p:txBody>
-          <a:bodyPr wrap="square" anchor="t" lIns="45720" rIns="45720" tIns="27432" bIns="27432">
+          <a:bodyPr wrap="square" lIns="45720" tIns="27432" rIns="45720" bIns="27432" anchor="t">
             <a:spAutoFit/>
           </a:bodyPr>
           <a:lstStyle/>
@@ -14376,7 +14492,7 @@
               </a:spcAft>
             </a:pPr>
             <a:r>
-              <a:rPr sz="1600" b="0" i="0" lang="he-IL">
+              <a:rPr lang="he-IL" sz="1600" b="0" i="0">
                 <a:solidFill>
                   <a:srgbClr val="6B6478"/>
                 </a:solidFill>
@@ -14397,7 +14513,7 @@
 </file>
 
 <file path=ppt/slides/slide6.xml><?xml version="1.0" encoding="utf-8"?>
-<p:sld xmlns:a="http://schemas.openxmlformats.org/drawingml/2006/main" xmlns:p="http://schemas.openxmlformats.org/presentationml/2006/main" xmlns:r="http://schemas.openxmlformats.org/officeDocument/2006/relationships">
+<p:sld xmlns:a="http://schemas.openxmlformats.org/drawingml/2006/main" xmlns:r="http://schemas.openxmlformats.org/officeDocument/2006/relationships" xmlns:p="http://schemas.openxmlformats.org/presentationml/2006/main">
   <p:cSld>
     <p:bg>
       <p:bgPr>
@@ -14413,7 +14529,14 @@
         <p:cNvGrpSpPr/>
         <p:nvPr/>
       </p:nvGrpSpPr>
-      <p:grpSpPr/>
+      <p:grpSpPr>
+        <a:xfrm>
+          <a:off x="0" y="0"/>
+          <a:ext cx="0" cy="0"/>
+          <a:chOff x="0" y="0"/>
+          <a:chExt cx="0" cy="0"/>
+        </a:xfrm>
+      </p:grpSpPr>
       <p:sp>
         <p:nvSpPr>
           <p:cNvPr id="2" name="Title"/>
@@ -14431,7 +14554,7 @@
           <a:noFill/>
         </p:spPr>
         <p:txBody>
-          <a:bodyPr wrap="square" anchor="ctr" lIns="45720" rIns="45720" tIns="27432" bIns="27432">
+          <a:bodyPr wrap="square" lIns="45720" tIns="27432" rIns="45720" bIns="27432" anchor="ctr">
             <a:spAutoFit/>
           </a:bodyPr>
           <a:lstStyle/>
@@ -14442,7 +14565,7 @@
               </a:spcAft>
             </a:pPr>
             <a:r>
-              <a:rPr sz="3400" b="1" i="0" lang="he-IL">
+              <a:rPr lang="he-IL" sz="3400" b="1" i="0">
                 <a:solidFill>
                   <a:srgbClr val="2B1E3F"/>
                 </a:solidFill>
@@ -14463,7 +14586,7 @@
           <p:nvPr/>
         </p:nvPicPr>
         <p:blipFill>
-          <a:blip r:embed="rId2"/>
+          <a:blip r:embed="rId3"/>
           <a:stretch>
             <a:fillRect/>
           </a:stretch>
@@ -14519,6 +14642,7 @@
           <a:lstStyle/>
           <a:p>
             <a:pPr algn="ctr"/>
+            <a:endParaRPr/>
           </a:p>
         </p:txBody>
       </p:sp>
@@ -14539,7 +14663,7 @@
           <a:noFill/>
         </p:spPr>
         <p:txBody>
-          <a:bodyPr wrap="square" anchor="ctr" lIns="45720" rIns="45720" tIns="27432" bIns="27432">
+          <a:bodyPr wrap="square" lIns="45720" tIns="27432" rIns="45720" bIns="27432" anchor="ctr">
             <a:spAutoFit/>
           </a:bodyPr>
           <a:lstStyle/>
@@ -14550,7 +14674,7 @@
               </a:spcAft>
             </a:pPr>
             <a:r>
-              <a:rPr sz="1400" b="1" i="0" lang="he-IL">
+              <a:rPr lang="he-IL" sz="1400" b="1" i="0">
                 <a:solidFill>
                   <a:srgbClr val="FFFFFF"/>
                 </a:solidFill>
@@ -14603,6 +14727,7 @@
           <a:lstStyle/>
           <a:p>
             <a:pPr algn="ctr"/>
+            <a:endParaRPr/>
           </a:p>
         </p:txBody>
       </p:sp>
@@ -14623,7 +14748,7 @@
           <a:noFill/>
         </p:spPr>
         <p:txBody>
-          <a:bodyPr wrap="square" anchor="ctr" lIns="45720" rIns="45720" tIns="27432" bIns="27432">
+          <a:bodyPr wrap="square" lIns="45720" tIns="27432" rIns="45720" bIns="27432" anchor="ctr">
             <a:spAutoFit/>
           </a:bodyPr>
           <a:lstStyle/>
@@ -14634,7 +14759,7 @@
               </a:spcAft>
             </a:pPr>
             <a:r>
-              <a:rPr sz="1400" b="1" i="0" lang="he-IL">
+              <a:rPr lang="he-IL" sz="1400" b="1" i="0">
                 <a:solidFill>
                   <a:srgbClr val="FFFFFF"/>
                 </a:solidFill>
@@ -14687,6 +14812,7 @@
           <a:lstStyle/>
           <a:p>
             <a:pPr algn="ctr"/>
+            <a:endParaRPr/>
           </a:p>
         </p:txBody>
       </p:sp>
@@ -14707,7 +14833,7 @@
           <a:noFill/>
         </p:spPr>
         <p:txBody>
-          <a:bodyPr wrap="square" anchor="ctr" lIns="45720" rIns="45720" tIns="27432" bIns="27432">
+          <a:bodyPr wrap="square" lIns="45720" tIns="27432" rIns="45720" bIns="27432" anchor="ctr">
             <a:spAutoFit/>
           </a:bodyPr>
           <a:lstStyle/>
@@ -14718,7 +14844,7 @@
               </a:spcAft>
             </a:pPr>
             <a:r>
-              <a:rPr sz="1400" b="1" i="0" lang="en-US">
+              <a:rPr lang="en-US" sz="1400" b="1" i="0">
                 <a:solidFill>
                   <a:srgbClr val="FFFFFF"/>
                 </a:solidFill>
@@ -14771,6 +14897,7 @@
           <a:lstStyle/>
           <a:p>
             <a:pPr algn="ctr"/>
+            <a:endParaRPr/>
           </a:p>
         </p:txBody>
       </p:sp>
@@ -14791,7 +14918,7 @@
           <a:noFill/>
         </p:spPr>
         <p:txBody>
-          <a:bodyPr wrap="square" anchor="ctr" lIns="45720" rIns="45720" tIns="27432" bIns="27432">
+          <a:bodyPr wrap="square" lIns="45720" tIns="27432" rIns="45720" bIns="27432" anchor="ctr">
             <a:spAutoFit/>
           </a:bodyPr>
           <a:lstStyle/>
@@ -14802,7 +14929,7 @@
               </a:spcAft>
             </a:pPr>
             <a:r>
-              <a:rPr sz="1400" b="1" i="0" lang="he-IL">
+              <a:rPr lang="he-IL" sz="1400" b="1" i="0">
                 <a:solidFill>
                   <a:srgbClr val="FFFFFF"/>
                 </a:solidFill>
@@ -14855,6 +14982,7 @@
           <a:lstStyle/>
           <a:p>
             <a:pPr algn="ctr"/>
+            <a:endParaRPr/>
           </a:p>
         </p:txBody>
       </p:sp>
@@ -14875,7 +15003,7 @@
           <a:noFill/>
         </p:spPr>
         <p:txBody>
-          <a:bodyPr wrap="square" anchor="ctr" lIns="45720" rIns="45720" tIns="27432" bIns="27432">
+          <a:bodyPr wrap="square" lIns="45720" tIns="27432" rIns="45720" bIns="27432" anchor="ctr">
             <a:spAutoFit/>
           </a:bodyPr>
           <a:lstStyle/>
@@ -14886,7 +15014,7 @@
               </a:spcAft>
             </a:pPr>
             <a:r>
-              <a:rPr sz="1400" b="0" i="0" lang="en-US">
+              <a:rPr lang="en-US" sz="1400" b="0" i="0">
                 <a:solidFill>
                   <a:srgbClr val="2B1E3F"/>
                 </a:solidFill>
@@ -14939,6 +15067,7 @@
           <a:lstStyle/>
           <a:p>
             <a:pPr algn="ctr"/>
+            <a:endParaRPr/>
           </a:p>
         </p:txBody>
       </p:sp>
@@ -14959,7 +15088,7 @@
           <a:noFill/>
         </p:spPr>
         <p:txBody>
-          <a:bodyPr wrap="square" anchor="ctr" lIns="45720" rIns="45720" tIns="27432" bIns="27432">
+          <a:bodyPr wrap="square" lIns="45720" tIns="27432" rIns="45720" bIns="27432" anchor="ctr">
             <a:spAutoFit/>
           </a:bodyPr>
           <a:lstStyle/>
@@ -14970,7 +15099,7 @@
               </a:spcAft>
             </a:pPr>
             <a:r>
-              <a:rPr sz="1400" b="0" i="0" lang="en-US">
+              <a:rPr lang="en-US" sz="1400" b="0" i="0">
                 <a:solidFill>
                   <a:srgbClr val="2B1E3F"/>
                 </a:solidFill>
@@ -15023,6 +15152,7 @@
           <a:lstStyle/>
           <a:p>
             <a:pPr algn="ctr"/>
+            <a:endParaRPr/>
           </a:p>
         </p:txBody>
       </p:sp>
@@ -15043,7 +15173,7 @@
           <a:noFill/>
         </p:spPr>
         <p:txBody>
-          <a:bodyPr wrap="square" anchor="ctr" lIns="45720" rIns="45720" tIns="27432" bIns="27432">
+          <a:bodyPr wrap="square" lIns="45720" tIns="27432" rIns="45720" bIns="27432" anchor="ctr">
             <a:spAutoFit/>
           </a:bodyPr>
           <a:lstStyle/>
@@ -15054,7 +15184,7 @@
               </a:spcAft>
             </a:pPr>
             <a:r>
-              <a:rPr sz="1400" b="0" i="0" lang="en-US">
+              <a:rPr lang="en-US" sz="1400" b="0" i="0">
                 <a:solidFill>
                   <a:srgbClr val="2B1E3F"/>
                 </a:solidFill>
@@ -15107,6 +15237,7 @@
           <a:lstStyle/>
           <a:p>
             <a:pPr algn="ctr"/>
+            <a:endParaRPr/>
           </a:p>
         </p:txBody>
       </p:sp>
@@ -15127,7 +15258,7 @@
           <a:noFill/>
         </p:spPr>
         <p:txBody>
-          <a:bodyPr wrap="square" anchor="ctr" lIns="45720" rIns="45720" tIns="27432" bIns="27432">
+          <a:bodyPr wrap="square" lIns="45720" tIns="27432" rIns="45720" bIns="27432" anchor="ctr">
             <a:spAutoFit/>
           </a:bodyPr>
           <a:lstStyle/>
@@ -15138,7 +15269,7 @@
               </a:spcAft>
             </a:pPr>
             <a:r>
-              <a:rPr sz="1400" b="0" i="0" lang="en-US">
+              <a:rPr lang="en-US" sz="1400" b="0" i="0">
                 <a:solidFill>
                   <a:srgbClr val="2B1E3F"/>
                 </a:solidFill>
@@ -15191,6 +15322,7 @@
           <a:lstStyle/>
           <a:p>
             <a:pPr algn="ctr"/>
+            <a:endParaRPr/>
           </a:p>
         </p:txBody>
       </p:sp>
@@ -15211,7 +15343,7 @@
           <a:noFill/>
         </p:spPr>
         <p:txBody>
-          <a:bodyPr wrap="square" anchor="ctr" lIns="45720" rIns="45720" tIns="27432" bIns="27432">
+          <a:bodyPr wrap="square" lIns="45720" tIns="27432" rIns="45720" bIns="27432" anchor="ctr">
             <a:spAutoFit/>
           </a:bodyPr>
           <a:lstStyle/>
@@ -15222,7 +15354,7 @@
               </a:spcAft>
             </a:pPr>
             <a:r>
-              <a:rPr sz="1400" b="0" i="0" lang="en-US">
+              <a:rPr lang="en-US" sz="1400" b="0" i="0">
                 <a:solidFill>
                   <a:srgbClr val="2B1E3F"/>
                 </a:solidFill>
@@ -15275,6 +15407,7 @@
           <a:lstStyle/>
           <a:p>
             <a:pPr algn="ctr"/>
+            <a:endParaRPr/>
           </a:p>
         </p:txBody>
       </p:sp>
@@ -15295,7 +15428,7 @@
           <a:noFill/>
         </p:spPr>
         <p:txBody>
-          <a:bodyPr wrap="square" anchor="ctr" lIns="45720" rIns="45720" tIns="27432" bIns="27432">
+          <a:bodyPr wrap="square" lIns="45720" tIns="27432" rIns="45720" bIns="27432" anchor="ctr">
             <a:spAutoFit/>
           </a:bodyPr>
           <a:lstStyle/>
@@ -15306,7 +15439,7 @@
               </a:spcAft>
             </a:pPr>
             <a:r>
-              <a:rPr sz="1400" b="0" i="0" lang="en-US">
+              <a:rPr lang="en-US" sz="1400" b="0" i="0">
                 <a:solidFill>
                   <a:srgbClr val="2B1E3F"/>
                 </a:solidFill>
@@ -15359,6 +15492,7 @@
           <a:lstStyle/>
           <a:p>
             <a:pPr algn="ctr"/>
+            <a:endParaRPr/>
           </a:p>
         </p:txBody>
       </p:sp>
@@ -15379,7 +15513,7 @@
           <a:noFill/>
         </p:spPr>
         <p:txBody>
-          <a:bodyPr wrap="square" anchor="ctr" lIns="45720" rIns="45720" tIns="27432" bIns="27432">
+          <a:bodyPr wrap="square" lIns="45720" tIns="27432" rIns="45720" bIns="27432" anchor="ctr">
             <a:spAutoFit/>
           </a:bodyPr>
           <a:lstStyle/>
@@ -15390,7 +15524,7 @@
               </a:spcAft>
             </a:pPr>
             <a:r>
-              <a:rPr sz="1400" b="0" i="0" lang="en-US">
+              <a:rPr lang="en-US" sz="1400" b="0" i="0">
                 <a:solidFill>
                   <a:srgbClr val="2B1E3F"/>
                 </a:solidFill>
@@ -15443,6 +15577,7 @@
           <a:lstStyle/>
           <a:p>
             <a:pPr algn="ctr"/>
+            <a:endParaRPr/>
           </a:p>
         </p:txBody>
       </p:sp>
@@ -15463,7 +15598,7 @@
           <a:noFill/>
         </p:spPr>
         <p:txBody>
-          <a:bodyPr wrap="square" anchor="ctr" lIns="45720" rIns="45720" tIns="27432" bIns="27432">
+          <a:bodyPr wrap="square" lIns="45720" tIns="27432" rIns="45720" bIns="27432" anchor="ctr">
             <a:spAutoFit/>
           </a:bodyPr>
           <a:lstStyle/>
@@ -15474,7 +15609,7 @@
               </a:spcAft>
             </a:pPr>
             <a:r>
-              <a:rPr sz="1400" b="0" i="0" lang="en-US">
+              <a:rPr lang="en-US" sz="1400" b="0" i="0">
                 <a:solidFill>
                   <a:srgbClr val="2B1E3F"/>
                 </a:solidFill>
@@ -15527,6 +15662,7 @@
           <a:lstStyle/>
           <a:p>
             <a:pPr algn="ctr"/>
+            <a:endParaRPr/>
           </a:p>
         </p:txBody>
       </p:sp>
@@ -15547,7 +15683,7 @@
           <a:noFill/>
         </p:spPr>
         <p:txBody>
-          <a:bodyPr wrap="square" anchor="ctr" lIns="45720" rIns="45720" tIns="27432" bIns="27432">
+          <a:bodyPr wrap="square" lIns="45720" tIns="27432" rIns="45720" bIns="27432" anchor="ctr">
             <a:spAutoFit/>
           </a:bodyPr>
           <a:lstStyle/>
@@ -15558,7 +15694,7 @@
               </a:spcAft>
             </a:pPr>
             <a:r>
-              <a:rPr sz="1400" b="1" i="0" lang="en-US">
+              <a:rPr lang="en-US" sz="1400" b="1" i="0">
                 <a:solidFill>
                   <a:srgbClr val="2B1E3F"/>
                 </a:solidFill>
@@ -15611,6 +15747,7 @@
           <a:lstStyle/>
           <a:p>
             <a:pPr algn="ctr"/>
+            <a:endParaRPr/>
           </a:p>
         </p:txBody>
       </p:sp>
@@ -15631,7 +15768,7 @@
           <a:noFill/>
         </p:spPr>
         <p:txBody>
-          <a:bodyPr wrap="square" anchor="ctr" lIns="45720" rIns="45720" tIns="27432" bIns="27432">
+          <a:bodyPr wrap="square" lIns="45720" tIns="27432" rIns="45720" bIns="27432" anchor="ctr">
             <a:spAutoFit/>
           </a:bodyPr>
           <a:lstStyle/>
@@ -15642,7 +15779,7 @@
               </a:spcAft>
             </a:pPr>
             <a:r>
-              <a:rPr sz="1400" b="1" i="0" lang="en-US">
+              <a:rPr lang="en-US" sz="1400" b="1" i="0">
                 <a:solidFill>
                   <a:srgbClr val="2B1E3F"/>
                 </a:solidFill>
@@ -15695,6 +15832,7 @@
           <a:lstStyle/>
           <a:p>
             <a:pPr algn="ctr"/>
+            <a:endParaRPr/>
           </a:p>
         </p:txBody>
       </p:sp>
@@ -15715,7 +15853,7 @@
           <a:noFill/>
         </p:spPr>
         <p:txBody>
-          <a:bodyPr wrap="square" anchor="ctr" lIns="45720" rIns="45720" tIns="27432" bIns="27432">
+          <a:bodyPr wrap="square" lIns="45720" tIns="27432" rIns="45720" bIns="27432" anchor="ctr">
             <a:spAutoFit/>
           </a:bodyPr>
           <a:lstStyle/>
@@ -15726,7 +15864,7 @@
               </a:spcAft>
             </a:pPr>
             <a:r>
-              <a:rPr sz="1400" b="1" i="0" lang="en-US">
+              <a:rPr lang="en-US" sz="1400" b="1" i="0">
                 <a:solidFill>
                   <a:srgbClr val="2B1E3F"/>
                 </a:solidFill>
@@ -15779,6 +15917,7 @@
           <a:lstStyle/>
           <a:p>
             <a:pPr algn="ctr"/>
+            <a:endParaRPr/>
           </a:p>
         </p:txBody>
       </p:sp>
@@ -15799,7 +15938,7 @@
           <a:noFill/>
         </p:spPr>
         <p:txBody>
-          <a:bodyPr wrap="square" anchor="ctr" lIns="45720" rIns="45720" tIns="27432" bIns="27432">
+          <a:bodyPr wrap="square" lIns="45720" tIns="27432" rIns="45720" bIns="27432" anchor="ctr">
             <a:spAutoFit/>
           </a:bodyPr>
           <a:lstStyle/>
@@ -15810,7 +15949,7 @@
               </a:spcAft>
             </a:pPr>
             <a:r>
-              <a:rPr sz="1400" b="1" i="0" lang="en-US">
+              <a:rPr lang="en-US" sz="1400" b="1" i="0">
                 <a:solidFill>
                   <a:srgbClr val="2B1E3F"/>
                 </a:solidFill>
@@ -15863,6 +16002,7 @@
           <a:lstStyle/>
           <a:p>
             <a:pPr algn="ctr"/>
+            <a:endParaRPr/>
           </a:p>
         </p:txBody>
       </p:sp>
@@ -15883,7 +16023,7 @@
           <a:noFill/>
         </p:spPr>
         <p:txBody>
-          <a:bodyPr wrap="square" anchor="ctr" lIns="45720" rIns="45720" tIns="27432" bIns="27432">
+          <a:bodyPr wrap="square" lIns="45720" tIns="27432" rIns="45720" bIns="27432" anchor="ctr">
             <a:spAutoFit/>
           </a:bodyPr>
           <a:lstStyle/>
@@ -15894,7 +16034,7 @@
               </a:spcAft>
             </a:pPr>
             <a:r>
-              <a:rPr sz="1400" b="0" i="0" lang="en-US">
+              <a:rPr lang="en-US" sz="1400" b="0" i="0">
                 <a:solidFill>
                   <a:srgbClr val="2B1E3F"/>
                 </a:solidFill>
@@ -15947,6 +16087,7 @@
           <a:lstStyle/>
           <a:p>
             <a:pPr algn="ctr"/>
+            <a:endParaRPr/>
           </a:p>
         </p:txBody>
       </p:sp>
@@ -15967,7 +16108,7 @@
           <a:noFill/>
         </p:spPr>
         <p:txBody>
-          <a:bodyPr wrap="square" anchor="ctr" lIns="45720" rIns="45720" tIns="27432" bIns="27432">
+          <a:bodyPr wrap="square" lIns="45720" tIns="27432" rIns="45720" bIns="27432" anchor="ctr">
             <a:spAutoFit/>
           </a:bodyPr>
           <a:lstStyle/>
@@ -15978,7 +16119,7 @@
               </a:spcAft>
             </a:pPr>
             <a:r>
-              <a:rPr sz="1400" b="0" i="0" lang="en-US">
+              <a:rPr lang="en-US" sz="1400" b="0" i="0">
                 <a:solidFill>
                   <a:srgbClr val="2B1E3F"/>
                 </a:solidFill>
@@ -16031,6 +16172,7 @@
           <a:lstStyle/>
           <a:p>
             <a:pPr algn="ctr"/>
+            <a:endParaRPr/>
           </a:p>
         </p:txBody>
       </p:sp>
@@ -16051,7 +16193,7 @@
           <a:noFill/>
         </p:spPr>
         <p:txBody>
-          <a:bodyPr wrap="square" anchor="ctr" lIns="45720" rIns="45720" tIns="27432" bIns="27432">
+          <a:bodyPr wrap="square" lIns="45720" tIns="27432" rIns="45720" bIns="27432" anchor="ctr">
             <a:spAutoFit/>
           </a:bodyPr>
           <a:lstStyle/>
@@ -16062,7 +16204,7 @@
               </a:spcAft>
             </a:pPr>
             <a:r>
-              <a:rPr sz="1400" b="0" i="0" lang="en-US">
+              <a:rPr lang="en-US" sz="1400" b="0" i="0">
                 <a:solidFill>
                   <a:srgbClr val="2B1E3F"/>
                 </a:solidFill>
@@ -16115,6 +16257,7 @@
           <a:lstStyle/>
           <a:p>
             <a:pPr algn="ctr"/>
+            <a:endParaRPr/>
           </a:p>
         </p:txBody>
       </p:sp>
@@ -16135,7 +16278,7 @@
           <a:noFill/>
         </p:spPr>
         <p:txBody>
-          <a:bodyPr wrap="square" anchor="ctr" lIns="45720" rIns="45720" tIns="27432" bIns="27432">
+          <a:bodyPr wrap="square" lIns="45720" tIns="27432" rIns="45720" bIns="27432" anchor="ctr">
             <a:spAutoFit/>
           </a:bodyPr>
           <a:lstStyle/>
@@ -16146,7 +16289,7 @@
               </a:spcAft>
             </a:pPr>
             <a:r>
-              <a:rPr sz="1400" b="0" i="0" lang="en-US">
+              <a:rPr lang="en-US" sz="1400" b="0" i="0">
                 <a:solidFill>
                   <a:srgbClr val="2B1E3F"/>
                 </a:solidFill>
@@ -16175,12 +16318,12 @@
           <a:noFill/>
         </p:spPr>
         <p:txBody>
-          <a:bodyPr wrap="square" anchor="t" lIns="45720" rIns="45720" tIns="27432" bIns="27432">
+          <a:bodyPr wrap="square" lIns="45720" tIns="27432" rIns="45720" bIns="27432" anchor="t">
             <a:spAutoFit/>
           </a:bodyPr>
           <a:lstStyle/>
           <a:p>
-            <a:pPr algn="r" rtl="1" marR="274320" indent="-274320">
+            <a:pPr marR="274320" indent="-274320" algn="r" rtl="1">
               <a:spcAft>
                 <a:spcPts val="1000"/>
               </a:spcAft>
@@ -16191,7 +16334,7 @@
               <a:buChar char="•"/>
             </a:pPr>
             <a:r>
-              <a:rPr sz="1500" b="0" i="0" lang="he-IL">
+              <a:rPr lang="he-IL" sz="1500" b="0" i="0">
                 <a:solidFill>
                   <a:srgbClr val="2B1E3F"/>
                 </a:solidFill>
@@ -16202,7 +16345,7 @@
             </a:r>
           </a:p>
           <a:p>
-            <a:pPr algn="r" rtl="1" marR="274320" indent="-274320">
+            <a:pPr marR="274320" indent="-274320" algn="r" rtl="1">
               <a:spcAft>
                 <a:spcPts val="1000"/>
               </a:spcAft>
@@ -16213,7 +16356,7 @@
               <a:buChar char="•"/>
             </a:pPr>
             <a:r>
-              <a:rPr sz="1500" b="0" i="0" lang="he-IL">
+              <a:rPr lang="he-IL" sz="1500" b="0" i="0">
                 <a:solidFill>
                   <a:srgbClr val="2B1E3F"/>
                 </a:solidFill>
@@ -16224,7 +16367,7 @@
             </a:r>
           </a:p>
           <a:p>
-            <a:pPr algn="r" rtl="1" marR="274320" indent="-274320">
+            <a:pPr marR="274320" indent="-274320" algn="r" rtl="1">
               <a:spcAft>
                 <a:spcPts val="1000"/>
               </a:spcAft>
@@ -16235,7 +16378,7 @@
               <a:buChar char="•"/>
             </a:pPr>
             <a:r>
-              <a:rPr sz="1500" b="1" i="0" lang="en-US">
+              <a:rPr lang="en-US" sz="1500" b="1" i="0">
                 <a:solidFill>
                   <a:srgbClr val="7B5EA7"/>
                 </a:solidFill>
@@ -16245,7 +16388,7 @@
               <a:t>β₂</a:t>
             </a:r>
             <a:r>
-              <a:rPr sz="1500" b="0" i="0" lang="he-IL">
+              <a:rPr lang="he-IL" sz="1500" b="0" i="0">
                 <a:solidFill>
                   <a:srgbClr val="2B1E3F"/>
                 </a:solidFill>
@@ -16255,7 +16398,7 @@
               <a:t> — המרווח הרחב ביותר: </a:t>
             </a:r>
             <a:r>
-              <a:rPr sz="1500" b="0" i="0" lang="en-US">
+              <a:rPr lang="en-US" sz="1500" b="0" i="0">
                 <a:solidFill>
                   <a:srgbClr val="2B1E3F"/>
                 </a:solidFill>
@@ -16265,7 +16408,7 @@
               <a:t>‪X2‬</a:t>
             </a:r>
             <a:r>
-              <a:rPr sz="1500" b="0" i="0" lang="he-IL">
+              <a:rPr lang="he-IL" sz="1500" b="0" i="0">
                 <a:solidFill>
                   <a:srgbClr val="2B1E3F"/>
                 </a:solidFill>
@@ -16286,7 +16429,7 @@
 </file>
 
 <file path=ppt/slides/slide7.xml><?xml version="1.0" encoding="utf-8"?>
-<p:sld xmlns:a="http://schemas.openxmlformats.org/drawingml/2006/main" xmlns:p="http://schemas.openxmlformats.org/presentationml/2006/main" xmlns:r="http://schemas.openxmlformats.org/officeDocument/2006/relationships">
+<p:sld xmlns:a="http://schemas.openxmlformats.org/drawingml/2006/main" xmlns:r="http://schemas.openxmlformats.org/officeDocument/2006/relationships" xmlns:p="http://schemas.openxmlformats.org/presentationml/2006/main">
   <p:cSld>
     <p:bg>
       <p:bgPr>
@@ -16302,7 +16445,14 @@
         <p:cNvGrpSpPr/>
         <p:nvPr/>
       </p:nvGrpSpPr>
-      <p:grpSpPr/>
+      <p:grpSpPr>
+        <a:xfrm>
+          <a:off x="0" y="0"/>
+          <a:ext cx="0" cy="0"/>
+          <a:chOff x="0" y="0"/>
+          <a:chExt cx="0" cy="0"/>
+        </a:xfrm>
+      </p:grpSpPr>
       <p:sp>
         <p:nvSpPr>
           <p:cNvPr id="2" name="Title"/>
@@ -16320,7 +16470,7 @@
           <a:noFill/>
         </p:spPr>
         <p:txBody>
-          <a:bodyPr wrap="square" anchor="ctr" lIns="45720" rIns="45720" tIns="27432" bIns="27432">
+          <a:bodyPr wrap="square" lIns="45720" tIns="27432" rIns="45720" bIns="27432" anchor="ctr">
             <a:spAutoFit/>
           </a:bodyPr>
           <a:lstStyle/>
@@ -16331,7 +16481,7 @@
               </a:spcAft>
             </a:pPr>
             <a:r>
-              <a:rPr sz="3400" b="1" i="0" lang="he-IL">
+              <a:rPr lang="he-IL" sz="3400" b="1" i="0">
                 <a:solidFill>
                   <a:srgbClr val="2B1E3F"/>
                 </a:solidFill>
@@ -16386,6 +16536,7 @@
           <a:lstStyle/>
           <a:p>
             <a:pPr algn="ctr"/>
+            <a:endParaRPr/>
           </a:p>
         </p:txBody>
       </p:sp>
@@ -16426,12 +16577,12 @@
           </a:fontRef>
         </p:style>
         <p:txBody>
-          <a:bodyPr rtlCol="0" anchor="ctr" lIns="0" rIns="0" tIns="0" bIns="0"/>
+          <a:bodyPr lIns="0" tIns="0" rIns="0" bIns="0" rtlCol="0" anchor="ctr"/>
           <a:lstStyle/>
           <a:p>
             <a:pPr algn="ctr"/>
             <a:r>
-              <a:rPr sz="2200" b="1" i="0" lang="he-IL">
+              <a:rPr lang="he-IL" sz="2200" b="1" i="0">
                 <a:solidFill>
                   <a:srgbClr val="FFFFFF"/>
                 </a:solidFill>
@@ -16460,7 +16611,7 @@
           <a:noFill/>
         </p:spPr>
         <p:txBody>
-          <a:bodyPr wrap="square" anchor="ctr" lIns="45720" rIns="45720" tIns="27432" bIns="27432">
+          <a:bodyPr wrap="square" lIns="45720" tIns="27432" rIns="45720" bIns="27432" anchor="ctr">
             <a:spAutoFit/>
           </a:bodyPr>
           <a:lstStyle/>
@@ -16471,7 +16622,7 @@
               </a:spcAft>
             </a:pPr>
             <a:r>
-              <a:rPr sz="2200" b="1" i="0" lang="he-IL">
+              <a:rPr lang="he-IL" sz="2200" b="1" i="0">
                 <a:solidFill>
                   <a:srgbClr val="2B1E3F"/>
                 </a:solidFill>
@@ -16500,12 +16651,12 @@
           <a:noFill/>
         </p:spPr>
         <p:txBody>
-          <a:bodyPr wrap="square" anchor="t" lIns="45720" rIns="45720" tIns="27432" bIns="27432">
+          <a:bodyPr wrap="square" lIns="45720" tIns="27432" rIns="45720" bIns="27432" anchor="t">
             <a:spAutoFit/>
           </a:bodyPr>
           <a:lstStyle/>
           <a:p>
-            <a:pPr algn="r" rtl="1" marR="274320" indent="-274320">
+            <a:pPr marR="274320" indent="-274320" algn="r" rtl="1">
               <a:spcAft>
                 <a:spcPts val="1200"/>
               </a:spcAft>
@@ -16516,7 +16667,7 @@
               <a:buChar char="•"/>
             </a:pPr>
             <a:r>
-              <a:rPr sz="1600" b="0" i="0" lang="he-IL">
+              <a:rPr lang="he-IL" sz="1600" b="0" i="0">
                 <a:solidFill>
                   <a:srgbClr val="2B1E3F"/>
                 </a:solidFill>
@@ -16527,7 +16678,7 @@
             </a:r>
           </a:p>
           <a:p>
-            <a:pPr algn="r" rtl="1" marR="274320" indent="-274320">
+            <a:pPr marR="274320" indent="-274320" algn="r" rtl="1">
               <a:spcAft>
                 <a:spcPts val="1200"/>
               </a:spcAft>
@@ -16538,7 +16689,7 @@
               <a:buChar char="•"/>
             </a:pPr>
             <a:r>
-              <a:rPr sz="1600" b="0" i="0" lang="he-IL">
+              <a:rPr lang="he-IL" sz="1600" b="0" i="0">
                 <a:solidFill>
                   <a:srgbClr val="2B1E3F"/>
                 </a:solidFill>
@@ -16549,7 +16700,7 @@
             </a:r>
           </a:p>
           <a:p>
-            <a:pPr algn="r" rtl="1" marR="274320" indent="-274320">
+            <a:pPr marR="274320" indent="-274320" algn="r" rtl="1">
               <a:spcAft>
                 <a:spcPts val="1200"/>
               </a:spcAft>
@@ -16560,7 +16711,7 @@
               <a:buChar char="•"/>
             </a:pPr>
             <a:r>
-              <a:rPr sz="1600" b="0" i="0" lang="he-IL">
+              <a:rPr lang="he-IL" sz="1600" b="0" i="0">
                 <a:solidFill>
                   <a:srgbClr val="2B1E3F"/>
                 </a:solidFill>
@@ -16615,6 +16766,7 @@
           <a:lstStyle/>
           <a:p>
             <a:pPr algn="ctr"/>
+            <a:endParaRPr/>
           </a:p>
         </p:txBody>
       </p:sp>
@@ -16655,12 +16807,12 @@
           </a:fontRef>
         </p:style>
         <p:txBody>
-          <a:bodyPr rtlCol="0" anchor="ctr" lIns="0" rIns="0" tIns="0" bIns="0"/>
+          <a:bodyPr lIns="0" tIns="0" rIns="0" bIns="0" rtlCol="0" anchor="ctr"/>
           <a:lstStyle/>
           <a:p>
             <a:pPr algn="ctr"/>
             <a:r>
-              <a:rPr sz="2200" b="1" i="0" lang="en-US">
+              <a:rPr lang="en-US" sz="2200" b="1" i="0">
                 <a:solidFill>
                   <a:srgbClr val="FFFFFF"/>
                 </a:solidFill>
@@ -16689,7 +16841,7 @@
           <a:noFill/>
         </p:spPr>
         <p:txBody>
-          <a:bodyPr wrap="square" anchor="ctr" lIns="45720" rIns="45720" tIns="27432" bIns="27432">
+          <a:bodyPr wrap="square" lIns="45720" tIns="27432" rIns="45720" bIns="27432" anchor="ctr">
             <a:spAutoFit/>
           </a:bodyPr>
           <a:lstStyle/>
@@ -16700,7 +16852,7 @@
               </a:spcAft>
             </a:pPr>
             <a:r>
-              <a:rPr sz="2200" b="1" i="0" lang="he-IL">
+              <a:rPr lang="he-IL" sz="2200" b="1" i="0">
                 <a:solidFill>
                   <a:srgbClr val="2B1E3F"/>
                 </a:solidFill>
@@ -16729,12 +16881,12 @@
           <a:noFill/>
         </p:spPr>
         <p:txBody>
-          <a:bodyPr wrap="square" anchor="t" lIns="45720" rIns="45720" tIns="27432" bIns="27432">
+          <a:bodyPr wrap="square" lIns="45720" tIns="27432" rIns="45720" bIns="27432" anchor="t">
             <a:spAutoFit/>
           </a:bodyPr>
           <a:lstStyle/>
           <a:p>
-            <a:pPr algn="r" rtl="1" marR="274320" indent="-274320">
+            <a:pPr marR="274320" indent="-274320" algn="r" rtl="1">
               <a:spcAft>
                 <a:spcPts val="1200"/>
               </a:spcAft>
@@ -16745,7 +16897,7 @@
               <a:buChar char="•"/>
             </a:pPr>
             <a:r>
-              <a:rPr sz="1600" b="0" i="0" lang="he-IL">
+              <a:rPr lang="he-IL" sz="1600" b="0" i="0">
                 <a:solidFill>
                   <a:srgbClr val="2B1E3F"/>
                 </a:solidFill>
@@ -16756,7 +16908,7 @@
             </a:r>
           </a:p>
           <a:p>
-            <a:pPr algn="r" rtl="1" marR="274320" indent="-274320">
+            <a:pPr marR="274320" indent="-274320" algn="r" rtl="1">
               <a:spcAft>
                 <a:spcPts val="1200"/>
               </a:spcAft>
@@ -16767,7 +16919,7 @@
               <a:buChar char="•"/>
             </a:pPr>
             <a:r>
-              <a:rPr sz="1600" b="0" i="0" lang="he-IL">
+              <a:rPr lang="he-IL" sz="1600" b="0" i="0">
                 <a:solidFill>
                   <a:srgbClr val="2B1E3F"/>
                 </a:solidFill>
@@ -16778,7 +16930,7 @@
             </a:r>
           </a:p>
           <a:p>
-            <a:pPr algn="r" rtl="1" marR="274320" indent="-274320">
+            <a:pPr marR="274320" indent="-274320" algn="r" rtl="1">
               <a:spcAft>
                 <a:spcPts val="1200"/>
               </a:spcAft>
@@ -16789,7 +16941,7 @@
               <a:buChar char="•"/>
             </a:pPr>
             <a:r>
-              <a:rPr sz="1600" b="0" i="0" lang="he-IL">
+              <a:rPr lang="he-IL" sz="1600" b="0" i="0">
                 <a:solidFill>
                   <a:srgbClr val="2B1E3F"/>
                 </a:solidFill>
@@ -16844,6 +16996,7 @@
           <a:lstStyle/>
           <a:p>
             <a:pPr algn="ctr"/>
+            <a:endParaRPr/>
           </a:p>
         </p:txBody>
       </p:sp>
@@ -16864,7 +17017,7 @@
           <a:noFill/>
         </p:spPr>
         <p:txBody>
-          <a:bodyPr wrap="square" anchor="ctr" lIns="45720" rIns="45720" tIns="27432" bIns="27432">
+          <a:bodyPr wrap="square" lIns="45720" tIns="27432" rIns="45720" bIns="27432" anchor="ctr">
             <a:spAutoFit/>
           </a:bodyPr>
           <a:lstStyle/>
@@ -16875,7 +17028,7 @@
               </a:spcAft>
             </a:pPr>
             <a:r>
-              <a:rPr sz="1600" b="1" i="0" lang="he-IL">
+              <a:rPr lang="he-IL" sz="1600" b="1" i="0">
                 <a:solidFill>
                   <a:srgbClr val="7B5EA7"/>
                 </a:solidFill>
@@ -16896,7 +17049,7 @@
 </file>
 
 <file path=ppt/slides/slide8.xml><?xml version="1.0" encoding="utf-8"?>
-<p:sld xmlns:a="http://schemas.openxmlformats.org/drawingml/2006/main" xmlns:p="http://schemas.openxmlformats.org/presentationml/2006/main" xmlns:r="http://schemas.openxmlformats.org/officeDocument/2006/relationships">
+<p:sld xmlns:a="http://schemas.openxmlformats.org/drawingml/2006/main" xmlns:r="http://schemas.openxmlformats.org/officeDocument/2006/relationships" xmlns:p="http://schemas.openxmlformats.org/presentationml/2006/main">
   <p:cSld>
     <p:bg>
       <p:bgPr>
@@ -16912,7 +17065,14 @@
         <p:cNvGrpSpPr/>
         <p:nvPr/>
       </p:nvGrpSpPr>
-      <p:grpSpPr/>
+      <p:grpSpPr>
+        <a:xfrm>
+          <a:off x="0" y="0"/>
+          <a:ext cx="0" cy="0"/>
+          <a:chOff x="0" y="0"/>
+          <a:chExt cx="0" cy="0"/>
+        </a:xfrm>
+      </p:grpSpPr>
       <p:sp>
         <p:nvSpPr>
           <p:cNvPr id="2" name="Title"/>
@@ -16930,7 +17090,7 @@
           <a:noFill/>
         </p:spPr>
         <p:txBody>
-          <a:bodyPr wrap="square" anchor="ctr" lIns="45720" rIns="45720" tIns="27432" bIns="27432">
+          <a:bodyPr wrap="square" lIns="45720" tIns="27432" rIns="45720" bIns="27432" anchor="ctr">
             <a:spAutoFit/>
           </a:bodyPr>
           <a:lstStyle/>
@@ -16941,7 +17101,7 @@
               </a:spcAft>
             </a:pPr>
             <a:r>
-              <a:rPr sz="3400" b="1" i="0" lang="he-IL">
+              <a:rPr lang="he-IL" sz="3400" b="1" i="0">
                 <a:solidFill>
                   <a:srgbClr val="2B1E3F"/>
                 </a:solidFill>
@@ -16962,7 +17122,7 @@
           <p:nvPr/>
         </p:nvPicPr>
         <p:blipFill>
-          <a:blip r:embed="rId2"/>
+          <a:blip r:embed="rId3"/>
           <a:stretch>
             <a:fillRect/>
           </a:stretch>
@@ -17020,6 +17180,7 @@
           <a:lstStyle/>
           <a:p>
             <a:pPr algn="ctr"/>
+            <a:endParaRPr/>
           </a:p>
         </p:txBody>
       </p:sp>
@@ -17040,7 +17201,7 @@
           <a:noFill/>
         </p:spPr>
         <p:txBody>
-          <a:bodyPr wrap="square" anchor="ctr" lIns="45720" rIns="45720" tIns="27432" bIns="27432">
+          <a:bodyPr wrap="square" lIns="45720" tIns="27432" rIns="45720" bIns="27432" anchor="ctr">
             <a:spAutoFit/>
           </a:bodyPr>
           <a:lstStyle/>
@@ -17051,7 +17212,7 @@
               </a:spcAft>
             </a:pPr>
             <a:r>
-              <a:rPr sz="2400" b="1" i="0" lang="he-IL">
+              <a:rPr lang="he-IL" sz="2400" b="1" i="0">
                 <a:solidFill>
                   <a:srgbClr val="17A398"/>
                 </a:solidFill>
@@ -17080,7 +17241,7 @@
           <a:noFill/>
         </p:spPr>
         <p:txBody>
-          <a:bodyPr wrap="square" anchor="t" lIns="45720" rIns="45720" tIns="27432" bIns="27432">
+          <a:bodyPr wrap="square" lIns="45720" tIns="27432" rIns="45720" bIns="27432" anchor="t">
             <a:spAutoFit/>
           </a:bodyPr>
           <a:lstStyle/>
@@ -17091,7 +17252,7 @@
               </a:spcAft>
             </a:pPr>
             <a:r>
-              <a:rPr sz="1300" b="0" i="0" lang="he-IL">
+              <a:rPr lang="he-IL" sz="1300" b="0" i="0">
                 <a:solidFill>
                   <a:srgbClr val="6B6478"/>
                 </a:solidFill>
@@ -17146,6 +17307,7 @@
           <a:lstStyle/>
           <a:p>
             <a:pPr algn="ctr"/>
+            <a:endParaRPr/>
           </a:p>
         </p:txBody>
       </p:sp>
@@ -17166,7 +17328,7 @@
           <a:noFill/>
         </p:spPr>
         <p:txBody>
-          <a:bodyPr wrap="square" anchor="ctr" lIns="45720" rIns="45720" tIns="27432" bIns="27432">
+          <a:bodyPr wrap="square" lIns="45720" tIns="27432" rIns="45720" bIns="27432" anchor="ctr">
             <a:spAutoFit/>
           </a:bodyPr>
           <a:lstStyle/>
@@ -17177,7 +17339,7 @@
               </a:spcAft>
             </a:pPr>
             <a:r>
-              <a:rPr sz="2400" b="1" i="0" lang="he-IL">
+              <a:rPr lang="he-IL" sz="2400" b="1" i="0">
                 <a:solidFill>
                   <a:srgbClr val="E4572E"/>
                 </a:solidFill>
@@ -17206,7 +17368,7 @@
           <a:noFill/>
         </p:spPr>
         <p:txBody>
-          <a:bodyPr wrap="square" anchor="t" lIns="45720" rIns="45720" tIns="27432" bIns="27432">
+          <a:bodyPr wrap="square" lIns="45720" tIns="27432" rIns="45720" bIns="27432" anchor="t">
             <a:spAutoFit/>
           </a:bodyPr>
           <a:lstStyle/>
@@ -17217,7 +17379,7 @@
               </a:spcAft>
             </a:pPr>
             <a:r>
-              <a:rPr sz="1200" b="0" i="0" lang="he-IL">
+              <a:rPr lang="he-IL" sz="1200" b="0" i="0">
                 <a:solidFill>
                   <a:srgbClr val="6B6478"/>
                 </a:solidFill>
@@ -17272,6 +17434,7 @@
           <a:lstStyle/>
           <a:p>
             <a:pPr algn="ctr"/>
+            <a:endParaRPr/>
           </a:p>
         </p:txBody>
       </p:sp>
@@ -17292,7 +17455,7 @@
           <a:noFill/>
         </p:spPr>
         <p:txBody>
-          <a:bodyPr wrap="square" anchor="ctr" lIns="45720" rIns="45720" tIns="27432" bIns="27432">
+          <a:bodyPr wrap="square" lIns="45720" tIns="27432" rIns="45720" bIns="27432" anchor="ctr">
             <a:spAutoFit/>
           </a:bodyPr>
           <a:lstStyle/>
@@ -17303,7 +17466,7 @@
               </a:spcAft>
             </a:pPr>
             <a:r>
-              <a:rPr sz="2400" b="1" i="0" lang="he-IL">
+              <a:rPr lang="he-IL" sz="2400" b="1" i="0">
                 <a:solidFill>
                   <a:srgbClr val="7B5EA7"/>
                 </a:solidFill>
@@ -17332,7 +17495,7 @@
           <a:noFill/>
         </p:spPr>
         <p:txBody>
-          <a:bodyPr wrap="square" anchor="t" lIns="45720" rIns="45720" tIns="27432" bIns="27432">
+          <a:bodyPr wrap="square" lIns="45720" tIns="27432" rIns="45720" bIns="27432" anchor="t">
             <a:spAutoFit/>
           </a:bodyPr>
           <a:lstStyle/>
@@ -17343,7 +17506,7 @@
               </a:spcAft>
             </a:pPr>
             <a:r>
-              <a:rPr sz="1200" b="0" i="0" lang="he-IL">
+              <a:rPr lang="he-IL" sz="1200" b="0" i="0">
                 <a:solidFill>
                   <a:srgbClr val="6B6478"/>
                 </a:solidFill>
@@ -17372,12 +17535,12 @@
           <a:noFill/>
         </p:spPr>
         <p:txBody>
-          <a:bodyPr wrap="square" anchor="t" lIns="45720" rIns="45720" tIns="27432" bIns="27432">
+          <a:bodyPr wrap="square" lIns="45720" tIns="27432" rIns="45720" bIns="27432" anchor="t">
             <a:spAutoFit/>
           </a:bodyPr>
           <a:lstStyle/>
           <a:p>
-            <a:pPr algn="r" rtl="1" marR="274320" indent="-274320">
+            <a:pPr marR="274320" indent="-274320" algn="r" rtl="1">
               <a:spcAft>
                 <a:spcPts val="1000"/>
               </a:spcAft>
@@ -17388,7 +17551,7 @@
               <a:buChar char="•"/>
             </a:pPr>
             <a:r>
-              <a:rPr sz="1600" b="0" i="0" lang="he-IL">
+              <a:rPr lang="he-IL" sz="1600" b="0" i="0">
                 <a:solidFill>
                   <a:srgbClr val="2B1E3F"/>
                 </a:solidFill>
@@ -17399,7 +17562,7 @@
             </a:r>
           </a:p>
           <a:p>
-            <a:pPr algn="r" rtl="1" marR="274320" indent="-274320">
+            <a:pPr marR="274320" indent="-274320" algn="r" rtl="1">
               <a:spcAft>
                 <a:spcPts val="1000"/>
               </a:spcAft>
@@ -17410,7 +17573,7 @@
               <a:buChar char="•"/>
             </a:pPr>
             <a:r>
-              <a:rPr sz="1600" b="0" i="0" lang="he-IL">
+              <a:rPr lang="he-IL" sz="1600" b="0" i="0">
                 <a:solidFill>
                   <a:srgbClr val="2B1E3F"/>
                 </a:solidFill>
@@ -17420,7 +17583,7 @@
               <a:t>עובדים בסקאלת לוג: </a:t>
             </a:r>
             <a:r>
-              <a:rPr sz="1600" b="0" i="0" lang="en-US">
+              <a:rPr lang="en-US" sz="1600" b="0" i="0">
                 <a:solidFill>
                   <a:srgbClr val="2B1E3F"/>
                 </a:solidFill>
@@ -17431,7 +17594,7 @@
             </a:r>
           </a:p>
           <a:p>
-            <a:pPr algn="r" rtl="1" marR="274320" indent="-274320">
+            <a:pPr marR="274320" indent="-274320" algn="r" rtl="1">
               <a:spcAft>
                 <a:spcPts val="1000"/>
               </a:spcAft>
@@ -17442,7 +17605,7 @@
               <a:buChar char="•"/>
             </a:pPr>
             <a:r>
-              <a:rPr sz="1600" b="1" i="0" lang="he-IL">
+              <a:rPr lang="he-IL" sz="1600" b="1" i="0">
                 <a:solidFill>
                   <a:srgbClr val="7B5EA7"/>
                 </a:solidFill>
@@ -17452,7 +17615,7 @@
               <a:t>שאלה 1:</a:t>
             </a:r>
             <a:r>
-              <a:rPr sz="1600" b="0" i="0" lang="he-IL">
+              <a:rPr lang="he-IL" sz="1600" b="0" i="0">
                 <a:solidFill>
                   <a:srgbClr val="2B1E3F"/>
                 </a:solidFill>
@@ -17463,7 +17626,7 @@
             </a:r>
           </a:p>
           <a:p>
-            <a:pPr algn="r" rtl="1" marR="274320" indent="-274320">
+            <a:pPr marR="274320" indent="-274320" algn="r" rtl="1">
               <a:spcAft>
                 <a:spcPts val="1000"/>
               </a:spcAft>
@@ -17474,7 +17637,7 @@
               <a:buChar char="•"/>
             </a:pPr>
             <a:r>
-              <a:rPr sz="1600" b="1" i="0" lang="he-IL">
+              <a:rPr lang="he-IL" sz="1600" b="1" i="0">
                 <a:solidFill>
                   <a:srgbClr val="7B5EA7"/>
                 </a:solidFill>
@@ -17484,7 +17647,7 @@
               <a:t>שאלה 2:</a:t>
             </a:r>
             <a:r>
-              <a:rPr sz="1600" b="0" i="0" lang="he-IL">
+              <a:rPr lang="he-IL" sz="1600" b="0" i="0">
                 <a:solidFill>
                   <a:srgbClr val="2B1E3F"/>
                 </a:solidFill>
@@ -17505,7 +17668,7 @@
 </file>
 
 <file path=ppt/slides/slide9.xml><?xml version="1.0" encoding="utf-8"?>
-<p:sld xmlns:a="http://schemas.openxmlformats.org/drawingml/2006/main" xmlns:p="http://schemas.openxmlformats.org/presentationml/2006/main" xmlns:r="http://schemas.openxmlformats.org/officeDocument/2006/relationships">
+<p:sld xmlns:a="http://schemas.openxmlformats.org/drawingml/2006/main" xmlns:r="http://schemas.openxmlformats.org/officeDocument/2006/relationships" xmlns:p="http://schemas.openxmlformats.org/presentationml/2006/main">
   <p:cSld>
     <p:bg>
       <p:bgPr>
@@ -17521,7 +17684,14 @@
         <p:cNvGrpSpPr/>
         <p:nvPr/>
       </p:nvGrpSpPr>
-      <p:grpSpPr/>
+      <p:grpSpPr>
+        <a:xfrm>
+          <a:off x="0" y="0"/>
+          <a:ext cx="0" cy="0"/>
+          <a:chOff x="0" y="0"/>
+          <a:chExt cx="0" cy="0"/>
+        </a:xfrm>
+      </p:grpSpPr>
       <p:sp>
         <p:nvSpPr>
           <p:cNvPr id="2" name="Title"/>
@@ -17539,7 +17709,7 @@
           <a:noFill/>
         </p:spPr>
         <p:txBody>
-          <a:bodyPr wrap="square" anchor="ctr" lIns="45720" rIns="45720" tIns="27432" bIns="27432">
+          <a:bodyPr wrap="square" lIns="45720" tIns="27432" rIns="45720" bIns="27432" anchor="ctr">
             <a:spAutoFit/>
           </a:bodyPr>
           <a:lstStyle/>
@@ -17550,7 +17720,7 @@
               </a:spcAft>
             </a:pPr>
             <a:r>
-              <a:rPr sz="3400" b="1" i="0" lang="he-IL">
+              <a:rPr lang="he-IL" sz="3400" b="1" i="0">
                 <a:solidFill>
                   <a:srgbClr val="2B1E3F"/>
                 </a:solidFill>
@@ -17605,6 +17775,7 @@
           <a:lstStyle/>
           <a:p>
             <a:pPr algn="ctr"/>
+            <a:endParaRPr/>
           </a:p>
         </p:txBody>
       </p:sp>
@@ -17617,7 +17788,7 @@
           <p:nvPr/>
         </p:nvPicPr>
         <p:blipFill>
-          <a:blip r:embed="rId2"/>
+          <a:blip r:embed="rId3"/>
           <a:stretch>
             <a:fillRect/>
           </a:stretch>
@@ -17641,7 +17812,7 @@
           <p:nvPr/>
         </p:nvPicPr>
         <p:blipFill>
-          <a:blip r:embed="rId3"/>
+          <a:blip r:embed="rId4"/>
           <a:stretch>
             <a:fillRect/>
           </a:stretch>
@@ -17673,12 +17844,12 @@
           <a:noFill/>
         </p:spPr>
         <p:txBody>
-          <a:bodyPr wrap="square" anchor="t" lIns="45720" rIns="45720" tIns="27432" bIns="27432">
+          <a:bodyPr wrap="square" lIns="45720" tIns="27432" rIns="45720" bIns="27432" anchor="t">
             <a:spAutoFit/>
           </a:bodyPr>
           <a:lstStyle/>
           <a:p>
-            <a:pPr algn="r" rtl="1" marR="274320" indent="-274320">
+            <a:pPr marR="274320" indent="-274320" algn="r" rtl="1">
               <a:spcAft>
                 <a:spcPts val="1000"/>
               </a:spcAft>
@@ -17689,7 +17860,7 @@
               <a:buChar char="•"/>
             </a:pPr>
             <a:r>
-              <a:rPr sz="1600" b="0" i="0" lang="he-IL">
+              <a:rPr lang="he-IL" sz="1600" b="0" i="0">
                 <a:solidFill>
                   <a:srgbClr val="2B1E3F"/>
                 </a:solidFill>
@@ -17700,7 +17871,7 @@
             </a:r>
           </a:p>
           <a:p>
-            <a:pPr algn="r" rtl="1" marR="274320" indent="-274320">
+            <a:pPr marR="274320" indent="-274320" algn="r" rtl="1">
               <a:spcAft>
                 <a:spcPts val="1000"/>
               </a:spcAft>
@@ -17711,7 +17882,7 @@
               <a:buChar char="•"/>
             </a:pPr>
             <a:r>
-              <a:rPr sz="1600" b="0" i="0" lang="he-IL">
+              <a:rPr lang="he-IL" sz="1600" b="0" i="0">
                 <a:solidFill>
                   <a:srgbClr val="2B1E3F"/>
                 </a:solidFill>
@@ -17721,7 +17892,7 @@
               <a:t>שני נעלמים: הממוצע </a:t>
             </a:r>
             <a:r>
-              <a:rPr sz="1600" b="0" i="0" lang="en-US">
+              <a:rPr lang="en-US" sz="1600" b="0" i="0">
                 <a:solidFill>
                   <a:srgbClr val="2B1E3F"/>
                 </a:solidFill>
@@ -17731,7 +17902,7 @@
               <a:t>μ</a:t>
             </a:r>
             <a:r>
-              <a:rPr sz="1600" b="0" i="0" lang="he-IL">
+              <a:rPr lang="he-IL" sz="1600" b="0" i="0">
                 <a:solidFill>
                   <a:srgbClr val="2B1E3F"/>
                 </a:solidFill>
@@ -17741,7 +17912,7 @@
               <a:t> וסטיית התקן </a:t>
             </a:r>
             <a:r>
-              <a:rPr sz="1600" b="0" i="0" lang="en-US">
+              <a:rPr lang="en-US" sz="1600" b="0" i="0">
                 <a:solidFill>
                   <a:srgbClr val="2B1E3F"/>
                 </a:solidFill>
@@ -17796,6 +17967,7 @@
           <a:lstStyle/>
           <a:p>
             <a:pPr algn="ctr"/>
+            <a:endParaRPr/>
           </a:p>
         </p:txBody>
       </p:sp>
@@ -17827,7 +17999,7 @@
               </a:spcAft>
             </a:pPr>
             <a:r>
-              <a:rPr sz="1400" b="0" i="0" lang="en-US">
+              <a:rPr lang="en-US" sz="1400" b="0" i="0">
                 <a:solidFill>
                   <a:srgbClr val="EDE8F5"/>
                 </a:solidFill>
@@ -17844,7 +18016,7 @@
               </a:spcAft>
             </a:pPr>
             <a:r>
-              <a:rPr sz="1400" b="0" i="0" lang="en-US">
+              <a:rPr lang="en-US" sz="1400" b="0" i="0">
                 <a:solidFill>
                   <a:srgbClr val="EDE8F5"/>
                 </a:solidFill>
@@ -17861,7 +18033,7 @@
               </a:spcAft>
             </a:pPr>
             <a:r>
-              <a:rPr sz="1400" b="0" i="0" lang="en-US">
+              <a:rPr lang="en-US" sz="1400" b="0" i="0">
                 <a:solidFill>
                   <a:srgbClr val="EDE8F5"/>
                 </a:solidFill>
@@ -17878,7 +18050,7 @@
               </a:spcAft>
             </a:pPr>
             <a:r>
-              <a:rPr sz="1400" b="0" i="0" lang="en-US">
+              <a:rPr lang="en-US" sz="1400" b="0" i="0">
                 <a:solidFill>
                   <a:srgbClr val="EDE8F5"/>
                 </a:solidFill>
@@ -17895,7 +18067,7 @@
               </a:spcAft>
             </a:pPr>
             <a:r>
-              <a:rPr sz="1400" b="0" i="0" lang="en-US">
+              <a:rPr lang="en-US" sz="1400" b="0" i="0">
                 <a:solidFill>
                   <a:srgbClr val="EDE8F5"/>
                 </a:solidFill>
@@ -17912,7 +18084,7 @@
               </a:spcAft>
             </a:pPr>
             <a:r>
-              <a:rPr sz="1400" b="0" i="0" lang="en-US">
+              <a:rPr lang="en-US" sz="1400" b="0" i="0">
                 <a:solidFill>
                   <a:srgbClr val="EDE8F5"/>
                 </a:solidFill>
@@ -17967,6 +18139,7 @@
           <a:lstStyle/>
           <a:p>
             <a:pPr algn="ctr"/>
+            <a:endParaRPr/>
           </a:p>
         </p:txBody>
       </p:sp>
@@ -18007,12 +18180,12 @@
           </a:fontRef>
         </p:style>
         <p:txBody>
-          <a:bodyPr rtlCol="0" anchor="ctr" lIns="0" rIns="0" tIns="0" bIns="0"/>
+          <a:bodyPr lIns="0" tIns="0" rIns="0" bIns="0" rtlCol="0" anchor="ctr"/>
           <a:lstStyle/>
           <a:p>
             <a:pPr algn="ctr"/>
             <a:r>
-              <a:rPr sz="2200" b="1" i="0" lang="en-US">
+              <a:rPr lang="en-US" sz="2200" b="1" i="0">
                 <a:solidFill>
                   <a:srgbClr val="FFFFFF"/>
                 </a:solidFill>
@@ -18041,7 +18214,7 @@
           <a:noFill/>
         </p:spPr>
         <p:txBody>
-          <a:bodyPr wrap="square" anchor="t" lIns="45720" rIns="45720" tIns="27432" bIns="27432">
+          <a:bodyPr wrap="square" lIns="45720" tIns="27432" rIns="45720" bIns="27432" anchor="t">
             <a:spAutoFit/>
           </a:bodyPr>
           <a:lstStyle/>
@@ -18052,7 +18225,7 @@
               </a:spcAft>
             </a:pPr>
             <a:r>
-              <a:rPr sz="1600" b="1" i="0" lang="he-IL">
+              <a:rPr lang="he-IL" sz="1600" b="1" i="0">
                 <a:solidFill>
                   <a:srgbClr val="2B1E3F"/>
                 </a:solidFill>
@@ -18081,7 +18254,7 @@
           <a:noFill/>
         </p:spPr>
         <p:txBody>
-          <a:bodyPr wrap="square" anchor="t" lIns="45720" rIns="45720" tIns="27432" bIns="27432">
+          <a:bodyPr wrap="square" lIns="45720" tIns="27432" rIns="45720" bIns="27432" anchor="t">
             <a:spAutoFit/>
           </a:bodyPr>
           <a:lstStyle/>
@@ -18092,7 +18265,7 @@
               </a:spcAft>
             </a:pPr>
             <a:r>
-              <a:rPr sz="1300" b="0" i="0" lang="he-IL">
+              <a:rPr lang="he-IL" sz="1300" b="0" i="0" dirty="0">
                 <a:solidFill>
                   <a:srgbClr val="6B6478"/>
                 </a:solidFill>
@@ -18147,6 +18320,7 @@
           <a:lstStyle/>
           <a:p>
             <a:pPr algn="ctr"/>
+            <a:endParaRPr/>
           </a:p>
         </p:txBody>
       </p:sp>
@@ -18187,12 +18361,12 @@
           </a:fontRef>
         </p:style>
         <p:txBody>
-          <a:bodyPr rtlCol="0" anchor="ctr" lIns="0" rIns="0" tIns="0" bIns="0"/>
+          <a:bodyPr lIns="0" tIns="0" rIns="0" bIns="0" rtlCol="0" anchor="ctr"/>
           <a:lstStyle/>
           <a:p>
             <a:pPr algn="ctr"/>
             <a:r>
-              <a:rPr sz="2200" b="1" i="0" lang="en-US">
+              <a:rPr lang="en-US" sz="2200" b="1" i="0">
                 <a:solidFill>
                   <a:srgbClr val="FFFFFF"/>
                 </a:solidFill>
@@ -18221,7 +18395,7 @@
           <a:noFill/>
         </p:spPr>
         <p:txBody>
-          <a:bodyPr wrap="square" anchor="t" lIns="45720" rIns="45720" tIns="27432" bIns="27432">
+          <a:bodyPr wrap="square" lIns="45720" tIns="27432" rIns="45720" bIns="27432" anchor="t">
             <a:spAutoFit/>
           </a:bodyPr>
           <a:lstStyle/>
@@ -18232,7 +18406,7 @@
               </a:spcAft>
             </a:pPr>
             <a:r>
-              <a:rPr sz="1600" b="1" i="0" lang="he-IL">
+              <a:rPr lang="he-IL" sz="1600" b="1" i="0">
                 <a:solidFill>
                   <a:srgbClr val="2B1E3F"/>
                 </a:solidFill>
@@ -18261,7 +18435,7 @@
           <a:noFill/>
         </p:spPr>
         <p:txBody>
-          <a:bodyPr wrap="square" anchor="t" lIns="45720" rIns="45720" tIns="27432" bIns="27432">
+          <a:bodyPr wrap="square" lIns="45720" tIns="27432" rIns="45720" bIns="27432" anchor="t">
             <a:spAutoFit/>
           </a:bodyPr>
           <a:lstStyle/>
@@ -18272,7 +18446,7 @@
               </a:spcAft>
             </a:pPr>
             <a:r>
-              <a:rPr sz="1300" b="0" i="0" lang="he-IL">
+              <a:rPr lang="he-IL" sz="1300" b="0" i="0">
                 <a:solidFill>
                   <a:srgbClr val="6B6478"/>
                 </a:solidFill>
@@ -18623,44 +18797,44 @@
         <a:sysClr val="window" lastClr="FFFFFF"/>
       </a:lt1>
       <a:dk2>
-        <a:srgbClr val="1F497D"/>
+        <a:srgbClr val="0E2841"/>
       </a:dk2>
       <a:lt2>
-        <a:srgbClr val="EEECE1"/>
+        <a:srgbClr val="E8E8E8"/>
       </a:lt2>
       <a:accent1>
-        <a:srgbClr val="4F81BD"/>
+        <a:srgbClr val="156082"/>
       </a:accent1>
       <a:accent2>
-        <a:srgbClr val="C0504D"/>
+        <a:srgbClr val="E97132"/>
       </a:accent2>
       <a:accent3>
-        <a:srgbClr val="9BBB59"/>
+        <a:srgbClr val="196B24"/>
       </a:accent3>
       <a:accent4>
-        <a:srgbClr val="8064A2"/>
+        <a:srgbClr val="0F9ED5"/>
       </a:accent4>
       <a:accent5>
-        <a:srgbClr val="4BACC6"/>
+        <a:srgbClr val="A02B93"/>
       </a:accent5>
       <a:accent6>
-        <a:srgbClr val="F79646"/>
+        <a:srgbClr val="4EA72E"/>
       </a:accent6>
       <a:hlink>
-        <a:srgbClr val="0000FF"/>
+        <a:srgbClr val="467886"/>
       </a:hlink>
       <a:folHlink>
-        <a:srgbClr val="800080"/>
+        <a:srgbClr val="96607D"/>
       </a:folHlink>
     </a:clrScheme>
     <a:fontScheme name="Office">
       <a:majorFont>
-        <a:latin typeface="Calibri"/>
+        <a:latin typeface="Aptos Display" panose="02110004020202020204"/>
         <a:ea typeface=""/>
         <a:cs typeface=""/>
-        <a:font script="Jpan" typeface="ＭＳ Ｐゴシック"/>
+        <a:font script="Jpan" typeface="游ゴシック Light"/>
         <a:font script="Hang" typeface="맑은 고딕"/>
-        <a:font script="Hans" typeface="宋体"/>
+        <a:font script="Hans" typeface="等线 Light"/>
         <a:font script="Hant" typeface="新細明體"/>
         <a:font script="Arab" typeface="Times New Roman"/>
         <a:font script="Hebr" typeface="Times New Roman"/>
@@ -18688,14 +18862,31 @@
         <a:font script="Viet" typeface="Times New Roman"/>
         <a:font script="Uigh" typeface="Microsoft Uighur"/>
         <a:font script="Geor" typeface="Sylfaen"/>
+        <a:font script="Armn" typeface="Arial"/>
+        <a:font script="Bugi" typeface="Leelawadee UI"/>
+        <a:font script="Bopo" typeface="Microsoft JhengHei"/>
+        <a:font script="Java" typeface="Javanese Text"/>
+        <a:font script="Lisu" typeface="Segoe UI"/>
+        <a:font script="Mymr" typeface="Myanmar Text"/>
+        <a:font script="Nkoo" typeface="Ebrima"/>
+        <a:font script="Olck" typeface="Nirmala UI"/>
+        <a:font script="Osma" typeface="Ebrima"/>
+        <a:font script="Phag" typeface="Phagspa"/>
+        <a:font script="Syrn" typeface="Estrangelo Edessa"/>
+        <a:font script="Syrj" typeface="Estrangelo Edessa"/>
+        <a:font script="Syre" typeface="Estrangelo Edessa"/>
+        <a:font script="Sora" typeface="Nirmala UI"/>
+        <a:font script="Tale" typeface="Microsoft Tai Le"/>
+        <a:font script="Talu" typeface="Microsoft New Tai Lue"/>
+        <a:font script="Tfng" typeface="Ebrima"/>
       </a:majorFont>
       <a:minorFont>
-        <a:latin typeface="Calibri"/>
+        <a:latin typeface="Aptos" panose="02110004020202020204"/>
         <a:ea typeface=""/>
         <a:cs typeface=""/>
-        <a:font script="Jpan" typeface="ＭＳ Ｐゴシック"/>
+        <a:font script="Jpan" typeface="游ゴシック"/>
         <a:font script="Hang" typeface="맑은 고딕"/>
-        <a:font script="Hans" typeface="宋体"/>
+        <a:font script="Hans" typeface="等线"/>
         <a:font script="Hant" typeface="新細明體"/>
         <a:font script="Arab" typeface="Arial"/>
         <a:font script="Hebr" typeface="Arial"/>
@@ -18723,6 +18914,23 @@
         <a:font script="Viet" typeface="Arial"/>
         <a:font script="Uigh" typeface="Microsoft Uighur"/>
         <a:font script="Geor" typeface="Sylfaen"/>
+        <a:font script="Armn" typeface="Arial"/>
+        <a:font script="Bugi" typeface="Leelawadee UI"/>
+        <a:font script="Bopo" typeface="Microsoft JhengHei"/>
+        <a:font script="Java" typeface="Javanese Text"/>
+        <a:font script="Lisu" typeface="Segoe UI"/>
+        <a:font script="Mymr" typeface="Myanmar Text"/>
+        <a:font script="Nkoo" typeface="Ebrima"/>
+        <a:font script="Olck" typeface="Nirmala UI"/>
+        <a:font script="Osma" typeface="Ebrima"/>
+        <a:font script="Phag" typeface="Phagspa"/>
+        <a:font script="Syrn" typeface="Estrangelo Edessa"/>
+        <a:font script="Syrj" typeface="Estrangelo Edessa"/>
+        <a:font script="Syre" typeface="Estrangelo Edessa"/>
+        <a:font script="Sora" typeface="Nirmala UI"/>
+        <a:font script="Tale" typeface="Microsoft Tai Le"/>
+        <a:font script="Talu" typeface="Microsoft New Tai Lue"/>
+        <a:font script="Tfng" typeface="Ebrima"/>
       </a:minorFont>
     </a:fontScheme>
     <a:fmtScheme name="Office">
@@ -18734,180 +18942,136 @@
           <a:gsLst>
             <a:gs pos="0">
               <a:schemeClr val="phClr">
-                <a:tint val="50000"/>
-                <a:satMod val="300000"/>
+                <a:lumMod val="110000"/>
+                <a:satMod val="105000"/>
+                <a:tint val="67000"/>
               </a:schemeClr>
             </a:gs>
-            <a:gs pos="35000">
+            <a:gs pos="50000">
               <a:schemeClr val="phClr">
-                <a:tint val="37000"/>
-                <a:satMod val="300000"/>
+                <a:lumMod val="105000"/>
+                <a:satMod val="103000"/>
+                <a:tint val="73000"/>
               </a:schemeClr>
             </a:gs>
             <a:gs pos="100000">
               <a:schemeClr val="phClr">
-                <a:tint val="15000"/>
-                <a:satMod val="350000"/>
+                <a:lumMod val="105000"/>
+                <a:satMod val="109000"/>
+                <a:tint val="81000"/>
               </a:schemeClr>
             </a:gs>
           </a:gsLst>
-          <a:lin ang="16200000" scaled="1"/>
+          <a:lin ang="5400000" scaled="0"/>
         </a:gradFill>
         <a:gradFill rotWithShape="1">
           <a:gsLst>
             <a:gs pos="0">
               <a:schemeClr val="phClr">
-                <a:tint val="100000"/>
+                <a:satMod val="103000"/>
+                <a:lumMod val="102000"/>
+                <a:tint val="94000"/>
+              </a:schemeClr>
+            </a:gs>
+            <a:gs pos="50000">
+              <a:schemeClr val="phClr">
+                <a:satMod val="110000"/>
+                <a:lumMod val="100000"/>
                 <a:shade val="100000"/>
-                <a:satMod val="130000"/>
               </a:schemeClr>
             </a:gs>
             <a:gs pos="100000">
               <a:schemeClr val="phClr">
-                <a:tint val="50000"/>
-                <a:shade val="100000"/>
-                <a:satMod val="350000"/>
+                <a:lumMod val="99000"/>
+                <a:satMod val="120000"/>
+                <a:shade val="78000"/>
               </a:schemeClr>
             </a:gs>
           </a:gsLst>
-          <a:lin ang="16200000" scaled="0"/>
+          <a:lin ang="5400000" scaled="0"/>
         </a:gradFill>
       </a:fillStyleLst>
       <a:lnStyleLst>
-        <a:ln w="9525" cap="flat" cmpd="sng" algn="ctr">
+        <a:ln w="12700" cap="flat" cmpd="sng" algn="ctr">
           <a:solidFill>
-            <a:schemeClr val="phClr">
-              <a:shade val="95000"/>
-              <a:satMod val="105000"/>
-            </a:schemeClr>
+            <a:schemeClr val="phClr"/>
           </a:solidFill>
           <a:prstDash val="solid"/>
+          <a:miter lim="800000"/>
+        </a:ln>
+        <a:ln w="19050" cap="flat" cmpd="sng" algn="ctr">
+          <a:solidFill>
+            <a:schemeClr val="phClr"/>
+          </a:solidFill>
+          <a:prstDash val="solid"/>
+          <a:miter lim="800000"/>
         </a:ln>
         <a:ln w="25400" cap="flat" cmpd="sng" algn="ctr">
           <a:solidFill>
             <a:schemeClr val="phClr"/>
           </a:solidFill>
           <a:prstDash val="solid"/>
-        </a:ln>
-        <a:ln w="38100" cap="flat" cmpd="sng" algn="ctr">
-          <a:solidFill>
-            <a:schemeClr val="phClr"/>
-          </a:solidFill>
-          <a:prstDash val="solid"/>
+          <a:miter lim="800000"/>
         </a:ln>
       </a:lnStyleLst>
       <a:effectStyleLst>
         <a:effectStyle>
+          <a:effectLst/>
+        </a:effectStyle>
+        <a:effectStyle>
+          <a:effectLst/>
+        </a:effectStyle>
+        <a:effectStyle>
           <a:effectLst>
-            <a:outerShdw blurRad="40000" dist="20000" dir="5400000" rotWithShape="0">
+            <a:outerShdw blurRad="57150" dist="19050" dir="5400000" algn="ctr" rotWithShape="0">
               <a:srgbClr val="000000">
-                <a:alpha val="38000"/>
+                <a:alpha val="63000"/>
               </a:srgbClr>
             </a:outerShdw>
           </a:effectLst>
-        </a:effectStyle>
-        <a:effectStyle>
-          <a:effectLst>
-            <a:outerShdw blurRad="40000" dist="23000" dir="5400000" rotWithShape="0">
-              <a:srgbClr val="000000">
-                <a:alpha val="35000"/>
-              </a:srgbClr>
-            </a:outerShdw>
-          </a:effectLst>
-        </a:effectStyle>
-        <a:effectStyle>
-          <a:effectLst>
-            <a:outerShdw blurRad="40000" dist="23000" dir="5400000" rotWithShape="0">
-              <a:srgbClr val="000000">
-                <a:alpha val="35000"/>
-              </a:srgbClr>
-            </a:outerShdw>
-          </a:effectLst>
-          <a:scene3d>
-            <a:camera prst="orthographicFront">
-              <a:rot lat="0" lon="0" rev="0"/>
-            </a:camera>
-            <a:lightRig rig="threePt" dir="t">
-              <a:rot lat="0" lon="0" rev="1200000"/>
-            </a:lightRig>
-          </a:scene3d>
-          <a:sp3d>
-            <a:bevelT w="63500" h="25400"/>
-          </a:sp3d>
         </a:effectStyle>
       </a:effectStyleLst>
       <a:bgFillStyleLst>
         <a:solidFill>
           <a:schemeClr val="phClr"/>
         </a:solidFill>
+        <a:solidFill>
+          <a:schemeClr val="phClr">
+            <a:tint val="95000"/>
+            <a:satMod val="170000"/>
+          </a:schemeClr>
+        </a:solidFill>
         <a:gradFill rotWithShape="1">
           <a:gsLst>
             <a:gs pos="0">
               <a:schemeClr val="phClr">
-                <a:tint val="40000"/>
-                <a:satMod val="350000"/>
+                <a:tint val="93000"/>
+                <a:satMod val="150000"/>
+                <a:shade val="98000"/>
+                <a:lumMod val="102000"/>
               </a:schemeClr>
             </a:gs>
-            <a:gs pos="40000">
+            <a:gs pos="50000">
               <a:schemeClr val="phClr">
-                <a:tint val="45000"/>
-                <a:shade val="99000"/>
-                <a:satMod val="350000"/>
+                <a:tint val="98000"/>
+                <a:satMod val="130000"/>
+                <a:shade val="90000"/>
+                <a:lumMod val="103000"/>
               </a:schemeClr>
             </a:gs>
             <a:gs pos="100000">
               <a:schemeClr val="phClr">
-                <a:shade val="20000"/>
-                <a:satMod val="255000"/>
+                <a:shade val="63000"/>
+                <a:satMod val="120000"/>
               </a:schemeClr>
             </a:gs>
           </a:gsLst>
-          <a:path path="circle">
-            <a:fillToRect l="50000" t="-80000" r="50000" b="180000"/>
-          </a:path>
-        </a:gradFill>
-        <a:gradFill rotWithShape="1">
-          <a:gsLst>
-            <a:gs pos="0">
-              <a:schemeClr val="phClr">
-                <a:tint val="80000"/>
-                <a:satMod val="300000"/>
-              </a:schemeClr>
-            </a:gs>
-            <a:gs pos="100000">
-              <a:schemeClr val="phClr">
-                <a:shade val="30000"/>
-                <a:satMod val="200000"/>
-              </a:schemeClr>
-            </a:gs>
-          </a:gsLst>
-          <a:path path="circle">
-            <a:fillToRect l="50000" t="50000" r="50000" b="50000"/>
-          </a:path>
+          <a:lin ang="5400000" scaled="0"/>
         </a:gradFill>
       </a:bgFillStyleLst>
     </a:fmtScheme>
   </a:themeElements>
   <a:objectDefaults>
-    <a:spDef>
-      <a:spPr/>
-      <a:bodyPr/>
-      <a:lstStyle/>
-      <a:style>
-        <a:lnRef idx="1">
-          <a:schemeClr val="accent1"/>
-        </a:lnRef>
-        <a:fillRef idx="3">
-          <a:schemeClr val="accent1"/>
-        </a:fillRef>
-        <a:effectRef idx="2">
-          <a:schemeClr val="accent1"/>
-        </a:effectRef>
-        <a:fontRef idx="minor">
-          <a:schemeClr val="lt1"/>
-        </a:fontRef>
-      </a:style>
-    </a:spDef>
     <a:lnDef>
       <a:spPr/>
       <a:bodyPr/>
@@ -18929,5 +19093,10 @@
     </a:lnDef>
   </a:objectDefaults>
   <a:extraClrSchemeLst/>
+  <a:extLst>
+    <a:ext uri="{05A4C25C-085E-4340-85A3-A5531E510DB2}">
+      <thm15:themeFamily xmlns:thm15="http://schemas.microsoft.com/office/thememl/2012/main" name="Office Theme" id="{2E142A2C-CD16-42D6-873A-C26D2A0506FA}" vid="{1BDDFF52-6CD6-40A5-AB3C-68EB2F1E4D0A}"/>
+    </a:ext>
+  </a:extLst>
 </a:theme>
 </file>